--- a/BestdoriHelper-使用说明/BestdoriHelper-使用说明.pptx
+++ b/BestdoriHelper-使用说明/BestdoriHelper-使用说明.pptx
@@ -1,11 +1,11 @@
 
 <file path=ppt/presentation.xml><?xml version="1.0" encoding="utf-8"?>
-<p:presentation xmlns:p="http://schemas.openxmlformats.org/presentationml/2006/main" xmlns:r="http://schemas.openxmlformats.org/officeDocument/2006/relationships" xmlns:a="http://schemas.openxmlformats.org/drawingml/2006/main" firstSlideNum="1">
+<p:presentation xmlns:p="http://schemas.openxmlformats.org/presentationml/2006/main" xmlns:a="http://schemas.openxmlformats.org/drawingml/2006/main" xmlns:r="http://schemas.openxmlformats.org/officeDocument/2006/relationships" firstSlideNum="1">
   <p:sldMasterIdLst>
     <p:sldMasterId id="2147483648" r:id="rId0"/>
   </p:sldMasterIdLst>
   <p:notesMasterIdLst>
-    <p:notesMasterId r:id="rId15"/>
+    <p:notesMasterId r:id="rId16"/>
   </p:notesMasterIdLst>
   <p:sldIdLst>
     <p:sldId id="256" r:id="rId1"/>
@@ -22,6 +22,7 @@
     <p:sldId id="267" r:id="rId12"/>
     <p:sldId id="268" r:id="rId13"/>
     <p:sldId id="269" r:id="rId14"/>
+    <p:sldId id="270" r:id="rId15"/>
   </p:sldIdLst>
   <p:sldSz cx="12192000" cy="6858000"/>
   <p:notesSz cx="6858000" cy="12192000"/>
@@ -271,7 +272,7 @@
 </file>
 
 <file path=ppt/slideMasters/slideMaster1.xml><?xml version="1.0" encoding="utf-8"?>
-<p:sldMaster xmlns:p="http://schemas.openxmlformats.org/presentationml/2006/main" xmlns:r="http://schemas.openxmlformats.org/officeDocument/2006/relationships" xmlns:a="http://schemas.openxmlformats.org/drawingml/2006/main">
+<p:sldMaster xmlns:p="http://schemas.openxmlformats.org/presentationml/2006/main" xmlns:a="http://schemas.openxmlformats.org/drawingml/2006/main" xmlns:r="http://schemas.openxmlformats.org/officeDocument/2006/relationships">
   <p:cSld>
     <p:bg>
       <p:bgRef idx="1001">
@@ -553,11 +554,11 @@
 </file>
 
 <file path=ppt/slides/slide1.xml><?xml version="1.0" encoding="utf-8"?>
-<p:sld xmlns:p="http://schemas.openxmlformats.org/presentationml/2006/main" xmlns:r="http://schemas.openxmlformats.org/officeDocument/2006/relationships" xmlns:a="http://schemas.openxmlformats.org/drawingml/2006/main" xmlns:asvg="http://schemas.microsoft.com/office/drawing/2016/SVG/main" xmlns:mc="http://schemas.openxmlformats.org/markup-compatibility/2006" mc:Ignorable="asvg">
+<p:sld xmlns:p="http://schemas.openxmlformats.org/presentationml/2006/main" xmlns:a="http://schemas.openxmlformats.org/drawingml/2006/main" xmlns:asvg="http://schemas.microsoft.com/office/drawing/2016/SVG/main" xmlns:r="http://schemas.openxmlformats.org/officeDocument/2006/relationships" xmlns:mc="http://schemas.openxmlformats.org/markup-compatibility/2006" mc:Ignorable="asvg">
   <p:cSld>
     <p:spTree>
       <p:nvGrpSpPr>
-        <p:cNvPr id="1" name=""/>
+        <p:cNvPr id="1" name="" descr="&lt;Slide style={{ width: 1280, height: 720, padding: 0, position: 'relative', overflow: 'hidden', background: '#1F2430' }}&gt;&#13;&#10;&#13;&#10;    {/* ===== 背景：抽象几何（深色科技氛围）===== */}&#13;&#10;    &lt;Box style={{ position: 'absolute', top: 0, left: 0, width: 1280, height: 720 }}&gt;&#13;&#10;        &lt;svg width={1280} height={720} viewBox='0 0 1280 720'&gt;&#13;&#10;            {/* 底色渐变 */}&#13;&#10;            &lt;defs&gt;&#13;&#10;                &lt;linearGradient id='coverBg' x1='0' y1='0' x2='1' y2='1'&gt;&#13;&#10;                    &lt;stop offset='0%' stopColor='#1F2430' /&gt;&#13;&#10;                    &lt;stop offset='55%' stopColor='#252B39' /&gt;&#13;&#10;                    &lt;stop offset='100%' stopColor='#2C3444' /&gt;&#13;&#10;                &lt;/linearGradient&gt;&#13;&#10;                &lt;radialGradient id='glow' cx='0.78' cy='0.28' r='0.62'&gt;&#13;&#10;                    &lt;stop offset='0%' stopColor='#E8478B' stopOpacity='0.42' /&gt;&#13;&#10;                    &lt;stop offset='55%' stopColor='#E8478B' stopOpacity='0.10' /&gt;&#13;&#10;                    &lt;stop offset='100%' stopColor='#E8478B' stopOpacity='0' /&gt;&#13;&#10;                &lt;/radialGradient&gt;&#13;&#10;                &lt;linearGradient id='bar' x1='0' y1='0' x2='1' y2='0'&gt;&#13;&#10;                    &lt;stop offset='0%' stopColor='#E8478B' /&gt;&#13;&#10;                    &lt;stop offset='100%' stopColor='#E8478B' stopOpacity='0.15' /&gt;&#13;&#10;                &lt;/linearGradient&gt;&#13;&#10;            &lt;/defs&gt;&#13;&#10;&#13;&#10;            &lt;rect x='0' y='0' width='1280' height='720' fill='url(#coverBg)' /&gt;&#13;&#10;            &lt;rect x='0' y='0' width='1280' height='720' fill='url(#glow)' /&gt;&#13;&#10;&#13;&#10;            {/* 网格线：暗示&quot;逐格切分&quot;这件事本身 */}&#13;&#10;            &lt;g stroke='#FFFFFF' strokeOpacity='0.05' strokeWidth='1'&gt;&#13;&#10;                &lt;line x1='0' y1='180' x2='1280' y2='180' /&gt;&#13;&#10;                &lt;line x1='0' y1='360' x2='1280' y2='360' /&gt;&#13;&#10;                &lt;line x1='0' y1='540' x2='1280' y2='540' /&gt;&#13;&#10;                &lt;line x1='320' y1='0' x2='320' y2='720' /&gt;&#13;&#10;                &lt;line x1='640' y1='0' x2='640' y2='720' /&gt;&#13;&#10;                &lt;line x1='960' y1='0' x2='960' y2='720' /&gt;&#13;&#10;            &lt;/g&gt;&#13;&#10;&#13;&#10;            {/* 右侧卡面示意：几个圆角方块，呼应&quot;卡&quot; */}&#13;&#10;            &lt;g opacity='0.9'&gt;&#13;&#10;                &lt;rect x='842' y='196' width='112' height='150' rx='10' fill='#E8478B' fillOpacity='0.55' /&gt;&#13;&#10;                &lt;rect x='972' y='150' width='112' height='150' rx='10' fill='#FFFFFF' fillOpacity='0.10' /&gt;&#13;&#10;                &lt;rect x='842' y='366' width='112' height='150' rx='10' fill='#FFFFFF' fillOpacity='0.06' /&gt;&#13;&#10;                &lt;rect x='972' y='320' width='112' height='150' rx='10' fill='#E8478B' fillOpacity='0.22' /&gt;&#13;&#10;            &lt;/g&gt;&#13;&#10;&#13;&#10;            {/* 左下角装饰弧 */}&#13;&#10;            &lt;circle cx='120' cy='690' r='210' fill='none' stroke='#E8478B' strokeOpacity='0.16' strokeWidth='1.5' /&gt;&#13;&#10;            &lt;circle cx='120' cy='690' r='290' fill='none' stroke='#FFFFFF' strokeOpacity='0.05' strokeWidth='1' /&gt;&#13;&#10;        &lt;/svg&gt;&#13;&#10;    &lt;/Box&gt;&#13;&#10;&#13;&#10;    {/* ===== 内容：左侧骑线 ===== */}&#13;&#10;    &lt;Box style={{&#13;&#10;        position: 'relative',&#13;&#10;        zIndex: 1,&#13;&#10;        height: '100%',&#13;&#10;        flexDirection: 'column',&#13;&#10;        justifyContent: 'center',&#13;&#10;        paddingLeft: 96,&#13;&#10;        paddingRight: 96,&#13;&#10;        gap: 26,&#13;&#10;    }}&gt;&#13;&#10;        {/* 小标签 */}&#13;&#10;        &lt;Box style={{ flexDirection: 'row', alignItems: 'center', gap: 12 }}&gt;&#13;&#10;            &lt;Box style={{ width: 44, height: 4, background: '#E8478B', borderRadius: 2 }} /&gt;&#13;&#10;            &lt;Text style={{ fontSize: 20, color: '#E8478B', fontWeight: 'bold', letterSpacing: 3 }}&gt;&#13;&#10;                使用说明&#13;&#10;            &lt;/Text&gt;&#13;&#10;        &lt;/Box&gt;&#13;&#10;&#13;&#10;        {/* 主标题 */}&#13;&#10;        &lt;Text style={{ fontSize: 76, fontWeight: 'bold', color: '#FFFFFF', lineHeight: 1.15, letterSpacing: 1 }}&gt;&#13;&#10;            &lt;&gt;&#13;&#10;                Bestdori&lt;span style={{ color: '#E8478B' }}&gt;Helper&lt;/span&gt;&#13;&#10;            &lt;/&gt;&#13;&#10;        &lt;/Text&gt;&#13;&#10;&#13;&#10;        {/* 副标题 */}&#13;&#10;        &lt;Text style={{ fontSize: 30, color: '#C9CEDA', lineHeight: 1.5 }}&gt;&#13;&#10;            把游戏截图变成 Bestdori 卡册&#13;&#10;        &lt;/Text&gt;&#13;&#10;&#13;&#10;        {/* 一句话说清它干什么 */}&#13;&#10;        &lt;Box style={{ marginTop: 14, flexDirection: 'row', alignItems: 'center', gap: 14 }}&gt;&#13;&#10;            &lt;Text style={{ fontSize: 22, color: '#8A93A6' }}&gt;&#13;&#10;                导入截图&#13;&#10;            &lt;/Text&gt;&#13;&#10;            &lt;Text style={{ fontSize: 22, color: '#E8478B' }}&gt;→&lt;/Text&gt;&#13;&#10;            &lt;Text style={{ fontSize: 22, color: '#8A93A6' }}&gt;&#13;&#10;                自动识别卡面&#13;&#10;            &lt;/Text&gt;&#13;&#10;            &lt;Text style={{ fontSize: 22, color: '#E8478B' }}&gt;→&lt;/Text&gt;&#13;&#10;            &lt;Text style={{ fontSize: 22, color: '#8A93A6' }}&gt;&#13;&#10;                同步到「我的卡牌」&#13;&#10;            &lt;/Text&gt;&#13;&#10;        &lt;/Box&gt;&#13;&#10;    &lt;/Box&gt;&#13;&#10;&#13;&#10;    {/* 左下角来源标注 */}&#13;&#10;    &lt;Box style={{ position: 'absolute', left: 96, bottom: 46, zIndex: 1 }}&gt;&#13;&#10;        &lt;Text style={{ fontSize: 15, color: '#6B7280' }}&gt;&#13;&#10;            《BanG Dream! 少女乐团派对》卡面管理工具 · 网页 / 安卓 / Windows 三端通用&#13;&#10;        &lt;/Text&gt;&#13;&#10;    &lt;/Box&gt;&#13;&#10;&#13;&#10;&lt;/Slide&gt;&#13;&#10;"/>
         <p:cNvGrpSpPr/>
         <p:nvPr/>
       </p:nvGrpSpPr>
@@ -590,10 +591,7 @@
         </p:spPr>
         <p:txBody>
           <a:bodyPr/>
-          <a:p>
-            <a:pPr/>
-            <a:endParaRPr/>
-          </a:p>
+          <a:p/>
         </p:txBody>
       </p:sp>
       <p:pic>
@@ -605,7 +603,7 @@
           <p:nvPr/>
         </p:nvPicPr>
         <p:blipFill>
-          <a:blip>
+          <a:blip r:embed="rId1">
             <a:extLst>
               <a:ext uri="{96DAC541-7B7A-43D3-8B79-37D633B846F1}">
                 <asvg:svgBlip r:embed="rId1"/>
@@ -650,10 +648,7 @@
         </p:spPr>
         <p:txBody>
           <a:bodyPr/>
-          <a:p>
-            <a:pPr/>
-            <a:endParaRPr/>
-          </a:p>
+          <a:p/>
         </p:txBody>
       </p:sp>
       <p:sp>
@@ -775,7 +770,7 @@
                 <a:latin typeface="Microsoft YaHei"/>
                 <a:ea typeface="Microsoft YaHei"/>
               </a:rPr>
-              <a:t> Bestdori </a:t>
+              <a:t xml:space="preserve"> Bestdori </a:t>
             </a:r>
             <a:r>
               <a:rPr lang="zh-CN" sz="2250">
@@ -1005,7 +1000,7 @@
                 <a:latin typeface="Microsoft YaHei"/>
                 <a:ea typeface="Microsoft YaHei"/>
               </a:rPr>
-              <a:t>BanG Dream! </a:t>
+              <a:t xml:space="preserve">BanG Dream! </a:t>
             </a:r>
             <a:r>
               <a:rPr lang="zh-CN" sz="1125">
@@ -1025,7 +1020,7 @@
                 <a:latin typeface="Microsoft YaHei"/>
                 <a:ea typeface="Microsoft YaHei"/>
               </a:rPr>
-              <a:t> · </a:t>
+              <a:t xml:space="preserve"> · </a:t>
             </a:r>
             <a:r>
               <a:rPr lang="zh-CN" sz="1125">
@@ -1045,7 +1040,7 @@
                 <a:latin typeface="Microsoft YaHei"/>
                 <a:ea typeface="Microsoft YaHei"/>
               </a:rPr>
-              <a:t> / </a:t>
+              <a:t xml:space="preserve"> / </a:t>
             </a:r>
             <a:r>
               <a:rPr lang="zh-CN" sz="1125">
@@ -1065,7 +1060,7 @@
                 <a:latin typeface="Microsoft YaHei"/>
                 <a:ea typeface="Microsoft YaHei"/>
               </a:rPr>
-              <a:t> / Windows </a:t>
+              <a:t xml:space="preserve"> / Windows </a:t>
             </a:r>
             <a:r>
               <a:rPr lang="zh-CN" sz="1125">
@@ -1087,11 +1082,11 @@
 </file>
 
 <file path=ppt/slides/slide10.xml><?xml version="1.0" encoding="utf-8"?>
-<p:sld xmlns:p="http://schemas.openxmlformats.org/presentationml/2006/main" xmlns:r="http://schemas.openxmlformats.org/officeDocument/2006/relationships" xmlns:a="http://schemas.openxmlformats.org/drawingml/2006/main" xmlns:asvg="http://schemas.microsoft.com/office/drawing/2016/SVG/main" xmlns:mc="http://schemas.openxmlformats.org/markup-compatibility/2006" mc:Ignorable="asvg">
+<p:sld xmlns:p="http://schemas.openxmlformats.org/presentationml/2006/main" xmlns:a="http://schemas.openxmlformats.org/drawingml/2006/main" xmlns:asvg="http://schemas.microsoft.com/office/drawing/2016/SVG/main" xmlns:r="http://schemas.openxmlformats.org/officeDocument/2006/relationships" xmlns:mc="http://schemas.openxmlformats.org/markup-compatibility/2006" mc:Ignorable="asvg">
   <p:cSld>
     <p:spTree>
       <p:nvGrpSpPr>
-        <p:cNvPr id="14" name=""/>
+        <p:cNvPr id="14" name="" descr="&lt;Slide style={{ width: 1280, height: 720, padding: 0, position: 'relative', overflow: 'hidden', background: '#1F2430' }}&gt;&#13;&#10;&#13;&#10;    {/* ===== 背景 ===== */}&#13;&#10;    &lt;Box style={{ position: 'absolute', top: 0, left: 0, width: 1280, height: 720 }}&gt;&#13;&#10;        &lt;svg width={1280} height={720} viewBox='0 0 1280 720'&gt;&#13;&#10;            &lt;defs&gt;&#13;&#10;                &lt;linearGradient id='s2bg' x1='0' y1='0' x2='1' y2='1'&gt;&#13;&#10;                    &lt;stop offset='0%' stopColor='#1B1F2A' /&gt;&#13;&#10;                    &lt;stop offset='100%' stopColor='#2A3242' /&gt;&#13;&#10;                &lt;/linearGradient&gt;&#13;&#10;                &lt;radialGradient id='s2glow' cx='0.78' cy='0.62' r='0.68'&gt;&#13;&#10;                    &lt;stop offset='0%' stopColor='#E8478B' stopOpacity='0.32' /&gt;&#13;&#10;                    &lt;stop offset='100%' stopColor='#E8478B' stopOpacity='0' /&gt;&#13;&#10;                &lt;/radialGradient&gt;&#13;&#10;            &lt;/defs&gt;&#13;&#10;            &lt;rect x='0' y='0' width='1280' height='720' fill='url(#s2bg)' /&gt;&#13;&#10;            &lt;rect x='0' y='0' width='1280' height='720' fill='url(#s2glow)' /&gt;&#13;&#10;&#13;&#10;            {/* 右侧：清单 → 云 的示意（抽象） */}&#13;&#10;            &lt;g&gt;&#13;&#10;                &lt;rect x='905' y='196' width='86' height='112' rx='8' fill='#FFFFFF' fillOpacity='0.07' /&gt;&#13;&#10;                &lt;rect x='1011' y='196' width='86' height='112' rx='8' fill='#FFFFFF' fillOpacity='0.05' /&gt;&#13;&#10;                &lt;rect x='905' y='328' width='86' height='112' rx='8' fill='#FFFFFF' fillOpacity='0.04' /&gt;&#13;&#10;                &lt;rect x='1011' y='328' width='86' height='112' rx='8' fill='#E8478B' fillOpacity='0.22' /&gt;&#13;&#10;&#13;&#10;                {/* 箭头指向云 */}&#13;&#10;                &lt;path d='M1054 384 L1120 384' stroke='#E8478B' strokeOpacity='0.55' strokeWidth='3' strokeLinecap='round' /&gt;&#13;&#10;                &lt;path d='M1108 372 L1122 384 L1108 396' fill='none' stroke='#E8478B' strokeOpacity='0.55' strokeWidth='3' strokeLinecap='round' strokeLinejoin='round' /&gt;&#13;&#10;&#13;&#10;                {/* 云 */}&#13;&#10;                &lt;path d='M1148 402 a34 34 0 0 1 8 -67 a44 44 0 0 1 82 -4 a30 30 0 0 1 4 71 z'&#13;&#10;                    fill='#FFFFFF' fillOpacity='0.10' stroke='#E8478B' strokeOpacity='0.4' strokeWidth='2' /&gt;&#13;&#10;            &lt;/g&gt;&#13;&#10;&#13;&#10;            {/* 左侧装饰弧 */}&#13;&#10;            &lt;circle cx='1160' cy='690' r='180' fill='none' stroke='#FFFFFF' strokeOpacity='0.04' strokeWidth='1' /&gt;&#13;&#10;        &lt;/svg&gt;&#13;&#10;    &lt;/Box&gt;&#13;&#10;&#13;&#10;    {/* ===== 内容 ===== */}&#13;&#10;    &lt;Box style={{&#13;&#10;        position: 'relative', zIndex: 1, height: '100%',&#13;&#10;        flexDirection: 'column', justifyContent: 'center',&#13;&#10;        paddingLeft: 96, paddingRight: 96, gap: 20,&#13;&#10;    }}&gt;&#13;&#10;        &lt;Text style={{ fontSize: 150, fontWeight: 'bold', color: '#E8478B', lineHeight: 1.0, letterSpacing: 2 }}&gt;&#13;&#10;            02&#13;&#10;        &lt;/Text&gt;&#13;&#10;&#13;&#10;        &lt;Text style={{ fontSize: 64, fontWeight: 'bold', color: '#FFFFFF', lineHeight: 1.15 }}&gt;&#13;&#10;            同步到 Bestdori&#13;&#10;        &lt;/Text&gt;&#13;&#10;&#13;&#10;        &lt;Box style={{ width: 68, height: 4, background: '#E8478B', borderRadius: 2, marginTop: 6 }} /&gt;&#13;&#10;&#13;&#10;        &lt;Text style={{ fontSize: 22, color: '#8A93A6', marginTop: 6 }}&gt;&#13;&#10;            两种方式，按你用的版本选&#13;&#10;        &lt;/Text&gt;&#13;&#10;    &lt;/Box&gt;&#13;&#10;&#13;&#10;&lt;/Slide&gt;&#13;&#10;"/>
         <p:cNvGrpSpPr/>
         <p:nvPr/>
       </p:nvGrpSpPr>
@@ -1124,10 +1119,7 @@
         </p:spPr>
         <p:txBody>
           <a:bodyPr/>
-          <a:p>
-            <a:pPr/>
-            <a:endParaRPr/>
-          </a:p>
+          <a:p/>
         </p:txBody>
       </p:sp>
       <p:pic>
@@ -1139,7 +1131,7 @@
           <p:nvPr/>
         </p:nvPicPr>
         <p:blipFill>
-          <a:blip>
+          <a:blip r:embed="rId1">
             <a:extLst>
               <a:ext uri="{96DAC541-7B7A-43D3-8B79-37D633B846F1}">
                 <asvg:svgBlip r:embed="rId1"/>
@@ -1235,7 +1227,7 @@
                 <a:latin typeface="Microsoft YaHei"/>
                 <a:ea typeface="Microsoft YaHei"/>
               </a:rPr>
-              <a:t> Bestdori</a:t>
+              <a:t xml:space="preserve"> Bestdori</a:t>
             </a:r>
             <a:endParaRPr/>
           </a:p>
@@ -1264,10 +1256,7 @@
         </p:spPr>
         <p:txBody>
           <a:bodyPr/>
-          <a:p>
-            <a:pPr/>
-            <a:endParaRPr/>
-          </a:p>
+          <a:p/>
         </p:txBody>
       </p:sp>
       <p:sp>
@@ -1311,11 +1300,11 @@
 </file>
 
 <file path=ppt/slides/slide11.xml><?xml version="1.0" encoding="utf-8"?>
-<p:sld xmlns:p="http://schemas.openxmlformats.org/presentationml/2006/main" xmlns:r="http://schemas.openxmlformats.org/officeDocument/2006/relationships" xmlns:a="http://schemas.openxmlformats.org/drawingml/2006/main">
+<p:sld xmlns:p="http://schemas.openxmlformats.org/presentationml/2006/main" xmlns:a="http://schemas.openxmlformats.org/drawingml/2006/main" xmlns:r="http://schemas.openxmlformats.org/officeDocument/2006/relationships">
   <p:cSld>
     <p:spTree>
       <p:nvGrpSpPr>
-        <p:cNvPr id="21" name="" descr="&lt;Slide style={{ width: 1280, height: 720, padding: '20px 72px', background: '#F7F8FA', flexDirection: 'column' }}&gt;&#13;&#10;&#13;&#10;    {/* ===== A · 标题块 ===== */}&#13;&#10;    &lt;Box style={{ height: 100, flexDirection: 'row', alignItems: 'center', gap: 16 }}&gt;&#13;&#10;        &lt;Box style={{ width: 6, height: 38, background: '#E8478B', borderRadius: 3 }} /&gt;&#13;&#10;        &lt;Text style={{ fontSize: 36, fontWeight: 'bold', color: '#1F2430' }}&gt;&#13;&#10;            方式一 · 安卓 App 一键同步&#13;&#10;        &lt;/Text&gt;&#13;&#10;        &lt;Box style={{&#13;&#10;            background: 'rgba(232,71,139,0.12)', borderRadius: 20, padding: '5px 14px',&#13;&#10;        }}&gt;&#13;&#10;            &lt;Text style={{ fontSize: 16, color: '#E8478B', fontWeight: 'bold' }}&gt;最省事&lt;/Text&gt;&#13;&#10;        &lt;/Box&gt;&#13;&#10;    &lt;/Box&gt;&#13;&#10;&#13;&#10;    {/* ===== B · 内容区（60:40）===== */}&#13;&#10;    &lt;Box style={{ flex: 1, flexDirection: 'row', gap: 32 }}&gt;&#13;&#10;&#13;&#10;        {/* 左 60%：四步 */}&#13;&#10;        &lt;Box style={{ width: 686, flexDirection: 'column', gap: 12 }}&gt;&#13;&#10;&#13;&#10;            &lt;Box style={{&#13;&#10;                background: '#FFFFFF', borderRadius: 12, padding: '15px 24px',&#13;&#10;                flexDirection: 'row', alignItems: 'center', gap: 20,&#13;&#10;                borderLeft: '4px solid #E8478B',&#13;&#10;                boxShadow: '0 2px 12px rgba(31,36,48,0.06)',&#13;&#10;            }}&gt;&#13;&#10;                &lt;Text style={{ fontSize: 26, fontWeight: 'bold', color: '#E8478B', width: 40 }}&gt;1&lt;/Text&gt;&#13;&#10;                &lt;Box style={{ flex: 1, flexDirection: 'column', gap: 3 }}&gt;&#13;&#10;                    &lt;Text style={{ fontSize: 20, fontWeight: 'bold', color: '#1F2430' }}&gt;登录 Bestdori&lt;/Text&gt;&#13;&#10;                    &lt;Text style={{ fontSize: 16, color: '#5A6376' }}&gt;填账号密码，会话存在手机上，下次不用再登&lt;/Text&gt;&#13;&#10;                &lt;/Box&gt;&#13;&#10;            &lt;/Box&gt;&#13;&#10;&#13;&#10;            &lt;Box style={{&#13;&#10;                background: '#FFFFFF', borderRadius: 12, padding: '15px 24px',&#13;&#10;                flexDirection: 'row', alignItems: 'center', gap: 20,&#13;&#10;                borderLeft: '4px solid #E8478B',&#13;&#10;                boxShadow: '0 2px 12px rgba(31,36,48,0.06)',&#13;&#10;            }}&gt;&#13;&#10;                &lt;Text style={{ fontSize: 26, fontWeight: 'bold', color: '#E8478B', width: 40 }}&gt;2&lt;/Text&gt;&#13;&#10;                &lt;Box style={{ flex: 1, flexDirection: 'column', gap: 3 }}&gt;&#13;&#10;                    &lt;Text style={{ fontSize: 20, fontWeight: 'bold', color: '#1F2430' }}&gt;选一份云端档案&lt;/Text&gt;&#13;&#10;                    &lt;Text style={{ fontSize: 16, color: '#5A6376' }}&gt;就是你 Bestdori 上那份「我的卡牌」&lt;/Text&gt;&#13;&#10;                &lt;/Box&gt;&#13;&#10;            &lt;/Box&gt;&#13;&#10;&#13;&#10;            &lt;Box style={{&#13;&#10;                background: '#FFFFFF', borderRadius: 12, padding: '15px 24px',&#13;&#10;                flexDirection: 'row', alignItems: 'center', gap: 20,&#13;&#10;                borderLeft: '4px solid #E8478B',&#13;&#10;                boxShadow: '0 2px 12px rgba(31,36,48,0.06)',&#13;&#10;            }}&gt;&#13;&#10;                &lt;Text style={{ fontSize: 26, fontWeight: 'bold', color: '#E8478B', width: 40 }}&gt;3&lt;/Text&gt;&#13;&#10;                &lt;Box style={{ flex: 1, flexDirection: 'column', gap: 3 }}&gt;&#13;&#10;                    &lt;Text style={{ fontSize: 20, fontWeight: 'bold', color: '#1F2430' }}&gt;先「生成导入计划」&lt;/Text&gt;&#13;&#10;                    &lt;Text style={{ fontSize: 16, color: '#5A6376' }}&gt;告诉你新增多少、升级多少、跳过多少 —— 先看清再动手&lt;/Text&gt;&#13;&#10;                &lt;/Box&gt;&#13;&#10;            &lt;/Box&gt;&#13;&#10;&#13;&#10;            &lt;Box style={{&#13;&#10;                background: 'rgba(232,71,139,0.07)', borderRadius: 12, padding: '15px 24px',&#13;&#10;                flexDirection: 'row', alignItems: 'center', gap: 20,&#13;&#10;                borderLeft: '4px solid #E8478B',&#13;&#10;            }}&gt;&#13;&#10;                &lt;Text style={{ fontSize: 26, fontWeight: 'bold', color: '#E8478B', width: 40 }}&gt;4&lt;/Text&gt;&#13;&#10;                &lt;Box style={{ flex: 1, flexDirection: 'column', gap: 3 }}&gt;&#13;&#10;                    &lt;Text style={{ fontSize: 20, fontWeight: 'bold', color: '#1F2430' }}&gt;点「开始导入」&lt;/Text&gt;&#13;&#10;                    &lt;Text style={{ fontSize: 16, color: '#5A6376' }}&gt;会弹确认框，不会不打招呼就改你的卡册&lt;/Text&gt;&#13;&#10;                &lt;/Box&gt;&#13;&#10;            &lt;/Box&gt;&#13;&#10;&#13;&#10;        &lt;/Box&gt;&#13;&#10;&#13;&#10;        {/* 右 40%：截图 —— 2.92:1，固定 148 高 */}&#13;&#10;        &lt;Box style={{ flex: 1, flexDirection: 'column', gap: 14 }}&gt;&#13;&#10;            &lt;Box style={{&#13;&#10;                width: '100%', height: 148, borderRadius: 12, overflow: 'hidden',&#13;&#10;                background: '#1F2430', border: '1px solid #2E3442',&#13;&#10;                boxShadow: '0 6px 24px rgba(31,36,48,0.18)',&#13;&#10;            }}&gt;&#13;&#10;                &lt;Image src=&quot;assets/sync_app.png&quot; style={{ width: '100%', height: '100%', objectFit: 'contain' }} /&gt;&#13;&#10;            &lt;/Box&gt;&#13;&#10;            &lt;Box style={{&#13;&#10;                background: '#1F2430', borderRadius: 12, padding: '14px 20px',&#13;&#10;                flexDirection: 'row', alignItems: 'center', gap: 12,&#13;&#10;            }}&gt;&#13;&#10;                &lt;Box style={{ width: 5, height: 26, background: '#E8478B', borderRadius: 3 }} /&gt;&#13;&#10;                &lt;Text style={{ fontSize: 16, color: '#FFFFFF', lineHeight: 1.5 }}&gt;&#13;&#10;                    只有 App 能直连 Bestdori，网页做不到&#13;&#10;                &lt;/Text&gt;&#13;&#10;            &lt;/Box&gt;&#13;&#10;        &lt;/Box&gt;&#13;&#10;&#13;&#10;    &lt;/Box&gt;&#13;&#10;&#13;&#10;    {/* ===== C · 页脚条 ===== */}&#13;&#10;    &lt;Box style={{ height: 60, flexDirection: 'row', alignItems: 'center', justifyContent: 'space-between' }}&gt;&#13;&#10;        &lt;Text style={{ fontSize: 15, color: '#8A93A6' }}&gt;BestdoriHelper 使用说明&lt;/Text&gt;&#13;&#10;        &lt;Text style={{ fontSize: 15, color: '#8A93A6' }}&gt;11 / 14&lt;/Text&gt;&#13;&#10;    &lt;/Box&gt;&#13;&#10;&#13;&#10;&lt;/Slide&gt;&#13;&#10;"/>
+        <p:cNvPr id="21" name="" descr="&lt;Slide style={{ width: 1280, height: 720, padding: '20px 72px', background: '#F7F8FA', flexDirection: 'column' }}&gt;&#13;&#10;&#13;&#10;    {/* ===== A · 标题块 ===== */}&#13;&#10;    &lt;Box style={{ height: 100, flexDirection: 'row', alignItems: 'center', gap: 16 }}&gt;&#13;&#10;        &lt;Box style={{ width: 6, height: 38, background: '#E8478B', borderRadius: 3 }} /&gt;&#13;&#10;        &lt;Text style={{ fontSize: 36, fontWeight: 'bold', color: '#1F2430' }}&gt;&#13;&#10;            方式一 · 安卓 App 一键同步&#13;&#10;        &lt;/Text&gt;&#13;&#10;        &lt;Box style={{&#13;&#10;            background: 'rgba(232,71,139,0.12)', borderRadius: 20, padding: '5px 14px',&#13;&#10;        }}&gt;&#13;&#10;            &lt;Text style={{ fontSize: 16, color: '#E8478B', fontWeight: 'bold' }}&gt;最省事&lt;/Text&gt;&#13;&#10;        &lt;/Box&gt;&#13;&#10;    &lt;/Box&gt;&#13;&#10;&#13;&#10;    {/* ===== B · 内容区（60:40）===== */}&#13;&#10;    &lt;Box style={{ flex: 1, flexDirection: 'row', gap: 32 }}&gt;&#13;&#10;&#13;&#10;        {/* 左 60%：四步 */}&#13;&#10;        &lt;Box style={{ width: 686, flexDirection: 'column', gap: 12 }}&gt;&#13;&#10;&#13;&#10;            &lt;Box style={{&#13;&#10;                background: '#FFFFFF', borderRadius: 12, padding: '15px 24px',&#13;&#10;                flexDirection: 'row', alignItems: 'center', gap: 20,&#13;&#10;                borderLeft: '4px solid #E8478B',&#13;&#10;                boxShadow: '0 2px 12px rgba(31,36,48,0.06)',&#13;&#10;            }}&gt;&#13;&#10;                &lt;Text style={{ fontSize: 26, fontWeight: 'bold', color: '#E8478B', width: 40 }}&gt;1&lt;/Text&gt;&#13;&#10;                &lt;Box style={{ flex: 1, flexDirection: 'column', gap: 3 }}&gt;&#13;&#10;                    &lt;Text style={{ fontSize: 20, fontWeight: 'bold', color: '#1F2430' }}&gt;登录 Bestdori&lt;/Text&gt;&#13;&#10;                    &lt;Text style={{ fontSize: 16, color: '#5A6376' }}&gt;填账号密码，会话存在手机上，下次不用再登&lt;/Text&gt;&#13;&#10;                &lt;/Box&gt;&#13;&#10;            &lt;/Box&gt;&#13;&#10;&#13;&#10;            &lt;Box style={{&#13;&#10;                background: '#FFFFFF', borderRadius: 12, padding: '15px 24px',&#13;&#10;                flexDirection: 'row', alignItems: 'center', gap: 20,&#13;&#10;                borderLeft: '4px solid #E8478B',&#13;&#10;                boxShadow: '0 2px 12px rgba(31,36,48,0.06)',&#13;&#10;            }}&gt;&#13;&#10;                &lt;Text style={{ fontSize: 26, fontWeight: 'bold', color: '#E8478B', width: 40 }}&gt;2&lt;/Text&gt;&#13;&#10;                &lt;Box style={{ flex: 1, flexDirection: 'column', gap: 3 }}&gt;&#13;&#10;                    &lt;Text style={{ fontSize: 20, fontWeight: 'bold', color: '#1F2430' }}&gt;选一份云端档案&lt;/Text&gt;&#13;&#10;                    &lt;Text style={{ fontSize: 16, color: '#5A6376' }}&gt;就是你 Bestdori 上那份「我的卡牌」&lt;/Text&gt;&#13;&#10;                &lt;/Box&gt;&#13;&#10;            &lt;/Box&gt;&#13;&#10;&#13;&#10;            &lt;Box style={{&#13;&#10;                background: '#FFFFFF', borderRadius: 12, padding: '15px 24px',&#13;&#10;                flexDirection: 'row', alignItems: 'center', gap: 20,&#13;&#10;                borderLeft: '4px solid #E8478B',&#13;&#10;                boxShadow: '0 2px 12px rgba(31,36,48,0.06)',&#13;&#10;            }}&gt;&#13;&#10;                &lt;Text style={{ fontSize: 26, fontWeight: 'bold', color: '#E8478B', width: 40 }}&gt;3&lt;/Text&gt;&#13;&#10;                &lt;Box style={{ flex: 1, flexDirection: 'column', gap: 3 }}&gt;&#13;&#10;                    &lt;Text style={{ fontSize: 20, fontWeight: 'bold', color: '#1F2430' }}&gt;先「生成导入计划」&lt;/Text&gt;&#13;&#10;                    &lt;Text style={{ fontSize: 16, color: '#5A6376' }}&gt;告诉你新增多少、升级多少、跳过多少 —— 先看清再动手&lt;/Text&gt;&#13;&#10;                &lt;/Box&gt;&#13;&#10;            &lt;/Box&gt;&#13;&#10;&#13;&#10;            &lt;Box style={{&#13;&#10;                background: 'rgba(232,71,139,0.07)', borderRadius: 12, padding: '15px 24px',&#13;&#10;                flexDirection: 'row', alignItems: 'center', gap: 20,&#13;&#10;                borderLeft: '4px solid #E8478B',&#13;&#10;            }}&gt;&#13;&#10;                &lt;Text style={{ fontSize: 26, fontWeight: 'bold', color: '#E8478B', width: 40 }}&gt;4&lt;/Text&gt;&#13;&#10;                &lt;Box style={{ flex: 1, flexDirection: 'column', gap: 3 }}&gt;&#13;&#10;                    &lt;Text style={{ fontSize: 20, fontWeight: 'bold', color: '#1F2430' }}&gt;点「开始导入」&lt;/Text&gt;&#13;&#10;                    &lt;Text style={{ fontSize: 16, color: '#5A6376' }}&gt;会弹确认框，不会不打招呼就改你的卡册&lt;/Text&gt;&#13;&#10;                &lt;/Box&gt;&#13;&#10;            &lt;/Box&gt;&#13;&#10;&#13;&#10;        &lt;/Box&gt;&#13;&#10;&#13;&#10;        {/* 右 40%：截图 —— 2.92:1，固定 148 高 */}&#13;&#10;        &lt;Box style={{ flex: 1, flexDirection: 'column', gap: 14 }}&gt;&#13;&#10;            &lt;Box style={{&#13;&#10;                width: '100%', height: 148, borderRadius: 12, overflow: 'hidden',&#13;&#10;                background: '#1F2430', border: '1px solid #2E3442',&#13;&#10;                boxShadow: '0 6px 24px rgba(31,36,48,0.18)',&#13;&#10;            }}&gt;&#13;&#10;                &lt;Image src=&quot;assets/sync_app.png&quot; style={{ width: '100%', height: '100%', objectFit: 'contain' }} /&gt;&#13;&#10;            &lt;/Box&gt;&#13;&#10;            &lt;Box style={{&#13;&#10;                background: '#1F2430', borderRadius: 12, padding: '14px 20px',&#13;&#10;                flexDirection: 'row', alignItems: 'center', gap: 12,&#13;&#10;            }}&gt;&#13;&#10;                &lt;Box style={{ width: 5, height: 26, background: '#E8478B', borderRadius: 3 }} /&gt;&#13;&#10;                &lt;Text style={{ fontSize: 16, color: '#FFFFFF', lineHeight: 1.5 }}&gt;&#13;&#10;                    只有 App 能直连 Bestdori，网页做不到&#13;&#10;                &lt;/Text&gt;&#13;&#10;            &lt;/Box&gt;&#13;&#10;        &lt;/Box&gt;&#13;&#10;&#13;&#10;    &lt;/Box&gt;&#13;&#10;&#13;&#10;    {/* ===== C · 页脚条 ===== */}&#13;&#10;    &lt;Box style={{ height: 60, flexDirection: 'row', alignItems: 'center', justifyContent: 'space-between' }}&gt;&#13;&#10;        &lt;Text style={{ fontSize: 15, color: '#8A93A6' }}&gt;BestdoriHelper 使用说明&lt;/Text&gt;&#13;&#10;        &lt;Text style={{ fontSize: 15, color: '#8A93A6' }}&gt;11 / 15&lt;/Text&gt;&#13;&#10;    &lt;/Box&gt;&#13;&#10;&#13;&#10;&lt;/Slide&gt;&#13;&#10;"/>
         <p:cNvGrpSpPr/>
         <p:nvPr/>
       </p:nvGrpSpPr>
@@ -1416,7 +1405,7 @@
                 <a:latin typeface="Microsoft YaHei"/>
                 <a:ea typeface="Microsoft YaHei"/>
               </a:rPr>
-              <a:t> · </a:t>
+              <a:t xml:space="preserve"> · </a:t>
             </a:r>
             <a:r>
               <a:rPr lang="zh-CN" sz="2700" b="1">
@@ -1436,7 +1425,7 @@
                 <a:latin typeface="Microsoft YaHei"/>
                 <a:ea typeface="Microsoft YaHei"/>
               </a:rPr>
-              <a:t> App </a:t>
+              <a:t xml:space="preserve"> App </a:t>
             </a:r>
             <a:r>
               <a:rPr lang="zh-CN" sz="2700" b="1">
@@ -1679,7 +1668,7 @@
                 <a:latin typeface="Microsoft YaHei"/>
                 <a:ea typeface="Microsoft YaHei"/>
               </a:rPr>
-              <a:t> Bestdori</a:t>
+              <a:t xml:space="preserve"> Bestdori</a:t>
             </a:r>
             <a:endParaRPr/>
           </a:p>
@@ -1919,7 +1908,7 @@
                 <a:latin typeface="Microsoft YaHei"/>
                 <a:ea typeface="Microsoft YaHei"/>
               </a:rPr>
-              <a:t> Bestdori </a:t>
+              <a:t xml:space="preserve"> Bestdori </a:t>
             </a:r>
             <a:r>
               <a:rPr lang="zh-CN" sz="1200">
@@ -2134,7 +2123,7 @@
                 <a:latin typeface="Microsoft YaHei"/>
                 <a:ea typeface="Microsoft YaHei"/>
               </a:rPr>
-              <a:t> —— </a:t>
+              <a:t xml:space="preserve"> —— </a:t>
             </a:r>
             <a:r>
               <a:rPr lang="zh-CN" sz="1200">
@@ -2534,7 +2523,7 @@
                 <a:latin typeface="Microsoft YaHei"/>
                 <a:ea typeface="Microsoft YaHei"/>
               </a:rPr>
-              <a:t> App </a:t>
+              <a:t xml:space="preserve"> App </a:t>
             </a:r>
             <a:r>
               <a:rPr lang="zh-CN" sz="1200">
@@ -2554,7 +2543,7 @@
                 <a:latin typeface="Microsoft YaHei"/>
                 <a:ea typeface="Microsoft YaHei"/>
               </a:rPr>
-              <a:t> Bestdori</a:t>
+              <a:t xml:space="preserve"> Bestdori</a:t>
             </a:r>
             <a:r>
               <a:rPr lang="zh-CN" sz="1200">
@@ -2599,7 +2588,7 @@
                 <a:latin typeface="Microsoft YaHei"/>
                 <a:ea typeface="Microsoft YaHei"/>
               </a:rPr>
-              <a:t>BestdoriHelper </a:t>
+              <a:t xml:space="preserve">BestdoriHelper </a:t>
             </a:r>
             <a:r>
               <a:rPr lang="zh-CN" sz="1125">
@@ -2644,7 +2633,7 @@
                 <a:latin typeface="Microsoft YaHei"/>
                 <a:ea typeface="Microsoft YaHei"/>
               </a:rPr>
-              <a:t>11 / 14</a:t>
+              <a:t>11 / 15</a:t>
             </a:r>
             <a:endParaRPr/>
           </a:p>
@@ -2656,11 +2645,11 @@
 </file>
 
 <file path=ppt/slides/slide12.xml><?xml version="1.0" encoding="utf-8"?>
-<p:sld xmlns:p="http://schemas.openxmlformats.org/presentationml/2006/main" xmlns:r="http://schemas.openxmlformats.org/officeDocument/2006/relationships" xmlns:a="http://schemas.openxmlformats.org/drawingml/2006/main">
+<p:sld xmlns:p="http://schemas.openxmlformats.org/presentationml/2006/main" xmlns:a="http://schemas.openxmlformats.org/drawingml/2006/main" xmlns:r="http://schemas.openxmlformats.org/officeDocument/2006/relationships">
   <p:cSld>
     <p:spTree>
       <p:nvGrpSpPr>
-        <p:cNvPr id="54" name="" descr="&lt;Slide style={{ width: 1280, height: 720, padding: '20px 72px', background: '#F7F8FA', flexDirection: 'column' }}&gt;&#13;&#10;&#13;&#10;    {/* ===== A · 标题块 ===== */}&#13;&#10;    &lt;Box style={{ height: 100, flexDirection: 'row', alignItems: 'center', gap: 16 }}&gt;&#13;&#10;        &lt;Box style={{ width: 6, height: 38, background: '#E8478B', borderRadius: 3 }} /&gt;&#13;&#10;        &lt;Text style={{ fontSize: 36, fontWeight: 'bold', color: '#1F2430' }}&gt;&#13;&#10;            方式二 · 网页版导出档案导入&#13;&#10;        &lt;/Text&gt;&#13;&#10;    &lt;/Box&gt;&#13;&#10;&#13;&#10;    {/* ===== B · 内容区（左标题栏 32% + 右内容）===== */}&#13;&#10;    &lt;Box style={{ flex: 1, flexDirection: 'row' }}&gt;&#13;&#10;&#13;&#10;        {/* 左：深色标题栏 */}&#13;&#10;        &lt;Box style={{&#13;&#10;            width: 360, background: 'linear-gradient(135deg, #1F2430 0%, #2C3444 100%)',&#13;&#10;            borderRadius: '12px 0 0 12px', padding: '36px 32px',&#13;&#10;            flexDirection: 'column', justifyContent: 'space-between',&#13;&#10;        }}&gt;&#13;&#10;            &lt;Box style={{ flexDirection: 'column', gap: 14 }}&gt;&#13;&#10;                &lt;Text style={{ fontSize: 72, fontWeight: 'bold', color: '#E8478B', lineHeight: 1.0 }}&gt;2&lt;/Text&gt;&#13;&#10;                &lt;Text style={{ fontSize: 29, fontWeight: 'bold', color: '#FFFFFF', lineHeight: 1.25 }}&gt;&#13;&#10;                    借用官网&#13;&#10;                    &lt;br /&gt;&#13;&#10;                    自己的导入入口&#13;&#10;                &lt;/Text&gt;&#13;&#10;                &lt;Box style={{ width: 44, height: 4, background: '#E8478B', borderRadius: 2 }} /&gt;&#13;&#10;                &lt;Text style={{ fontSize: 18, color: '#8A93A6', lineHeight: 1.6 }}&gt;&#13;&#10;                    网页版没法直连 Bestdori，&#13;&#10;                    &lt;br /&gt;&#13;&#10;                    但官网本来就支持粘贴导入&#13;&#10;                &lt;/Text&gt;&#13;&#10;            &lt;/Box&gt;&#13;&#10;            &lt;Box style={{&#13;&#10;                background: 'rgba(255,255,255,0.06)', borderRadius: 10, padding: '13px 16px',&#13;&#10;            }}&gt;&#13;&#10;                &lt;Text style={{ fontSize: 16, color: '#C9CEDA', lineHeight: 1.55 }}&gt;&#13;&#10;                    账号密码不经过任何第三方&#13;&#10;                &lt;/Text&gt;&#13;&#10;            &lt;/Box&gt;&#13;&#10;        &lt;/Box&gt;&#13;&#10;&#13;&#10;        {/* 右：步骤 + 截图 */}&#13;&#10;        &lt;Box style={{&#13;&#10;            flex: 1, background: '#FFFFFF', borderRadius: '0 12px 12px 0',&#13;&#10;            padding: '24px 30px', flexDirection: 'column', gap: 16,&#13;&#10;            boxShadow: '0 2px 12px rgba(31,36,48,0.06)',&#13;&#10;        }}&gt;&#13;&#10;&#13;&#10;            {/* 四步 */}&#13;&#10;            &lt;Box style={{ flexDirection: 'row', gap: 10, alignItems: 'stretch' }}&gt;&#13;&#10;                &lt;Box style={{&#13;&#10;                    flex: 1, background: '#F7F8FA', borderRadius: 10, padding: '13px 14px',&#13;&#10;                    flexDirection: 'column', gap: 4, borderTop: '3px solid #E8478B',&#13;&#10;                }}&gt;&#13;&#10;                    &lt;Text style={{ fontSize: 15, color: '#E8478B', fontWeight: 'bold' }}&gt;①&lt;/Text&gt;&#13;&#10;                    &lt;Text style={{ fontSize: 17, fontWeight: 'bold', color: '#1F2430' }}&gt;导出档案&lt;/Text&gt;&#13;&#10;                    &lt;Text style={{ fontSize: 14, color: '#5A6376', lineHeight: 1.45 }}&gt;&#13;&#10;                        清单页点「导出 Bestdori 档案」&#13;&#10;                    &lt;/Text&gt;&#13;&#10;                &lt;/Box&gt;&#13;&#10;&#13;&#10;                &lt;Box style={{&#13;&#10;                    flex: 1, background: '#F7F8FA', borderRadius: 10, padding: '13px 14px',&#13;&#10;                    flexDirection: 'column', gap: 4, borderTop: '3px solid #E8478B',&#13;&#10;                }}&gt;&#13;&#10;                    &lt;Text style={{ fontSize: 15, color: '#E8478B', fontWeight: 'bold' }}&gt;②&lt;/Text&gt;&#13;&#10;                    &lt;Text style={{ fontSize: 17, fontWeight: 'bold', color: '#1F2430' }}&gt;复制&lt;/Text&gt;&#13;&#10;                    &lt;Text style={{ fontSize: 14, color: '#5A6376', lineHeight: 1.45 }}&gt;&#13;&#10;                        把弹出来的内容整段复制&#13;&#10;                    &lt;/Text&gt;&#13;&#10;                &lt;/Box&gt;&#13;&#10;&#13;&#10;                &lt;Box style={{&#13;&#10;                    flex: 1, background: '#F7F8FA', borderRadius: 10, padding: '13px 14px',&#13;&#10;                    flexDirection: 'column', gap: 4, borderTop: '3px solid #E8478B',&#13;&#10;                }}&gt;&#13;&#10;                    &lt;Text style={{ fontSize: 15, color: '#E8478B', fontWeight: 'bold' }}&gt;③&lt;/Text&gt;&#13;&#10;                    &lt;Text style={{ fontSize: 17, fontWeight: 'bold', color: '#1F2430' }}&gt;打开官网&lt;/Text&gt;&#13;&#10;                    &lt;Text style={{ fontSize: 14, color: '#5A6376', lineHeight: 1.45 }}&gt;&#13;&#10;                        bestdori.com/profile/manager&#13;&#10;                    &lt;/Text&gt;&#13;&#10;                &lt;/Box&gt;&#13;&#10;&#13;&#10;                &lt;Box style={{&#13;&#10;                    flex: 1, background: '#F7F8FA', borderRadius: 10, padding: '13px 14px',&#13;&#10;                    flexDirection: 'column', gap: 4, borderTop: '3px solid #E8478B',&#13;&#10;                }}&gt;&#13;&#10;                    &lt;Text style={{ fontSize: 15, color: '#E8478B', fontWeight: 'bold' }}&gt;④&lt;/Text&gt;&#13;&#10;                    &lt;Text style={{ fontSize: 17, fontWeight: 'bold', color: '#1F2430' }}&gt;Import 粘贴&lt;/Text&gt;&#13;&#10;                    &lt;Text style={{ fontSize: 14, color: '#5A6376', lineHeight: 1.45 }}&gt;&#13;&#10;                        点 Import，粘进去，完成&#13;&#10;                    &lt;/Text&gt;&#13;&#10;                &lt;/Box&gt;&#13;&#10;            &lt;/Box&gt;&#13;&#10;&#13;&#10;            {/* 截图 —— 5.20:1 超宽条，固定 146 高 */}&#13;&#10;            &lt;Box style={{&#13;&#10;                width: '100%', height: 146, borderRadius: 10, overflow: 'hidden',&#13;&#10;                background: '#1F2430', border: '1px solid #2E3442',&#13;&#10;            }}&gt;&#13;&#10;                &lt;Image src=&quot;assets/sync_web.png&quot; style={{ width: '100%', height: '100%', objectFit: 'contain' }} /&gt;&#13;&#10;            &lt;/Box&gt;&#13;&#10;&#13;&#10;        &lt;/Box&gt;&#13;&#10;    &lt;/Box&gt;&#13;&#10;&#13;&#10;    {/* ===== C · 页脚条 ===== */}&#13;&#10;    &lt;Box style={{ height: 60, flexDirection: 'row', alignItems: 'center', justifyContent: 'space-between' }}&gt;&#13;&#10;        &lt;Text style={{ fontSize: 15, color: '#8A93A6' }}&gt;BestdoriHelper 使用说明&lt;/Text&gt;&#13;&#10;        &lt;Text style={{ fontSize: 15, color: '#8A93A6' }}&gt;12 / 14&lt;/Text&gt;&#13;&#10;    &lt;/Box&gt;&#13;&#10;&#13;&#10;&lt;/Slide&gt;&#13;&#10;"/>
+        <p:cNvPr id="54" name="" descr="&lt;Slide style={{ width: 1280, height: 720, padding: '20px 72px', background: '#F7F8FA', flexDirection: 'column' }}&gt;&#13;&#10;&#13;&#10;    {/* ===== A · 标题块 ===== */}&#13;&#10;    &lt;Box style={{ height: 100, flexDirection: 'row', alignItems: 'center', gap: 16 }}&gt;&#13;&#10;        &lt;Box style={{ width: 6, height: 38, background: '#E8478B', borderRadius: 3 }} /&gt;&#13;&#10;        &lt;Text style={{ fontSize: 36, fontWeight: 'bold', color: '#1F2430' }}&gt;&#13;&#10;            方式二 · 网页版导出档案导入&#13;&#10;        &lt;/Text&gt;&#13;&#10;    &lt;/Box&gt;&#13;&#10;&#13;&#10;    {/* ===== B · 内容区（左标题栏 32% + 右内容）===== */}&#13;&#10;    &lt;Box style={{ flex: 1, flexDirection: 'row' }}&gt;&#13;&#10;&#13;&#10;        {/* 左：深色标题栏 */}&#13;&#10;        &lt;Box style={{&#13;&#10;            width: 360, background: 'linear-gradient(135deg, #1F2430 0%, #2C3444 100%)',&#13;&#10;            borderRadius: '12px 0 0 12px', padding: '36px 32px',&#13;&#10;            flexDirection: 'column', justifyContent: 'space-between',&#13;&#10;        }}&gt;&#13;&#10;            &lt;Box style={{ flexDirection: 'column', gap: 14 }}&gt;&#13;&#10;                &lt;Text style={{ fontSize: 72, fontWeight: 'bold', color: '#E8478B', lineHeight: 1.0 }}&gt;2&lt;/Text&gt;&#13;&#10;                &lt;Text style={{ fontSize: 29, fontWeight: 'bold', color: '#FFFFFF', lineHeight: 1.25 }}&gt;&#13;&#10;                    借用官网&#13;&#10;                    &lt;br /&gt;&#13;&#10;                    自己的导入入口&#13;&#10;                &lt;/Text&gt;&#13;&#10;                &lt;Box style={{ width: 44, height: 4, background: '#E8478B', borderRadius: 2 }} /&gt;&#13;&#10;                &lt;Text style={{ fontSize: 18, color: '#8A93A6', lineHeight: 1.6 }}&gt;&#13;&#10;                    网页版没法直连 Bestdori，&#13;&#10;                    &lt;br /&gt;&#13;&#10;                    但官网本来就支持粘贴导入&#13;&#10;                &lt;/Text&gt;&#13;&#10;            &lt;/Box&gt;&#13;&#10;            &lt;Box style={{&#13;&#10;                background: 'rgba(255,255,255,0.06)', borderRadius: 10, padding: '13px 16px',&#13;&#10;            }}&gt;&#13;&#10;                &lt;Text style={{ fontSize: 16, color: '#C9CEDA', lineHeight: 1.55 }}&gt;&#13;&#10;                    账号密码不经过任何第三方&#13;&#10;                &lt;/Text&gt;&#13;&#10;            &lt;/Box&gt;&#13;&#10;        &lt;/Box&gt;&#13;&#10;&#13;&#10;        {/* 右：步骤 + 截图 */}&#13;&#10;        &lt;Box style={{&#13;&#10;            flex: 1, background: '#FFFFFF', borderRadius: '0 12px 12px 0',&#13;&#10;            padding: '24px 30px', flexDirection: 'column', gap: 16,&#13;&#10;            boxShadow: '0 2px 12px rgba(31,36,48,0.06)',&#13;&#10;        }}&gt;&#13;&#10;&#13;&#10;            {/* 四步 */}&#13;&#10;            &lt;Box style={{ flexDirection: 'row', gap: 10, alignItems: 'stretch' }}&gt;&#13;&#10;                &lt;Box style={{&#13;&#10;                    flex: 1, background: '#F7F8FA', borderRadius: 10, padding: '13px 14px',&#13;&#10;                    flexDirection: 'column', gap: 4, borderTop: '3px solid #E8478B',&#13;&#10;                }}&gt;&#13;&#10;                    &lt;Text style={{ fontSize: 15, color: '#E8478B', fontWeight: 'bold' }}&gt;①&lt;/Text&gt;&#13;&#10;                    &lt;Text style={{ fontSize: 17, fontWeight: 'bold', color: '#1F2430' }}&gt;导出档案&lt;/Text&gt;&#13;&#10;                    &lt;Text style={{ fontSize: 14, color: '#5A6376', lineHeight: 1.45 }}&gt;&#13;&#10;                        清单页点「导出 Bestdori 档案」&#13;&#10;                    &lt;/Text&gt;&#13;&#10;                &lt;/Box&gt;&#13;&#10;&#13;&#10;                &lt;Box style={{&#13;&#10;                    flex: 1, background: '#F7F8FA', borderRadius: 10, padding: '13px 14px',&#13;&#10;                    flexDirection: 'column', gap: 4, borderTop: '3px solid #E8478B',&#13;&#10;                }}&gt;&#13;&#10;                    &lt;Text style={{ fontSize: 15, color: '#E8478B', fontWeight: 'bold' }}&gt;②&lt;/Text&gt;&#13;&#10;                    &lt;Text style={{ fontSize: 17, fontWeight: 'bold', color: '#1F2430' }}&gt;复制&lt;/Text&gt;&#13;&#10;                    &lt;Text style={{ fontSize: 14, color: '#5A6376', lineHeight: 1.45 }}&gt;&#13;&#10;                        把弹出来的内容整段复制&#13;&#10;                    &lt;/Text&gt;&#13;&#10;                &lt;/Box&gt;&#13;&#10;&#13;&#10;                &lt;Box style={{&#13;&#10;                    flex: 1, background: '#F7F8FA', borderRadius: 10, padding: '13px 14px',&#13;&#10;                    flexDirection: 'column', gap: 4, borderTop: '3px solid #E8478B',&#13;&#10;                }}&gt;&#13;&#10;                    &lt;Text style={{ fontSize: 15, color: '#E8478B', fontWeight: 'bold' }}&gt;③&lt;/Text&gt;&#13;&#10;                    &lt;Text style={{ fontSize: 17, fontWeight: 'bold', color: '#1F2430' }}&gt;打开官网&lt;/Text&gt;&#13;&#10;                    &lt;Text style={{ fontSize: 14, color: '#5A6376', lineHeight: 1.45 }}&gt;&#13;&#10;                        bestdori.com/profile/manager&#13;&#10;                    &lt;/Text&gt;&#13;&#10;                &lt;/Box&gt;&#13;&#10;&#13;&#10;                &lt;Box style={{&#13;&#10;                    flex: 1, background: '#F7F8FA', borderRadius: 10, padding: '13px 14px',&#13;&#10;                    flexDirection: 'column', gap: 4, borderTop: '3px solid #E8478B',&#13;&#10;                }}&gt;&#13;&#10;                    &lt;Text style={{ fontSize: 15, color: '#E8478B', fontWeight: 'bold' }}&gt;④&lt;/Text&gt;&#13;&#10;                    &lt;Text style={{ fontSize: 17, fontWeight: 'bold', color: '#1F2430' }}&gt;Import 粘贴&lt;/Text&gt;&#13;&#10;                    &lt;Text style={{ fontSize: 14, color: '#5A6376', lineHeight: 1.45 }}&gt;&#13;&#10;                        点 Import，粘进去，完成&#13;&#10;                    &lt;/Text&gt;&#13;&#10;                &lt;/Box&gt;&#13;&#10;            &lt;/Box&gt;&#13;&#10;&#13;&#10;            {/* 截图 —— 5.20:1 超宽条，固定 146 高 */}&#13;&#10;            &lt;Box style={{&#13;&#10;                width: '100%', height: 146, borderRadius: 10, overflow: 'hidden',&#13;&#10;                background: '#1F2430', border: '1px solid #2E3442',&#13;&#10;            }}&gt;&#13;&#10;                &lt;Image src=&quot;assets/sync_web.png&quot; style={{ width: '100%', height: '100%', objectFit: 'contain' }} /&gt;&#13;&#10;            &lt;/Box&gt;&#13;&#10;&#13;&#10;        &lt;/Box&gt;&#13;&#10;    &lt;/Box&gt;&#13;&#10;&#13;&#10;    {/* ===== C · 页脚条 ===== */}&#13;&#10;    &lt;Box style={{ height: 60, flexDirection: 'row', alignItems: 'center', justifyContent: 'space-between' }}&gt;&#13;&#10;        &lt;Text style={{ fontSize: 15, color: '#8A93A6' }}&gt;BestdoriHelper 使用说明&lt;/Text&gt;&#13;&#10;        &lt;Text style={{ fontSize: 15, color: '#8A93A6' }}&gt;12 / 15&lt;/Text&gt;&#13;&#10;    &lt;/Box&gt;&#13;&#10;&#13;&#10;&lt;/Slide&gt;&#13;&#10;"/>
         <p:cNvGrpSpPr/>
         <p:nvPr/>
       </p:nvGrpSpPr>
@@ -2761,7 +2750,7 @@
                 <a:latin typeface="Microsoft YaHei"/>
                 <a:ea typeface="Microsoft YaHei"/>
               </a:rPr>
-              <a:t> · </a:t>
+              <a:t xml:space="preserve"> · </a:t>
             </a:r>
             <a:r>
               <a:rPr lang="zh-CN" sz="2700" b="1">
@@ -2997,7 +2986,7 @@
                 <a:latin typeface="Microsoft YaHei"/>
                 <a:ea typeface="Microsoft YaHei"/>
               </a:rPr>
-              <a:t> Bestdori</a:t>
+              <a:t xml:space="preserve"> Bestdori</a:t>
             </a:r>
             <a:r>
               <a:rPr lang="zh-CN" sz="1350">
@@ -3354,7 +3343,7 @@
                 <a:latin typeface="Microsoft YaHei"/>
                 <a:ea typeface="Microsoft YaHei"/>
               </a:rPr>
-              <a:t> Bestdori </a:t>
+              <a:t xml:space="preserve"> Bestdori </a:t>
             </a:r>
             <a:r>
               <a:rPr lang="zh-CN" sz="1050">
@@ -3895,7 +3884,7 @@
                 <a:latin typeface="Microsoft YaHei"/>
                 <a:ea typeface="Microsoft YaHei"/>
               </a:rPr>
-              <a:t>Import </a:t>
+              <a:t xml:space="preserve">Import </a:t>
             </a:r>
             <a:r>
               <a:rPr lang="zh-CN" sz="1275" b="1">
@@ -3952,7 +3941,7 @@
                 <a:latin typeface="Microsoft YaHei"/>
                 <a:ea typeface="Microsoft YaHei"/>
               </a:rPr>
-              <a:t> Import</a:t>
+              <a:t xml:space="preserve"> Import</a:t>
             </a:r>
             <a:r>
               <a:rPr lang="zh-CN" sz="1050">
@@ -4093,7 +4082,7 @@
                 <a:latin typeface="Microsoft YaHei"/>
                 <a:ea typeface="Microsoft YaHei"/>
               </a:rPr>
-              <a:t>BestdoriHelper </a:t>
+              <a:t xml:space="preserve">BestdoriHelper </a:t>
             </a:r>
             <a:r>
               <a:rPr lang="zh-CN" sz="1125">
@@ -4138,7 +4127,7 @@
                 <a:latin typeface="Microsoft YaHei"/>
                 <a:ea typeface="Microsoft YaHei"/>
               </a:rPr>
-              <a:t>12 / 14</a:t>
+              <a:t>12 / 15</a:t>
             </a:r>
             <a:endParaRPr/>
           </a:p>
@@ -4150,11 +4139,11 @@
 </file>
 
 <file path=ppt/slides/slide13.xml><?xml version="1.0" encoding="utf-8"?>
-<p:sld xmlns:p="http://schemas.openxmlformats.org/presentationml/2006/main" xmlns:r="http://schemas.openxmlformats.org/officeDocument/2006/relationships" xmlns:a="http://schemas.openxmlformats.org/drawingml/2006/main">
+<p:sld xmlns:p="http://schemas.openxmlformats.org/presentationml/2006/main" xmlns:a="http://schemas.openxmlformats.org/drawingml/2006/main" xmlns:r="http://schemas.openxmlformats.org/officeDocument/2006/relationships">
   <p:cSld>
     <p:spTree>
       <p:nvGrpSpPr>
-        <p:cNvPr id="90" name=""/>
+        <p:cNvPr id="90" name="" descr="&lt;Slide style={{ width: 1280, height: 720, padding: '20px 72px', background: '#F7F8FA', flexDirection: 'column' }}&gt;&#10;&#10;    {/* ===== A · 标题块 ===== */}&#10;    &lt;Box style={{ height: 100, flexDirection: 'row', alignItems: 'center', gap: 16 }}&gt;&#10;        &lt;Box style={{ width: 6, height: 38, background: '#E8478B', borderRadius: 3 }} /&gt;&#10;        &lt;Text style={{ fontSize: 36, fontWeight: 'bold', color: '#1F2430' }}&gt;&#10;            先切成中文界面&#10;        &lt;/Text&gt;&#10;        &lt;Text style={{ fontSize: 19, color: '#8A93A6' }}&gt;&#10;            官网默认英文，先切中文再照着做&#10;        &lt;/Text&gt;&#10;    &lt;/Box&gt;&#10;&#10;    {/* ===== B · 内容区：左截图 + 右步骤 ===== */}&#10;    &lt;Box style={{ flex: 1, flexDirection: 'row', gap: 26, alignItems: 'center' }}&gt;&#10;&#10;        {/* 左：欢迎弹窗实拍（「用户界面语言」里「简」已选中） */}&#10;        &lt;Box style={{&#10;            width: 560, height: 440, borderRadius: 12, overflow: 'hidden',&#10;            background: '#FFFFFF', border: '1px solid #D5DAE4',&#10;            alignItems: 'center', justifyContent: 'center',&#10;            boxShadow: '0 6px 24px rgba(31,36,48,0.18)',&#10;        }}&gt;&#10;            &lt;Image src=&quot;assets/web_lang_dialog.png&quot; style={{ width: '100%', height: '100%', objectFit: 'contain' }} /&gt;&#10;        &lt;/Box&gt;&#10;&#10;        {/* 右：说明 */}&#10;        &lt;Box style={{ flex: 1, flexDirection: 'column', gap: 15 }}&gt;&#10;&#10;            &lt;Box style={{ flexDirection: 'row', gap: 12, alignItems: 'flex-start' }}&gt;&#10;                &lt;Box style={{&#10;                    width: 30, height: 30, borderRadius: 8, background: '#E8478B',&#10;                    alignItems: 'center', justifyContent: 'center',&#10;                }}&gt;&#10;                    &lt;Text style={{ fontSize: 16, fontWeight: 'bold', color: '#FFFFFF' }}&gt;1&lt;/Text&gt;&#10;                &lt;/Box&gt;&#10;                &lt;Box style={{ flex: 1, flexDirection: 'column' }}&gt;&#10;                    &lt;Text style={{ fontSize: 18, fontWeight: 'bold', color: '#1F2430' }}&gt;第一次进会弹设置框&lt;/Text&gt;&#10;                    &lt;Text style={{ fontSize: 14, color: '#5A6376', lineHeight: 1.4 }}&gt;&#10;                        里面就有「用户界面语言」，点「简」&#10;                    &lt;/Text&gt;&#10;                &lt;/Box&gt;&#10;            &lt;/Box&gt;&#10;&#10;            &lt;Box style={{ flexDirection: 'row', gap: 12, alignItems: 'flex-start' }}&gt;&#10;                &lt;Box style={{&#10;                    width: 30, height: 30, borderRadius: 8, background: '#E8478B',&#10;                    alignItems: 'center', justifyContent: 'center',&#10;                }}&gt;&#10;                    &lt;Text style={{ fontSize: 16, fontWeight: 'bold', color: '#FFFFFF' }}&gt;2&lt;/Text&gt;&#10;                &lt;/Box&gt;&#10;                &lt;Box style={{ flex: 1, flexDirection: 'column' }}&gt;&#10;                    &lt;Text style={{ fontSize: 18, fontWeight: 'bold', color: '#1F2430' }}&gt;已经访问过了？&lt;/Text&gt;&#10;                    &lt;Text style={{ fontSize: 14, color: '#5A6376', lineHeight: 1.4 }}&gt;&#10;                        去 用户档案 → 设置，同样能改&#10;                    &lt;/Text&gt;&#10;                &lt;/Box&gt;&#10;            &lt;/Box&gt;&#10;&#10;            &lt;Box style={{&#10;                flexDirection: 'row', gap: 10, alignItems: 'flex-start',&#10;                background: 'rgba(232,71,139,0.07)', borderRadius: 10, padding: '11px 15px',&#10;                marginTop: 2,&#10;            }}&gt;&#10;                &lt;Box style={{ width: 4, height: 44, background: '#E8478B', borderRadius: 2 }} /&gt;&#10;                &lt;Box style={{ flex: 1, flexDirection: 'column' }}&gt;&#10;                    &lt;Text style={{ fontSize: 14, fontWeight: 'bold', color: '#1F2430', lineHeight: 1.45 }}&gt;&#10;                        切成中文只是为了对得上这份说明&#10;                    &lt;/Text&gt;&#10;                    &lt;Text style={{ fontSize: 14, color: '#5A6376', lineHeight: 1.45 }}&gt;&#10;                        不切也能用，只是下一页的按钮名字会对不上（导入资料 = Import）。&#10;                    &lt;/Text&gt;&#10;                &lt;/Box&gt;&#10;            &lt;/Box&gt;&#10;&#10;        &lt;/Box&gt;&#10;    &lt;/Box&gt;&#10;&#10;    {/* ===== C · 页脚条 ===== */}&#10;    &lt;Box style={{ height: 60, flexDirection: 'row', alignItems: 'center', justifyContent: 'space-between' }}&gt;&#10;        &lt;Text style={{ fontSize: 15, color: '#8A93A6' }}&gt;BestdoriHelper 使用说明&lt;/Text&gt;&#10;        &lt;Text style={{ fontSize: 15, color: '#8A93A6' }}&gt;13 / 15&lt;/Text&gt;&#10;    &lt;/Box&gt;&#10;&#10;&lt;/Slide&gt;&#10;"/>
         <p:cNvGrpSpPr/>
         <p:nvPr/>
       </p:nvGrpSpPr>
@@ -4187,10 +4176,7 @@
         </p:spPr>
         <p:txBody>
           <a:bodyPr/>
-          <a:p>
-            <a:pPr/>
-            <a:endParaRPr/>
-          </a:p>
+          <a:p/>
         </p:txBody>
       </p:sp>
       <p:sp>
@@ -4216,15 +4202,783 @@
         </p:spPr>
         <p:txBody>
           <a:bodyPr/>
-          <a:p>
-            <a:pPr/>
-            <a:endParaRPr/>
-          </a:p>
+          <a:p/>
         </p:txBody>
       </p:sp>
       <p:sp>
         <p:nvSpPr>
           <p:cNvPr id="93" name="" descr="{&quot;isTemplate&quot;:true,&quot;type&quot;:&quot;text&quot;}"/>
+          <p:cNvSpPr txBox="1"/>
+          <p:nvPr/>
+        </p:nvSpPr>
+        <p:spPr>
+          <a:xfrm rot="0" flipH="0" flipV="0">
+            <a:off x="895350" y="457200"/>
+            <a:ext cx="2400300" cy="419100"/>
+          </a:xfrm>
+          <a:prstGeom prst="rect"/>
+        </p:spPr>
+        <p:txBody>
+          <a:bodyPr wrap="none" lIns="0" tIns="0" rIns="0" bIns="0"/>
+          <a:p>
+            <a:pPr>
+              <a:lnSpc>
+                <a:spcPct val="100000"/>
+              </a:lnSpc>
+            </a:pPr>
+            <a:r>
+              <a:rPr lang="zh-CN" sz="2700" b="1">
+                <a:solidFill>
+                  <a:srgbClr val="1F2430"/>
+                </a:solidFill>
+                <a:latin typeface="Microsoft YaHei"/>
+                <a:ea typeface="Microsoft YaHei"/>
+              </a:rPr>
+              <a:t>先切成中文界面</a:t>
+            </a:r>
+            <a:endParaRPr/>
+          </a:p>
+        </p:txBody>
+      </p:sp>
+      <p:sp>
+        <p:nvSpPr>
+          <p:cNvPr id="94" name="" descr="{&quot;isTemplate&quot;:true,&quot;type&quot;:&quot;text&quot;}"/>
+          <p:cNvSpPr txBox="1"/>
+          <p:nvPr/>
+        </p:nvSpPr>
+        <p:spPr>
+          <a:xfrm rot="0" flipH="0" flipV="0">
+            <a:off x="3448050" y="561975"/>
+            <a:ext cx="2714625" cy="219075"/>
+          </a:xfrm>
+          <a:prstGeom prst="rect"/>
+        </p:spPr>
+        <p:txBody>
+          <a:bodyPr wrap="none" lIns="0" tIns="0" rIns="0" bIns="0"/>
+          <a:p>
+            <a:pPr>
+              <a:lnSpc>
+                <a:spcPct val="100000"/>
+              </a:lnSpc>
+            </a:pPr>
+            <a:r>
+              <a:rPr lang="zh-CN" sz="1425">
+                <a:solidFill>
+                  <a:srgbClr val="8A93A6"/>
+                </a:solidFill>
+                <a:latin typeface="Microsoft YaHei"/>
+                <a:ea typeface="Microsoft YaHei"/>
+              </a:rPr>
+              <a:t>官网默认英文，先切中文再照着做</a:t>
+            </a:r>
+            <a:endParaRPr/>
+          </a:p>
+        </p:txBody>
+      </p:sp>
+      <p:sp>
+        <p:nvSpPr>
+          <p:cNvPr id="95" name=""/>
+          <p:cNvSpPr/>
+          <p:nvPr/>
+        </p:nvSpPr>
+        <p:spPr>
+          <a:xfrm rot="0" flipH="0" flipV="0">
+            <a:off x="685800" y="1524000"/>
+            <a:ext cx="5334000" cy="4191000"/>
+          </a:xfrm>
+          <a:prstGeom prst="roundRect">
+            <a:avLst>
+              <a:gd name="adj" fmla="val 2727"/>
+            </a:avLst>
+          </a:prstGeom>
+          <a:solidFill>
+            <a:srgbClr val="FFFFFF"/>
+          </a:solidFill>
+          <a:ln w="12700">
+            <a:solidFill>
+              <a:srgbClr val="D5DAE4"/>
+            </a:solidFill>
+            <a:prstDash val="solid"/>
+          </a:ln>
+          <a:effectLst>
+            <a:outerShdw blurRad="228600" dist="57150" dir="5400000">
+              <a:srgbClr val="1F2430">
+                <a:alpha val="18000"/>
+              </a:srgbClr>
+            </a:outerShdw>
+          </a:effectLst>
+        </p:spPr>
+        <p:txBody>
+          <a:bodyPr/>
+          <a:p/>
+        </p:txBody>
+      </p:sp>
+      <p:pic>
+        <p:nvPicPr>
+          <p:cNvPr id="96" name=""/>
+          <p:cNvPicPr>
+            <a:picLocks noChangeAspect="1"/>
+          </p:cNvPicPr>
+          <p:nvPr/>
+        </p:nvPicPr>
+        <p:blipFill>
+          <a:blip r:embed="rId1"/>
+          <a:srcRect l="0" t="2295" r="0" b="2295"/>
+          <a:stretch>
+            <a:fillRect/>
+          </a:stretch>
+        </p:blipFill>
+        <p:spPr>
+          <a:xfrm rot="0" flipH="0" flipV="0">
+            <a:off x="685800" y="1524000"/>
+            <a:ext cx="5334000" cy="4191000"/>
+          </a:xfrm>
+          <a:custGeom>
+            <a:pathLst>
+              <a:path w="560" h="440">
+                <a:moveTo>
+                  <a:pt x="548" y="0"/>
+                </a:moveTo>
+                <a:cubicBezTo>
+                  <a:pt x="555" y="0"/>
+                  <a:pt x="560" y="5"/>
+                  <a:pt x="560" y="12"/>
+                </a:cubicBezTo>
+                <a:lnTo>
+                  <a:pt x="560" y="428"/>
+                </a:lnTo>
+                <a:cubicBezTo>
+                  <a:pt x="560" y="435"/>
+                  <a:pt x="555" y="440"/>
+                  <a:pt x="548" y="440"/>
+                </a:cubicBezTo>
+                <a:lnTo>
+                  <a:pt x="12" y="440"/>
+                </a:lnTo>
+                <a:cubicBezTo>
+                  <a:pt x="5" y="440"/>
+                  <a:pt x="0" y="435"/>
+                  <a:pt x="0" y="428"/>
+                </a:cubicBezTo>
+                <a:lnTo>
+                  <a:pt x="0" y="12"/>
+                </a:lnTo>
+                <a:cubicBezTo>
+                  <a:pt x="0" y="5"/>
+                  <a:pt x="5" y="0"/>
+                  <a:pt x="12" y="0"/>
+                </a:cubicBezTo>
+                <a:lnTo>
+                  <a:pt x="548" y="0"/>
+                </a:lnTo>
+                <a:close/>
+              </a:path>
+            </a:pathLst>
+          </a:custGeom>
+          <a:ln/>
+        </p:spPr>
+      </p:pic>
+      <p:sp>
+        <p:nvSpPr>
+          <p:cNvPr id="97" name=""/>
+          <p:cNvSpPr/>
+          <p:nvPr/>
+        </p:nvSpPr>
+        <p:spPr>
+          <a:xfrm rot="0" flipH="0" flipV="0">
+            <a:off x="6267450" y="2686050"/>
+            <a:ext cx="285750" cy="285750"/>
+          </a:xfrm>
+          <a:prstGeom prst="roundRect">
+            <a:avLst>
+              <a:gd name="adj" fmla="val 26667"/>
+            </a:avLst>
+          </a:prstGeom>
+          <a:solidFill>
+            <a:srgbClr val="E8478B"/>
+          </a:solidFill>
+          <a:ln/>
+        </p:spPr>
+        <p:txBody>
+          <a:bodyPr/>
+          <a:p/>
+        </p:txBody>
+      </p:sp>
+      <p:sp>
+        <p:nvSpPr>
+          <p:cNvPr id="98" name="" descr="{&quot;isTemplate&quot;:true,&quot;type&quot;:&quot;text&quot;}"/>
+          <p:cNvSpPr txBox="1"/>
+          <p:nvPr/>
+        </p:nvSpPr>
+        <p:spPr>
+          <a:xfrm rot="0" flipH="0" flipV="0">
+            <a:off x="6362700" y="2733675"/>
+            <a:ext cx="95250" cy="190500"/>
+          </a:xfrm>
+          <a:prstGeom prst="rect"/>
+        </p:spPr>
+        <p:txBody>
+          <a:bodyPr wrap="none" lIns="0" tIns="0" rIns="0" bIns="0"/>
+          <a:p>
+            <a:pPr>
+              <a:lnSpc>
+                <a:spcPct val="100000"/>
+              </a:lnSpc>
+            </a:pPr>
+            <a:r>
+              <a:rPr lang="en-US" sz="1200" b="1">
+                <a:solidFill>
+                  <a:srgbClr val="FFFFFF"/>
+                </a:solidFill>
+                <a:latin typeface="Microsoft YaHei"/>
+                <a:ea typeface="Microsoft YaHei"/>
+              </a:rPr>
+              <a:t>1</a:t>
+            </a:r>
+            <a:endParaRPr/>
+          </a:p>
+        </p:txBody>
+      </p:sp>
+      <p:sp>
+        <p:nvSpPr>
+          <p:cNvPr id="99" name="" descr="{&quot;isTemplate&quot;:true,&quot;type&quot;:&quot;text&quot;}"/>
+          <p:cNvSpPr txBox="1"/>
+          <p:nvPr/>
+        </p:nvSpPr>
+        <p:spPr>
+          <a:xfrm rot="0" flipH="0" flipV="0">
+            <a:off x="6667500" y="2686050"/>
+            <a:ext cx="4838700" cy="209550"/>
+          </a:xfrm>
+          <a:prstGeom prst="rect"/>
+        </p:spPr>
+        <p:txBody>
+          <a:bodyPr wrap="none" lIns="0" tIns="0" rIns="0" bIns="0"/>
+          <a:p>
+            <a:pPr>
+              <a:lnSpc>
+                <a:spcPct val="100000"/>
+              </a:lnSpc>
+            </a:pPr>
+            <a:r>
+              <a:rPr lang="zh-CN" sz="1350" b="1">
+                <a:solidFill>
+                  <a:srgbClr val="1F2430"/>
+                </a:solidFill>
+                <a:latin typeface="Microsoft YaHei"/>
+                <a:ea typeface="Microsoft YaHei"/>
+              </a:rPr>
+              <a:t>第一次进会弹设置框</a:t>
+            </a:r>
+            <a:endParaRPr/>
+          </a:p>
+        </p:txBody>
+      </p:sp>
+      <p:sp>
+        <p:nvSpPr>
+          <p:cNvPr id="100" name="" descr="{&quot;isTemplate&quot;:true,&quot;type&quot;:&quot;text&quot;}"/>
+          <p:cNvSpPr txBox="1"/>
+          <p:nvPr/>
+        </p:nvSpPr>
+        <p:spPr>
+          <a:xfrm rot="0" flipH="0" flipV="0">
+            <a:off x="6667500" y="2895600"/>
+            <a:ext cx="4838700" cy="228600"/>
+          </a:xfrm>
+          <a:prstGeom prst="rect"/>
+        </p:spPr>
+        <p:txBody>
+          <a:bodyPr wrap="none" lIns="0" tIns="0" rIns="0" bIns="0"/>
+          <a:p>
+            <a:pPr>
+              <a:lnSpc>
+                <a:spcPct val="140000"/>
+              </a:lnSpc>
+            </a:pPr>
+            <a:r>
+              <a:rPr lang="zh-CN" sz="1050">
+                <a:solidFill>
+                  <a:srgbClr val="5A6376"/>
+                </a:solidFill>
+                <a:latin typeface="Microsoft YaHei"/>
+                <a:ea typeface="Microsoft YaHei"/>
+              </a:rPr>
+              <a:t>里面就有「用户界面语言」，点「简」</a:t>
+            </a:r>
+            <a:endParaRPr/>
+          </a:p>
+        </p:txBody>
+      </p:sp>
+      <p:sp>
+        <p:nvSpPr>
+          <p:cNvPr id="101" name=""/>
+          <p:cNvSpPr/>
+          <p:nvPr/>
+        </p:nvSpPr>
+        <p:spPr>
+          <a:xfrm rot="0" flipH="0" flipV="0">
+            <a:off x="6267450" y="3267075"/>
+            <a:ext cx="285750" cy="285750"/>
+          </a:xfrm>
+          <a:prstGeom prst="roundRect">
+            <a:avLst>
+              <a:gd name="adj" fmla="val 26667"/>
+            </a:avLst>
+          </a:prstGeom>
+          <a:solidFill>
+            <a:srgbClr val="E8478B"/>
+          </a:solidFill>
+          <a:ln/>
+        </p:spPr>
+        <p:txBody>
+          <a:bodyPr/>
+          <a:p/>
+        </p:txBody>
+      </p:sp>
+      <p:sp>
+        <p:nvSpPr>
+          <p:cNvPr id="102" name="" descr="{&quot;isTemplate&quot;:true,&quot;type&quot;:&quot;text&quot;}"/>
+          <p:cNvSpPr txBox="1"/>
+          <p:nvPr/>
+        </p:nvSpPr>
+        <p:spPr>
+          <a:xfrm rot="0" flipH="0" flipV="0">
+            <a:off x="6362700" y="3314700"/>
+            <a:ext cx="95250" cy="190500"/>
+          </a:xfrm>
+          <a:prstGeom prst="rect"/>
+        </p:spPr>
+        <p:txBody>
+          <a:bodyPr wrap="none" lIns="0" tIns="0" rIns="0" bIns="0"/>
+          <a:p>
+            <a:pPr>
+              <a:lnSpc>
+                <a:spcPct val="100000"/>
+              </a:lnSpc>
+            </a:pPr>
+            <a:r>
+              <a:rPr lang="en-US" sz="1200" b="1">
+                <a:solidFill>
+                  <a:srgbClr val="FFFFFF"/>
+                </a:solidFill>
+                <a:latin typeface="Microsoft YaHei"/>
+                <a:ea typeface="Microsoft YaHei"/>
+              </a:rPr>
+              <a:t>2</a:t>
+            </a:r>
+            <a:endParaRPr/>
+          </a:p>
+        </p:txBody>
+      </p:sp>
+      <p:sp>
+        <p:nvSpPr>
+          <p:cNvPr id="103" name="" descr="{&quot;isTemplate&quot;:true,&quot;type&quot;:&quot;text&quot;}"/>
+          <p:cNvSpPr txBox="1"/>
+          <p:nvPr/>
+        </p:nvSpPr>
+        <p:spPr>
+          <a:xfrm rot="0" flipH="0" flipV="0">
+            <a:off x="6667500" y="3267075"/>
+            <a:ext cx="4838700" cy="209550"/>
+          </a:xfrm>
+          <a:prstGeom prst="rect"/>
+        </p:spPr>
+        <p:txBody>
+          <a:bodyPr wrap="none" lIns="0" tIns="0" rIns="0" bIns="0"/>
+          <a:p>
+            <a:pPr>
+              <a:lnSpc>
+                <a:spcPct val="100000"/>
+              </a:lnSpc>
+            </a:pPr>
+            <a:r>
+              <a:rPr lang="zh-CN" sz="1350" b="1">
+                <a:solidFill>
+                  <a:srgbClr val="1F2430"/>
+                </a:solidFill>
+                <a:latin typeface="Microsoft YaHei"/>
+                <a:ea typeface="Microsoft YaHei"/>
+              </a:rPr>
+              <a:t>已经访问过了？</a:t>
+            </a:r>
+            <a:endParaRPr/>
+          </a:p>
+        </p:txBody>
+      </p:sp>
+      <p:sp>
+        <p:nvSpPr>
+          <p:cNvPr id="104" name="" descr="{&quot;isTemplate&quot;:true,&quot;type&quot;:&quot;text&quot;}"/>
+          <p:cNvSpPr txBox="1"/>
+          <p:nvPr/>
+        </p:nvSpPr>
+        <p:spPr>
+          <a:xfrm rot="0" flipH="0" flipV="0">
+            <a:off x="6667500" y="3476625"/>
+            <a:ext cx="4838700" cy="228600"/>
+          </a:xfrm>
+          <a:prstGeom prst="rect"/>
+        </p:spPr>
+        <p:txBody>
+          <a:bodyPr wrap="none" lIns="0" tIns="0" rIns="0" bIns="0"/>
+          <a:p>
+            <a:pPr>
+              <a:lnSpc>
+                <a:spcPct val="140000"/>
+              </a:lnSpc>
+            </a:pPr>
+            <a:r>
+              <a:rPr lang="zh-CN" sz="1050">
+                <a:solidFill>
+                  <a:srgbClr val="5A6376"/>
+                </a:solidFill>
+                <a:latin typeface="Microsoft YaHei"/>
+                <a:ea typeface="Microsoft YaHei"/>
+              </a:rPr>
+              <a:t>去</a:t>
+            </a:r>
+            <a:r>
+              <a:rPr lang="en-US" sz="1050">
+                <a:solidFill>
+                  <a:srgbClr val="5A6376"/>
+                </a:solidFill>
+                <a:latin typeface="Microsoft YaHei"/>
+                <a:ea typeface="Microsoft YaHei"/>
+              </a:rPr>
+              <a:t xml:space="preserve"> </a:t>
+            </a:r>
+            <a:r>
+              <a:rPr lang="zh-CN" sz="1050">
+                <a:solidFill>
+                  <a:srgbClr val="5A6376"/>
+                </a:solidFill>
+                <a:latin typeface="Microsoft YaHei"/>
+                <a:ea typeface="Microsoft YaHei"/>
+              </a:rPr>
+              <a:t>用户档案</a:t>
+            </a:r>
+            <a:r>
+              <a:rPr lang="en-US" sz="1050">
+                <a:solidFill>
+                  <a:srgbClr val="5A6376"/>
+                </a:solidFill>
+                <a:latin typeface="Microsoft YaHei"/>
+                <a:ea typeface="Microsoft YaHei"/>
+              </a:rPr>
+              <a:t xml:space="preserve"> → </a:t>
+            </a:r>
+            <a:r>
+              <a:rPr lang="zh-CN" sz="1050">
+                <a:solidFill>
+                  <a:srgbClr val="5A6376"/>
+                </a:solidFill>
+                <a:latin typeface="Microsoft YaHei"/>
+                <a:ea typeface="Microsoft YaHei"/>
+              </a:rPr>
+              <a:t>设置，同样能改</a:t>
+            </a:r>
+            <a:endParaRPr/>
+          </a:p>
+        </p:txBody>
+      </p:sp>
+      <p:sp>
+        <p:nvSpPr>
+          <p:cNvPr id="105" name=""/>
+          <p:cNvSpPr/>
+          <p:nvPr/>
+        </p:nvSpPr>
+        <p:spPr>
+          <a:xfrm rot="0" flipH="0" flipV="0">
+            <a:off x="6267450" y="3867150"/>
+            <a:ext cx="5238750" cy="685800"/>
+          </a:xfrm>
+          <a:prstGeom prst="roundRect">
+            <a:avLst>
+              <a:gd name="adj" fmla="val 13889"/>
+            </a:avLst>
+          </a:prstGeom>
+          <a:solidFill>
+            <a:srgbClr val="E8478B">
+              <a:alpha val="7000"/>
+            </a:srgbClr>
+          </a:solidFill>
+          <a:ln/>
+        </p:spPr>
+        <p:txBody>
+          <a:bodyPr/>
+          <a:p/>
+        </p:txBody>
+      </p:sp>
+      <p:sp>
+        <p:nvSpPr>
+          <p:cNvPr id="106" name=""/>
+          <p:cNvSpPr/>
+          <p:nvPr/>
+        </p:nvSpPr>
+        <p:spPr>
+          <a:xfrm rot="0" flipH="0" flipV="0">
+            <a:off x="6410325" y="3971925"/>
+            <a:ext cx="38100" cy="419100"/>
+          </a:xfrm>
+          <a:prstGeom prst="roundRect">
+            <a:avLst>
+              <a:gd name="adj" fmla="val 50000"/>
+            </a:avLst>
+          </a:prstGeom>
+          <a:solidFill>
+            <a:srgbClr val="E8478B"/>
+          </a:solidFill>
+          <a:ln/>
+        </p:spPr>
+        <p:txBody>
+          <a:bodyPr/>
+          <a:p/>
+        </p:txBody>
+      </p:sp>
+      <p:sp>
+        <p:nvSpPr>
+          <p:cNvPr id="107" name="" descr="{&quot;isTemplate&quot;:true,&quot;type&quot;:&quot;text&quot;}"/>
+          <p:cNvSpPr txBox="1"/>
+          <p:nvPr/>
+        </p:nvSpPr>
+        <p:spPr>
+          <a:xfrm rot="0" flipH="0" flipV="0">
+            <a:off x="6543675" y="3971925"/>
+            <a:ext cx="4819650" cy="238125"/>
+          </a:xfrm>
+          <a:prstGeom prst="rect"/>
+        </p:spPr>
+        <p:txBody>
+          <a:bodyPr wrap="none" lIns="0" tIns="0" rIns="0" bIns="0"/>
+          <a:p>
+            <a:pPr>
+              <a:lnSpc>
+                <a:spcPct val="145000"/>
+              </a:lnSpc>
+            </a:pPr>
+            <a:r>
+              <a:rPr lang="zh-CN" sz="1050" b="1">
+                <a:solidFill>
+                  <a:srgbClr val="1F2430"/>
+                </a:solidFill>
+                <a:latin typeface="Microsoft YaHei"/>
+                <a:ea typeface="Microsoft YaHei"/>
+              </a:rPr>
+              <a:t>切成中文只是为了对得上这份说明</a:t>
+            </a:r>
+            <a:endParaRPr/>
+          </a:p>
+        </p:txBody>
+      </p:sp>
+      <p:sp>
+        <p:nvSpPr>
+          <p:cNvPr id="108" name="" descr="{&quot;isTemplate&quot;:true,&quot;type&quot;:&quot;text&quot;}"/>
+          <p:cNvSpPr txBox="1"/>
+          <p:nvPr/>
+        </p:nvSpPr>
+        <p:spPr>
+          <a:xfrm rot="0" flipH="0" flipV="0">
+            <a:off x="6543675" y="4210050"/>
+            <a:ext cx="4819650" cy="238125"/>
+          </a:xfrm>
+          <a:prstGeom prst="rect"/>
+        </p:spPr>
+        <p:txBody>
+          <a:bodyPr wrap="none" lIns="0" tIns="0" rIns="0" bIns="0"/>
+          <a:p>
+            <a:pPr>
+              <a:lnSpc>
+                <a:spcPct val="145000"/>
+              </a:lnSpc>
+            </a:pPr>
+            <a:r>
+              <a:rPr lang="zh-CN" sz="1050">
+                <a:solidFill>
+                  <a:srgbClr val="5A6376"/>
+                </a:solidFill>
+                <a:latin typeface="Microsoft YaHei"/>
+                <a:ea typeface="Microsoft YaHei"/>
+              </a:rPr>
+              <a:t>不切也能用，只是下一页的按钮名字会对不上（导入资料</a:t>
+            </a:r>
+            <a:r>
+              <a:rPr lang="en-US" sz="1050">
+                <a:solidFill>
+                  <a:srgbClr val="5A6376"/>
+                </a:solidFill>
+                <a:latin typeface="Microsoft YaHei"/>
+                <a:ea typeface="Microsoft YaHei"/>
+              </a:rPr>
+              <a:t xml:space="preserve"> = Import</a:t>
+            </a:r>
+            <a:r>
+              <a:rPr lang="zh-CN" sz="1050">
+                <a:solidFill>
+                  <a:srgbClr val="5A6376"/>
+                </a:solidFill>
+                <a:latin typeface="Microsoft YaHei"/>
+                <a:ea typeface="Microsoft YaHei"/>
+              </a:rPr>
+              <a:t>）。</a:t>
+            </a:r>
+            <a:endParaRPr/>
+          </a:p>
+        </p:txBody>
+      </p:sp>
+      <p:sp>
+        <p:nvSpPr>
+          <p:cNvPr id="109" name="" descr="{&quot;isTemplate&quot;:true,&quot;type&quot;:&quot;text&quot;}"/>
+          <p:cNvSpPr txBox="1"/>
+          <p:nvPr/>
+        </p:nvSpPr>
+        <p:spPr>
+          <a:xfrm rot="0" flipH="0" flipV="0">
+            <a:off x="685800" y="6296025"/>
+            <a:ext cx="1638300" cy="171450"/>
+          </a:xfrm>
+          <a:prstGeom prst="rect"/>
+        </p:spPr>
+        <p:txBody>
+          <a:bodyPr wrap="none" lIns="0" tIns="0" rIns="0" bIns="0"/>
+          <a:p>
+            <a:pPr>
+              <a:lnSpc>
+                <a:spcPct val="100000"/>
+              </a:lnSpc>
+            </a:pPr>
+            <a:r>
+              <a:rPr lang="en-US" sz="1125">
+                <a:solidFill>
+                  <a:srgbClr val="8A93A6"/>
+                </a:solidFill>
+                <a:latin typeface="Microsoft YaHei"/>
+                <a:ea typeface="Microsoft YaHei"/>
+              </a:rPr>
+              <a:t xml:space="preserve">BestdoriHelper </a:t>
+            </a:r>
+            <a:r>
+              <a:rPr lang="zh-CN" sz="1125">
+                <a:solidFill>
+                  <a:srgbClr val="8A93A6"/>
+                </a:solidFill>
+                <a:latin typeface="Microsoft YaHei"/>
+                <a:ea typeface="Microsoft YaHei"/>
+              </a:rPr>
+              <a:t>使用说明</a:t>
+            </a:r>
+            <a:endParaRPr/>
+          </a:p>
+        </p:txBody>
+      </p:sp>
+      <p:sp>
+        <p:nvSpPr>
+          <p:cNvPr id="110" name="" descr="{&quot;isTemplate&quot;:true,&quot;type&quot;:&quot;text&quot;}"/>
+          <p:cNvSpPr txBox="1"/>
+          <p:nvPr/>
+        </p:nvSpPr>
+        <p:spPr>
+          <a:xfrm rot="0" flipH="0" flipV="0">
+            <a:off x="11020425" y="6296025"/>
+            <a:ext cx="485775" cy="171450"/>
+          </a:xfrm>
+          <a:prstGeom prst="rect"/>
+        </p:spPr>
+        <p:txBody>
+          <a:bodyPr wrap="none" lIns="0" tIns="0" rIns="0" bIns="0"/>
+          <a:p>
+            <a:pPr>
+              <a:lnSpc>
+                <a:spcPct val="100000"/>
+              </a:lnSpc>
+            </a:pPr>
+            <a:r>
+              <a:rPr lang="en-US" sz="1125">
+                <a:solidFill>
+                  <a:srgbClr val="8A93A6"/>
+                </a:solidFill>
+                <a:latin typeface="Microsoft YaHei"/>
+                <a:ea typeface="Microsoft YaHei"/>
+              </a:rPr>
+              <a:t>13 / 15</a:t>
+            </a:r>
+            <a:endParaRPr/>
+          </a:p>
+        </p:txBody>
+      </p:sp>
+    </p:spTree>
+  </p:cSld>
+</p:sld>
+</file>
+
+<file path=ppt/slides/slide14.xml><?xml version="1.0" encoding="utf-8"?>
+<p:sld xmlns:p="http://schemas.openxmlformats.org/presentationml/2006/main" xmlns:a="http://schemas.openxmlformats.org/drawingml/2006/main" xmlns:r="http://schemas.openxmlformats.org/officeDocument/2006/relationships">
+  <p:cSld>
+    <p:spTree>
+      <p:nvGrpSpPr>
+        <p:cNvPr id="111" name="" descr="&lt;Slide style={{ width: 1280, height: 720, padding: '20px 72px', background: '#F7F8FA', flexDirection: 'column' }}&gt;&#13;&#10;&#13;&#10;    {/* ===== A · 标题块 ===== */}&#13;&#10;    &lt;Box style={{ height: 100, flexDirection: 'row', alignItems: 'center', gap: 16 }}&gt;&#13;&#10;        &lt;Box style={{ width: 6, height: 38, background: '#E8478B', borderRadius: 3 }} /&gt;&#13;&#10;        &lt;Text style={{ fontSize: 36, fontWeight: 'bold', color: '#1F2430' }}&gt;&#13;&#10;            在官网上导入&#13;&#10;        &lt;/Text&gt;&#13;&#10;        &lt;Text style={{ fontSize: 19, color: '#8A93A6' }}&gt;&#13;&#10;            bestdori.com/profile/manager&#13;&#10;        &lt;/Text&gt;&#13;&#10;    &lt;/Box&gt;&#13;&#10;&#13;&#10;    {/* ===== B · 内容区：左截图 + 右步骤 ===== */}&#13;&#10;    &lt;Box style={{ flex: 1, flexDirection: 'row', gap: 26, alignItems: 'center' }}&gt;&#13;&#10;&#13;&#10;        {/* 左：带 ①②③④ 标注的官网实拍 */}&#13;&#10;        &lt;Box style={{&#13;&#10;            width: 700, height: 438, borderRadius: 12, overflow: 'hidden',&#13;&#10;            background: '#1F2430', border: '1px solid #2E3442',&#13;&#10;            boxShadow: '0 6px 24px rgba(31,36,48,0.18)',&#13;&#10;        }}&gt;&#13;&#10;            &lt;Image src=&quot;assets/web_import_annotated.png&quot; style={{ width: '100%', height: '100%', objectFit: 'contain' }} /&gt;&#13;&#10;        &lt;/Box&gt;&#13;&#10;&#13;&#10;        {/* 右：四步 + 提醒 */}&#13;&#10;        &lt;Box style={{ flex: 1, flexDirection: 'column', gap: 15 }}&gt;&#13;&#10;&#13;&#10;            &lt;Box style={{ flexDirection: 'row', gap: 12, alignItems: 'flex-start' }}&gt;&#13;&#10;                &lt;Box style={{&#13;&#10;                    width: 30, height: 30, borderRadius: 8, background: '#E8478B',&#13;&#10;                    alignItems: 'center', justifyContent: 'center',&#13;&#10;                }}&gt;&#13;&#10;                    &lt;Text style={{ fontSize: 16, fontWeight: 'bold', color: '#FFFFFF' }}&gt;1&lt;/Text&gt;&#13;&#10;                &lt;/Box&gt;&#13;&#10;                &lt;Box style={{ flex: 1, flexDirection: 'column' }}&gt;&#13;&#10;                    &lt;Text style={{ fontSize: 18, fontWeight: 'bold', color: '#1F2430' }}&gt;先登录&lt;/Text&gt;&#13;&#10;                    &lt;Text style={{ fontSize: 14, color: '#5A6376', lineHeight: 1.4 }}&gt;&#13;&#10;                        页面中部「云存取」那段里的 登录&#13;&#10;                    &lt;/Text&gt;&#13;&#10;                &lt;/Box&gt;&#13;&#10;            &lt;/Box&gt;&#13;&#10;&#13;&#10;            &lt;Box style={{ flexDirection: 'row', gap: 12, alignItems: 'flex-start' }}&gt;&#13;&#10;                &lt;Box style={{&#13;&#10;                    width: 30, height: 30, borderRadius: 8, background: '#E8478B',&#13;&#10;                    alignItems: 'center', justifyContent: 'center',&#13;&#10;                }}&gt;&#13;&#10;                    &lt;Text style={{ fontSize: 16, fontWeight: 'bold', color: '#FFFFFF' }}&gt;2&lt;/Text&gt;&#13;&#10;                &lt;/Box&gt;&#13;&#10;                &lt;Box style={{ flex: 1, flexDirection: 'column' }}&gt;&#13;&#10;                    &lt;Text style={{ fontSize: 18, fontWeight: 'bold', color: '#1F2430' }}&gt;点侧栏 导入资料&lt;/Text&gt;&#13;&#10;                    &lt;Text style={{ fontSize: 14, color: '#5A6376', lineHeight: 1.4 }}&gt;&#13;&#10;                        左栏「用户档案」组里，云存取下一行&#13;&#10;                    &lt;/Text&gt;&#13;&#10;                &lt;/Box&gt;&#13;&#10;            &lt;/Box&gt;&#13;&#10;&#13;&#10;            &lt;Box style={{ flexDirection: 'row', gap: 12, alignItems: 'flex-start' }}&gt;&#13;&#10;                &lt;Box style={{&#13;&#10;                    width: 30, height: 30, borderRadius: 8, background: '#E8478B',&#13;&#10;                    alignItems: 'center', justifyContent: 'center',&#13;&#10;                }}&gt;&#13;&#10;                    &lt;Text style={{ fontSize: 16, fontWeight: 'bold', color: '#FFFFFF' }}&gt;3&lt;/Text&gt;&#13;&#10;                &lt;/Box&gt;&#13;&#10;                &lt;Box style={{ flex: 1, flexDirection: 'column' }}&gt;&#13;&#10;                    &lt;Text style={{ fontSize: 18, fontWeight: 'bold', color: '#1F2430' }}&gt;粘贴档案&lt;/Text&gt;&#13;&#10;                    &lt;Text style={{ fontSize: 14, color: '#5A6376', lineHeight: 1.4 }}&gt;&#13;&#10;                        粘进「用户档案数据」文本框&#13;&#10;                    &lt;/Text&gt;&#13;&#10;                &lt;/Box&gt;&#13;&#10;            &lt;/Box&gt;&#13;&#10;&#13;&#10;            &lt;Box style={{ flexDirection: 'row', gap: 12, alignItems: 'flex-start' }}&gt;&#13;&#10;                &lt;Box style={{&#13;&#10;                    width: 30, height: 30, borderRadius: 8, background: '#E8478B',&#13;&#10;                    alignItems: 'center', justifyContent: 'center',&#13;&#10;                }}&gt;&#13;&#10;                    &lt;Text style={{ fontSize: 16, fontWeight: 'bold', color: '#FFFFFF' }}&gt;4&lt;/Text&gt;&#13;&#10;                &lt;/Box&gt;&#13;&#10;                &lt;Box style={{ flex: 1, flexDirection: 'column' }}&gt;&#13;&#10;                    &lt;Text style={{ fontSize: 18, fontWeight: 'bold', color: '#1F2430' }}&gt;点 导入&lt;/Text&gt;&#13;&#10;                    &lt;Text style={{ fontSize: 14, color: '#5A6376', lineHeight: 1.4 }}&gt;&#13;&#10;                        文本框左下角正下方那个按钮&#13;&#10;                    &lt;/Text&gt;&#13;&#10;                &lt;/Box&gt;&#13;&#10;            &lt;/Box&gt;&#13;&#10;&#13;&#10;            &lt;Box style={{&#13;&#10;                flexDirection: 'row', gap: 10, alignItems: 'flex-start',&#13;&#10;                background: 'rgba(232,71,139,0.07)', borderRadius: 10, padding: '11px 15px',&#13;&#10;                marginTop: 2,&#13;&#10;            }}&gt;&#13;&#10;                &lt;Box style={{ width: 4, height: 44, background: '#E8478B', borderRadius: 2 }} /&gt;&#13;&#10;                &lt;Box style={{ flex: 1, flexDirection: 'column' }}&gt;&#13;&#10;                    &lt;Text style={{ fontSize: 14, fontWeight: 'bold', color: '#1F2430', lineHeight: 1.45 }}&gt;&#13;&#10;                        登录入口不在右上角，在页面中部&#13;&#10;                    &lt;/Text&gt;&#13;&#10;                    &lt;Text style={{ fontSize: 14, color: '#5A6376', lineHeight: 1.45 }}&gt;&#13;&#10;                        上一页已把界面切成中文，所以这里的截图都是中文的。等级 / 技能填的是满值，只影响算分，不影响卡牌归属。&#13;&#10;                    &lt;/Text&gt;&#13;&#10;                &lt;/Box&gt;&#13;&#10;            &lt;/Box&gt;&#13;&#10;&#13;&#10;        &lt;/Box&gt;&#13;&#10;    &lt;/Box&gt;&#13;&#10;&#13;&#10;    {/* ===== C · 页脚条 ===== */}&#13;&#10;    &lt;Box style={{ height: 60, flexDirection: 'row', alignItems: 'center', justifyContent: 'space-between' }}&gt;&#13;&#10;        &lt;Text style={{ fontSize: 15, color: '#8A93A6' }}&gt;BestdoriHelper 使用说明&lt;/Text&gt;&#13;&#10;        &lt;Text style={{ fontSize: 15, color: '#8A93A6' }}&gt;14 / 15&lt;/Text&gt;&#13;&#10;    &lt;/Box&gt;&#13;&#10;&#13;&#10;&lt;/Slide&gt;&#13;&#10;"/>
+        <p:cNvGrpSpPr/>
+        <p:nvPr/>
+      </p:nvGrpSpPr>
+      <p:grpSpPr>
+        <a:xfrm>
+          <a:off x="0" y="0"/>
+          <a:ext cx="0" cy="0"/>
+          <a:chOff x="0" y="0"/>
+          <a:chExt cx="0" cy="0"/>
+        </a:xfrm>
+      </p:grpSpPr>
+      <p:sp>
+        <p:nvSpPr>
+          <p:cNvPr id="112" name=""/>
+          <p:cNvSpPr/>
+          <p:nvPr/>
+        </p:nvSpPr>
+        <p:spPr>
+          <a:xfrm rot="0" flipH="0" flipV="0">
+            <a:off x="0" y="0"/>
+            <a:ext cx="12192000" cy="6858000"/>
+          </a:xfrm>
+          <a:prstGeom prst="rect">
+            <a:avLst/>
+          </a:prstGeom>
+          <a:solidFill>
+            <a:srgbClr val="F7F8FA"/>
+          </a:solidFill>
+          <a:ln/>
+        </p:spPr>
+        <p:txBody>
+          <a:bodyPr/>
+          <a:p/>
+        </p:txBody>
+      </p:sp>
+      <p:sp>
+        <p:nvSpPr>
+          <p:cNvPr id="113" name=""/>
+          <p:cNvSpPr/>
+          <p:nvPr/>
+        </p:nvSpPr>
+        <p:spPr>
+          <a:xfrm rot="0" flipH="0" flipV="0">
+            <a:off x="685800" y="485775"/>
+            <a:ext cx="57150" cy="361950"/>
+          </a:xfrm>
+          <a:prstGeom prst="roundRect">
+            <a:avLst>
+              <a:gd name="adj" fmla="val 50000"/>
+            </a:avLst>
+          </a:prstGeom>
+          <a:solidFill>
+            <a:srgbClr val="E8478B"/>
+          </a:solidFill>
+          <a:ln/>
+        </p:spPr>
+        <p:txBody>
+          <a:bodyPr/>
+          <a:p/>
+        </p:txBody>
+      </p:sp>
+      <p:sp>
+        <p:nvSpPr>
+          <p:cNvPr id="114" name="" descr="{&quot;isTemplate&quot;:true,&quot;type&quot;:&quot;text&quot;}"/>
           <p:cNvSpPr txBox="1"/>
           <p:nvPr/>
         </p:nvSpPr>
@@ -4259,7 +5013,7 @@
       </p:sp>
       <p:sp>
         <p:nvSpPr>
-          <p:cNvPr id="94" name="" descr="{&quot;isTemplate&quot;:true,&quot;type&quot;:&quot;text&quot;}"/>
+          <p:cNvPr id="115" name="" descr="{&quot;isTemplate&quot;:true,&quot;type&quot;:&quot;text&quot;}"/>
           <p:cNvSpPr txBox="1"/>
           <p:nvPr/>
         </p:nvSpPr>
@@ -4294,7 +5048,7 @@
       </p:sp>
       <p:sp>
         <p:nvSpPr>
-          <p:cNvPr id="95" name=""/>
+          <p:cNvPr id="116" name=""/>
           <p:cNvSpPr/>
           <p:nvPr/>
         </p:nvSpPr>
@@ -4327,15 +5081,12 @@
         </p:spPr>
         <p:txBody>
           <a:bodyPr/>
-          <a:p>
-            <a:pPr/>
-            <a:endParaRPr/>
-          </a:p>
+          <a:p/>
         </p:txBody>
       </p:sp>
       <p:pic>
         <p:nvPicPr>
-          <p:cNvPr id="96" name=""/>
+          <p:cNvPr id="117" name=""/>
           <p:cNvPicPr>
             <a:picLocks noChangeAspect="1"/>
           </p:cNvPicPr>
@@ -4400,7 +5151,7 @@
       </p:pic>
       <p:sp>
         <p:nvSpPr>
-          <p:cNvPr id="97" name=""/>
+          <p:cNvPr id="118" name=""/>
           <p:cNvSpPr/>
           <p:nvPr/>
         </p:nvSpPr>
@@ -4421,15 +5172,12 @@
         </p:spPr>
         <p:txBody>
           <a:bodyPr/>
-          <a:p>
-            <a:pPr/>
-            <a:endParaRPr/>
-          </a:p>
-        </p:txBody>
-      </p:sp>
-      <p:sp>
-        <p:nvSpPr>
-          <p:cNvPr id="98" name="" descr="{&quot;isTemplate&quot;:true,&quot;type&quot;:&quot;text&quot;}"/>
+          <a:p/>
+        </p:txBody>
+      </p:sp>
+      <p:sp>
+        <p:nvSpPr>
+          <p:cNvPr id="119" name="" descr="{&quot;isTemplate&quot;:true,&quot;type&quot;:&quot;text&quot;}"/>
           <p:cNvSpPr txBox="1"/>
           <p:nvPr/>
         </p:nvSpPr>
@@ -4464,7 +5212,7 @@
       </p:sp>
       <p:sp>
         <p:nvSpPr>
-          <p:cNvPr id="99" name="" descr="{&quot;isTemplate&quot;:true,&quot;type&quot;:&quot;text&quot;}"/>
+          <p:cNvPr id="120" name="" descr="{&quot;isTemplate&quot;:true,&quot;type&quot;:&quot;text&quot;}"/>
           <p:cNvSpPr txBox="1"/>
           <p:nvPr/>
         </p:nvSpPr>
@@ -4499,7 +5247,7 @@
       </p:sp>
       <p:sp>
         <p:nvSpPr>
-          <p:cNvPr id="100" name="" descr="{&quot;isTemplate&quot;:true,&quot;type&quot;:&quot;text&quot;}"/>
+          <p:cNvPr id="121" name="" descr="{&quot;isTemplate&quot;:true,&quot;type&quot;:&quot;text&quot;}"/>
           <p:cNvSpPr txBox="1"/>
           <p:nvPr/>
         </p:nvSpPr>
@@ -4526,7 +5274,7 @@
                 <a:latin typeface="Microsoft YaHei"/>
                 <a:ea typeface="Microsoft YaHei"/>
               </a:rPr>
-              <a:t>页面中部</a:t>
+              <a:t>页面中部「云存取」那段里的</a:t>
             </a:r>
             <a:r>
               <a:rPr lang="en-US" sz="1050">
@@ -4536,7 +5284,7 @@
                 <a:latin typeface="Microsoft YaHei"/>
                 <a:ea typeface="Microsoft YaHei"/>
               </a:rPr>
-              <a:t> Cloud Storage </a:t>
+              <a:t xml:space="preserve"> </a:t>
             </a:r>
             <a:r>
               <a:rPr lang="zh-CN" sz="1050">
@@ -4546,25 +5294,15 @@
                 <a:latin typeface="Microsoft YaHei"/>
                 <a:ea typeface="Microsoft YaHei"/>
               </a:rPr>
-              <a:t>那段文字里的</a:t>
-            </a:r>
-            <a:r>
-              <a:rPr lang="en-US" sz="1050">
-                <a:solidFill>
-                  <a:srgbClr val="5A6376"/>
-                </a:solidFill>
-                <a:latin typeface="Microsoft YaHei"/>
-                <a:ea typeface="Microsoft YaHei"/>
-              </a:rPr>
-              <a:t> Log In</a:t>
-            </a:r>
-            <a:endParaRPr/>
-          </a:p>
-        </p:txBody>
-      </p:sp>
-      <p:sp>
-        <p:nvSpPr>
-          <p:cNvPr id="101" name=""/>
+              <a:t>登录</a:t>
+            </a:r>
+            <a:endParaRPr/>
+          </a:p>
+        </p:txBody>
+      </p:sp>
+      <p:sp>
+        <p:nvSpPr>
+          <p:cNvPr id="122" name=""/>
           <p:cNvSpPr/>
           <p:nvPr/>
         </p:nvSpPr>
@@ -4585,15 +5323,12 @@
         </p:spPr>
         <p:txBody>
           <a:bodyPr/>
-          <a:p>
-            <a:pPr/>
-            <a:endParaRPr/>
-          </a:p>
-        </p:txBody>
-      </p:sp>
-      <p:sp>
-        <p:nvSpPr>
-          <p:cNvPr id="102" name="" descr="{&quot;isTemplate&quot;:true,&quot;type&quot;:&quot;text&quot;}"/>
+          <a:p/>
+        </p:txBody>
+      </p:sp>
+      <p:sp>
+        <p:nvSpPr>
+          <p:cNvPr id="123" name="" descr="{&quot;isTemplate&quot;:true,&quot;type&quot;:&quot;text&quot;}"/>
           <p:cNvSpPr txBox="1"/>
           <p:nvPr/>
         </p:nvSpPr>
@@ -4628,7 +5363,7 @@
       </p:sp>
       <p:sp>
         <p:nvSpPr>
-          <p:cNvPr id="103" name="" descr="{&quot;isTemplate&quot;:true,&quot;type&quot;:&quot;text&quot;}"/>
+          <p:cNvPr id="124" name="" descr="{&quot;isTemplate&quot;:true,&quot;type&quot;:&quot;text&quot;}"/>
           <p:cNvSpPr txBox="1"/>
           <p:nvPr/>
         </p:nvSpPr>
@@ -4665,15 +5400,25 @@
                 <a:latin typeface="Microsoft YaHei"/>
                 <a:ea typeface="Microsoft YaHei"/>
               </a:rPr>
-              <a:t> Import</a:t>
-            </a:r>
-            <a:endParaRPr/>
-          </a:p>
-        </p:txBody>
-      </p:sp>
-      <p:sp>
-        <p:nvSpPr>
-          <p:cNvPr id="104" name="" descr="{&quot;isTemplate&quot;:true,&quot;type&quot;:&quot;text&quot;}"/>
+              <a:t xml:space="preserve"> </a:t>
+            </a:r>
+            <a:r>
+              <a:rPr lang="zh-CN" sz="1350" b="1">
+                <a:solidFill>
+                  <a:srgbClr val="1F2430"/>
+                </a:solidFill>
+                <a:latin typeface="Microsoft YaHei"/>
+                <a:ea typeface="Microsoft YaHei"/>
+              </a:rPr>
+              <a:t>导入资料</a:t>
+            </a:r>
+            <a:endParaRPr/>
+          </a:p>
+        </p:txBody>
+      </p:sp>
+      <p:sp>
+        <p:nvSpPr>
+          <p:cNvPr id="125" name="" descr="{&quot;isTemplate&quot;:true,&quot;type&quot;:&quot;text&quot;}"/>
           <p:cNvSpPr txBox="1"/>
           <p:nvPr/>
         </p:nvSpPr>
@@ -4700,55 +5445,15 @@
                 <a:latin typeface="Microsoft YaHei"/>
                 <a:ea typeface="Microsoft YaHei"/>
               </a:rPr>
-              <a:t>左栏</a:t>
-            </a:r>
-            <a:r>
-              <a:rPr lang="en-US" sz="1050">
-                <a:solidFill>
-                  <a:srgbClr val="5A6376"/>
-                </a:solidFill>
-                <a:latin typeface="Microsoft YaHei"/>
-                <a:ea typeface="Microsoft YaHei"/>
-              </a:rPr>
-              <a:t> PROFILE </a:t>
-            </a:r>
-            <a:r>
-              <a:rPr lang="zh-CN" sz="1050">
-                <a:solidFill>
-                  <a:srgbClr val="5A6376"/>
-                </a:solidFill>
-                <a:latin typeface="Microsoft YaHei"/>
-                <a:ea typeface="Microsoft YaHei"/>
-              </a:rPr>
-              <a:t>组里，</a:t>
-            </a:r>
-            <a:r>
-              <a:rPr lang="en-US" sz="1050">
-                <a:solidFill>
-                  <a:srgbClr val="5A6376"/>
-                </a:solidFill>
-                <a:latin typeface="Microsoft YaHei"/>
-                <a:ea typeface="Microsoft YaHei"/>
-              </a:rPr>
-              <a:t>Cloud Storage </a:t>
-            </a:r>
-            <a:r>
-              <a:rPr lang="zh-CN" sz="1050">
-                <a:solidFill>
-                  <a:srgbClr val="5A6376"/>
-                </a:solidFill>
-                <a:latin typeface="Microsoft YaHei"/>
-                <a:ea typeface="Microsoft YaHei"/>
-              </a:rPr>
-              <a:t>下一行</a:t>
-            </a:r>
-            <a:endParaRPr/>
-          </a:p>
-        </p:txBody>
-      </p:sp>
-      <p:sp>
-        <p:nvSpPr>
-          <p:cNvPr id="105" name=""/>
+              <a:t>左栏「用户档案」组里，云存取下一行</a:t>
+            </a:r>
+            <a:endParaRPr/>
+          </a:p>
+        </p:txBody>
+      </p:sp>
+      <p:sp>
+        <p:nvSpPr>
+          <p:cNvPr id="126" name=""/>
           <p:cNvSpPr/>
           <p:nvPr/>
         </p:nvSpPr>
@@ -4769,15 +5474,12 @@
         </p:spPr>
         <p:txBody>
           <a:bodyPr/>
-          <a:p>
-            <a:pPr/>
-            <a:endParaRPr/>
-          </a:p>
-        </p:txBody>
-      </p:sp>
-      <p:sp>
-        <p:nvSpPr>
-          <p:cNvPr id="106" name="" descr="{&quot;isTemplate&quot;:true,&quot;type&quot;:&quot;text&quot;}"/>
+          <a:p/>
+        </p:txBody>
+      </p:sp>
+      <p:sp>
+        <p:nvSpPr>
+          <p:cNvPr id="127" name="" descr="{&quot;isTemplate&quot;:true,&quot;type&quot;:&quot;text&quot;}"/>
           <p:cNvSpPr txBox="1"/>
           <p:nvPr/>
         </p:nvSpPr>
@@ -4812,7 +5514,7 @@
       </p:sp>
       <p:sp>
         <p:nvSpPr>
-          <p:cNvPr id="107" name="" descr="{&quot;isTemplate&quot;:true,&quot;type&quot;:&quot;text&quot;}"/>
+          <p:cNvPr id="128" name="" descr="{&quot;isTemplate&quot;:true,&quot;type&quot;:&quot;text&quot;}"/>
           <p:cNvSpPr txBox="1"/>
           <p:nvPr/>
         </p:nvSpPr>
@@ -4847,7 +5549,7 @@
       </p:sp>
       <p:sp>
         <p:nvSpPr>
-          <p:cNvPr id="108" name="" descr="{&quot;isTemplate&quot;:true,&quot;type&quot;:&quot;text&quot;}"/>
+          <p:cNvPr id="129" name="" descr="{&quot;isTemplate&quot;:true,&quot;type&quot;:&quot;text&quot;}"/>
           <p:cNvSpPr txBox="1"/>
           <p:nvPr/>
         </p:nvSpPr>
@@ -4874,35 +5576,15 @@
                 <a:latin typeface="Microsoft YaHei"/>
                 <a:ea typeface="Microsoft YaHei"/>
               </a:rPr>
-              <a:t>粘进</a:t>
-            </a:r>
-            <a:r>
-              <a:rPr lang="en-US" sz="1050">
-                <a:solidFill>
-                  <a:srgbClr val="5A6376"/>
-                </a:solidFill>
-                <a:latin typeface="Microsoft YaHei"/>
-                <a:ea typeface="Microsoft YaHei"/>
-              </a:rPr>
-              <a:t> Profile Data </a:t>
-            </a:r>
-            <a:r>
-              <a:rPr lang="zh-CN" sz="1050">
-                <a:solidFill>
-                  <a:srgbClr val="5A6376"/>
-                </a:solidFill>
-                <a:latin typeface="Microsoft YaHei"/>
-                <a:ea typeface="Microsoft YaHei"/>
-              </a:rPr>
-              <a:t>文本框</a:t>
-            </a:r>
-            <a:endParaRPr/>
-          </a:p>
-        </p:txBody>
-      </p:sp>
-      <p:sp>
-        <p:nvSpPr>
-          <p:cNvPr id="109" name=""/>
+              <a:t>粘进「用户档案数据」文本框</a:t>
+            </a:r>
+            <a:endParaRPr/>
+          </a:p>
+        </p:txBody>
+      </p:sp>
+      <p:sp>
+        <p:nvSpPr>
+          <p:cNvPr id="130" name=""/>
           <p:cNvSpPr/>
           <p:nvPr/>
         </p:nvSpPr>
@@ -4923,15 +5605,12 @@
         </p:spPr>
         <p:txBody>
           <a:bodyPr/>
-          <a:p>
-            <a:pPr/>
-            <a:endParaRPr/>
-          </a:p>
-        </p:txBody>
-      </p:sp>
-      <p:sp>
-        <p:nvSpPr>
-          <p:cNvPr id="110" name="" descr="{&quot;isTemplate&quot;:true,&quot;type&quot;:&quot;text&quot;}"/>
+          <a:p/>
+        </p:txBody>
+      </p:sp>
+      <p:sp>
+        <p:nvSpPr>
+          <p:cNvPr id="131" name="" descr="{&quot;isTemplate&quot;:true,&quot;type&quot;:&quot;text&quot;}"/>
           <p:cNvSpPr txBox="1"/>
           <p:nvPr/>
         </p:nvSpPr>
@@ -4966,7 +5645,7 @@
       </p:sp>
       <p:sp>
         <p:nvSpPr>
-          <p:cNvPr id="111" name="" descr="{&quot;isTemplate&quot;:true,&quot;type&quot;:&quot;text&quot;}"/>
+          <p:cNvPr id="132" name="" descr="{&quot;isTemplate&quot;:true,&quot;type&quot;:&quot;text&quot;}"/>
           <p:cNvSpPr txBox="1"/>
           <p:nvPr/>
         </p:nvSpPr>
@@ -5003,15 +5682,25 @@
                 <a:latin typeface="Microsoft YaHei"/>
                 <a:ea typeface="Microsoft YaHei"/>
               </a:rPr>
-              <a:t> Import</a:t>
-            </a:r>
-            <a:endParaRPr/>
-          </a:p>
-        </p:txBody>
-      </p:sp>
-      <p:sp>
-        <p:nvSpPr>
-          <p:cNvPr id="112" name="" descr="{&quot;isTemplate&quot;:true,&quot;type&quot;:&quot;text&quot;}"/>
+              <a:t xml:space="preserve"> </a:t>
+            </a:r>
+            <a:r>
+              <a:rPr lang="zh-CN" sz="1350" b="1">
+                <a:solidFill>
+                  <a:srgbClr val="1F2430"/>
+                </a:solidFill>
+                <a:latin typeface="Microsoft YaHei"/>
+                <a:ea typeface="Microsoft YaHei"/>
+              </a:rPr>
+              <a:t>导入</a:t>
+            </a:r>
+            <a:endParaRPr/>
+          </a:p>
+        </p:txBody>
+      </p:sp>
+      <p:sp>
+        <p:nvSpPr>
+          <p:cNvPr id="133" name="" descr="{&quot;isTemplate&quot;:true,&quot;type&quot;:&quot;text&quot;}"/>
           <p:cNvSpPr txBox="1"/>
           <p:nvPr/>
         </p:nvSpPr>
@@ -5046,7 +5735,7 @@
       </p:sp>
       <p:sp>
         <p:nvSpPr>
-          <p:cNvPr id="113" name=""/>
+          <p:cNvPr id="134" name=""/>
           <p:cNvSpPr/>
           <p:nvPr/>
         </p:nvSpPr>
@@ -5069,15 +5758,12 @@
         </p:spPr>
         <p:txBody>
           <a:bodyPr/>
-          <a:p>
-            <a:pPr/>
-            <a:endParaRPr/>
-          </a:p>
-        </p:txBody>
-      </p:sp>
-      <p:sp>
-        <p:nvSpPr>
-          <p:cNvPr id="114" name=""/>
+          <a:p/>
+        </p:txBody>
+      </p:sp>
+      <p:sp>
+        <p:nvSpPr>
+          <p:cNvPr id="135" name=""/>
           <p:cNvSpPr/>
           <p:nvPr/>
         </p:nvSpPr>
@@ -5098,15 +5784,12 @@
         </p:spPr>
         <p:txBody>
           <a:bodyPr/>
-          <a:p>
-            <a:pPr/>
-            <a:endParaRPr/>
-          </a:p>
-        </p:txBody>
-      </p:sp>
-      <p:sp>
-        <p:nvSpPr>
-          <p:cNvPr id="115" name="" descr="{&quot;isTemplate&quot;:true,&quot;type&quot;:&quot;text&quot;}"/>
+          <a:p/>
+        </p:txBody>
+      </p:sp>
+      <p:sp>
+        <p:nvSpPr>
+          <p:cNvPr id="136" name="" descr="{&quot;isTemplate&quot;:true,&quot;type&quot;:&quot;text&quot;}"/>
           <p:cNvSpPr txBox="1"/>
           <p:nvPr/>
         </p:nvSpPr>
@@ -5141,7 +5824,7 @@
       </p:sp>
       <p:sp>
         <p:nvSpPr>
-          <p:cNvPr id="116" name="" descr="{&quot;isTemplate&quot;:true,&quot;type&quot;:&quot;text&quot;}"/>
+          <p:cNvPr id="137" name="" descr="{&quot;isTemplate&quot;:true,&quot;type&quot;:&quot;text&quot;}"/>
           <p:cNvSpPr txBox="1"/>
           <p:nvPr/>
         </p:nvSpPr>
@@ -5170,7 +5853,7 @@
                 <a:latin typeface="Microsoft YaHei"/>
                 <a:ea typeface="Microsoft YaHei"/>
               </a:rPr>
-              <a:t>第一次进会弹「</a:t>
+              <a:t>上一页已把界面切成中文，所以这里的截图都是中文的。等级</a:t>
             </a:r>
             <a:r>
               <a:rPr lang="en-US" sz="1050">
@@ -5180,7 +5863,7 @@
                 <a:latin typeface="Microsoft YaHei"/>
                 <a:ea typeface="Microsoft YaHei"/>
               </a:rPr>
-              <a:t>Welcome</a:t>
+              <a:t xml:space="preserve"> / </a:t>
             </a:r>
             <a:r>
               <a:rPr lang="zh-CN" sz="1050">
@@ -5190,26 +5873,6 @@
                 <a:latin typeface="Microsoft YaHei"/>
                 <a:ea typeface="Microsoft YaHei"/>
               </a:rPr>
-              <a:t>」设置框，关掉就行。等级</a:t>
-            </a:r>
-            <a:r>
-              <a:rPr lang="en-US" sz="1050">
-                <a:solidFill>
-                  <a:srgbClr val="5A6376"/>
-                </a:solidFill>
-                <a:latin typeface="Microsoft YaHei"/>
-                <a:ea typeface="Microsoft YaHei"/>
-              </a:rPr>
-              <a:t> / </a:t>
-            </a:r>
-            <a:r>
-              <a:rPr lang="zh-CN" sz="1050">
-                <a:solidFill>
-                  <a:srgbClr val="5A6376"/>
-                </a:solidFill>
-                <a:latin typeface="Microsoft YaHei"/>
-                <a:ea typeface="Microsoft YaHei"/>
-              </a:rPr>
               <a:t>技能填的是满值，只影响算分，不影响卡牌归属。</a:t>
             </a:r>
             <a:endParaRPr/>
@@ -5218,7 +5881,7 @@
       </p:sp>
       <p:sp>
         <p:nvSpPr>
-          <p:cNvPr id="117" name="" descr="{&quot;isTemplate&quot;:true,&quot;type&quot;:&quot;text&quot;}"/>
+          <p:cNvPr id="138" name="" descr="{&quot;isTemplate&quot;:true,&quot;type&quot;:&quot;text&quot;}"/>
           <p:cNvSpPr txBox="1"/>
           <p:nvPr/>
         </p:nvSpPr>
@@ -5245,7 +5908,7 @@
                 <a:latin typeface="Microsoft YaHei"/>
                 <a:ea typeface="Microsoft YaHei"/>
               </a:rPr>
-              <a:t>BestdoriHelper </a:t>
+              <a:t xml:space="preserve">BestdoriHelper </a:t>
             </a:r>
             <a:r>
               <a:rPr lang="zh-CN" sz="1125">
@@ -5263,7 +5926,7 @@
       </p:sp>
       <p:sp>
         <p:nvSpPr>
-          <p:cNvPr id="118" name="" descr="{&quot;isTemplate&quot;:true,&quot;type&quot;:&quot;text&quot;}"/>
+          <p:cNvPr id="139" name="" descr="{&quot;isTemplate&quot;:true,&quot;type&quot;:&quot;text&quot;}"/>
           <p:cNvSpPr txBox="1"/>
           <p:nvPr/>
         </p:nvSpPr>
@@ -5290,7 +5953,7 @@
                 <a:latin typeface="Microsoft YaHei"/>
                 <a:ea typeface="Microsoft YaHei"/>
               </a:rPr>
-              <a:t>13 / 14</a:t>
+              <a:t>14 / 15</a:t>
             </a:r>
             <a:endParaRPr/>
           </a:p>
@@ -5301,12 +5964,12 @@
 </p:sld>
 </file>
 
-<file path=ppt/slides/slide14.xml><?xml version="1.0" encoding="utf-8"?>
-<p:sld xmlns:p="http://schemas.openxmlformats.org/presentationml/2006/main" xmlns:r="http://schemas.openxmlformats.org/officeDocument/2006/relationships" xmlns:a="http://schemas.openxmlformats.org/drawingml/2006/main" xmlns:asvg="http://schemas.microsoft.com/office/drawing/2016/SVG/main" xmlns:mc="http://schemas.openxmlformats.org/markup-compatibility/2006" mc:Ignorable="asvg">
+<file path=ppt/slides/slide15.xml><?xml version="1.0" encoding="utf-8"?>
+<p:sld xmlns:p="http://schemas.openxmlformats.org/presentationml/2006/main" xmlns:a="http://schemas.openxmlformats.org/drawingml/2006/main" xmlns:asvg="http://schemas.microsoft.com/office/drawing/2016/SVG/main" xmlns:r="http://schemas.openxmlformats.org/officeDocument/2006/relationships" xmlns:mc="http://schemas.openxmlformats.org/markup-compatibility/2006" mc:Ignorable="asvg">
   <p:cSld>
     <p:spTree>
       <p:nvGrpSpPr>
-        <p:cNvPr id="119" name="" descr="&lt;Slide style={{ width: 1280, height: 720, padding: 0, position: 'relative', overflow: 'hidden', background: '#1F2430' }}&gt;&#13;&#10;&#13;&#10;    {/* ===== 背景 ===== */}&#13;&#10;    &lt;Box style={{ position: 'absolute', top: 0, left: 0, width: 1280, height: 720 }}&gt;&#13;&#10;        &lt;svg width={1280} height={720} viewBox='0 0 1280 720'&gt;&#13;&#10;            &lt;defs&gt;&#13;&#10;                &lt;linearGradient id='endbg' x1='0' y1='0' x2='1' y2='1'&gt;&#13;&#10;                    &lt;stop offset='0%' stopColor='#1B1F2A' /&gt;&#13;&#10;                    &lt;stop offset='52%' stopColor='#272E3D' /&gt;&#13;&#10;                    &lt;stop offset='100%' stopColor='#2F3849' /&gt;&#13;&#10;                &lt;/linearGradient&gt;&#13;&#10;                &lt;radialGradient id='endglow' cx='0.74' cy='0.42' r='0.70'&gt;&#13;&#10;                    &lt;stop offset='0%' stopColor='#E8478B' stopOpacity='0.40' /&gt;&#13;&#10;                    &lt;stop offset='58%' stopColor='#E8478B' stopOpacity='0.10' /&gt;&#13;&#10;                    &lt;stop offset='100%' stopColor='#E8478B' stopOpacity='0' /&gt;&#13;&#10;                &lt;/radialGradient&gt;&#13;&#10;            &lt;/defs&gt;&#13;&#10;            &lt;rect x='0' y='0' width='1280' height='720' fill='url(#endbg)' /&gt;&#13;&#10;            &lt;rect x='0' y='0' width='1280' height='720' fill='url(#endglow)' /&gt;&#13;&#10;&#13;&#10;            {/* 右侧：一排卡面，最后一张是粉色（同步完成的感觉） */}&#13;&#10;            &lt;g&gt;&#13;&#10;                &lt;rect x='856' y='250' width='100' height='136' rx='10' fill='#FFFFFF' fillOpacity='0.06' /&gt;&#13;&#10;                &lt;rect x='972' y='250' width='100' height='136' rx='10' fill='#FFFFFF' fillOpacity='0.05' /&gt;&#13;&#10;                &lt;rect x='1088' y='250' width='100' height='136' rx='10' fill='#E8478B' fillOpacity='0.55' /&gt;&#13;&#10;                {/* 勾 */}&#13;&#10;                &lt;path d='M1118 316 l20 20 l40 -42' fill='none' stroke='#FFFFFF' strokeOpacity='0.9' strokeWidth='5'&#13;&#10;                    strokeLinecap='round' strokeLinejoin='round' /&gt;&#13;&#10;            &lt;/g&gt;&#13;&#10;&#13;&#10;            {/* 装饰弧 */}&#13;&#10;            &lt;circle cx='1240' cy='60' r='240' fill='none' stroke='#FFFFFF' strokeOpacity='0.04' strokeWidth='1' /&gt;&#13;&#10;            &lt;circle cx='60' cy='660' r='170' fill='none' stroke='#E8478B' strokeOpacity='0.12' strokeWidth='1.5' /&gt;&#13;&#10;        &lt;/svg&gt;&#13;&#10;    &lt;/Box&gt;&#13;&#10;&#13;&#10;    {/* ===== 内容 ===== */}&#13;&#10;    &lt;Box style={{&#13;&#10;        position: 'relative', zIndex: 1, height: '100%',&#13;&#10;        flexDirection: 'column', justifyContent: 'center',&#13;&#10;        paddingLeft: 96, paddingRight: 96, gap: 24,&#13;&#10;    }}&gt;&#13;&#10;        &lt;Box style={{ flexDirection: 'row', alignItems: 'center', gap: 12 }}&gt;&#13;&#10;            &lt;Box style={{ width: 44, height: 4, background: '#E8478B', borderRadius: 2 }} /&gt;&#13;&#10;            &lt;Text style={{ fontSize: 20, color: '#E8478B', fontWeight: 'bold', letterSpacing: 3 }}&gt;&#13;&#10;                就这些&#13;&#10;            &lt;/Text&gt;&#13;&#10;        &lt;/Box&gt;&#13;&#10;&#13;&#10;        &lt;Text style={{ fontSize: 72, fontWeight: 'bold', color: '#FFFFFF', lineHeight: 1.15 }}&gt;&#13;&#10;            现在就去试&#13;&#10;        &lt;/Text&gt;&#13;&#10;&#13;&#10;        &lt;Text style={{ fontSize: 22, color: '#C9CEDA', lineHeight: 1.6 }}&gt;&#13;&#10;            截一张卡面列表图丢进去，剩下的交给它&#13;&#10;        &lt;/Text&gt;&#13;&#10;&#13;&#10;        &lt;Box style={{ width: 68, height: 4, background: '#E8478B', borderRadius: 2, marginTop: 4 }} /&gt;&#13;&#10;&#13;&#10;        {/* 入口 */}&#13;&#10;        &lt;Box style={{ flexDirection: 'row', gap: 40, marginTop: 10 }}&gt;&#13;&#10;            &lt;Box style={{ flexDirection: 'column', gap: 5 }}&gt;&#13;&#10;                &lt;Text style={{ fontSize: 15, color: '#8A93A6' }}&gt;网页版（免安装）&lt;/Text&gt;&#13;&#10;                &lt;Text style={{ fontSize: 19, color: '#FFFFFF', fontWeight: 'bold' }}&gt;&#13;&#10;                    frankiesondesu.github.io/BestdoriHelper&#13;&#10;                &lt;/Text&gt;&#13;&#10;            &lt;/Box&gt;&#13;&#10;            &lt;Box style={{ flexDirection: 'column', gap: 5 }}&gt;&#13;&#10;                &lt;Text style={{ fontSize: 15, color: '#8A93A6' }}&gt;安卓 / Windows&lt;/Text&gt;&#13;&#10;                &lt;Text style={{ fontSize: 19, color: '#FFFFFF', fontWeight: 'bold' }}&gt;&#13;&#10;                    仓库 Releases 里下载&#13;&#10;                &lt;/Text&gt;&#13;&#10;            &lt;/Box&gt;&#13;&#10;        &lt;/Box&gt;&#13;&#10;    &lt;/Box&gt;&#13;&#10;&#13;&#10;    {/* 底部小字 */}&#13;&#10;    &lt;Box style={{ position: 'absolute', left: 96, bottom: 44, zIndex: 1 }}&gt;&#13;&#10;        &lt;Text style={{ fontSize: 15, color: '#6B7280' }}&gt;&#13;&#10;            图片只在本机处理，不上传 · 账号密码只发往 bestdori.com&#13;&#10;        &lt;/Text&gt;&#13;&#10;    &lt;/Box&gt;&#13;&#10;&#13;&#10;&lt;/Slide&gt;&#13;&#10;"/>
+        <p:cNvPr id="140" name="" descr="&lt;Slide style={{ width: 1280, height: 720, padding: 0, position: 'relative', overflow: 'hidden', background: '#1F2430' }}&gt;&#13;&#10;&#13;&#10;    {/* ===== 背景 ===== */}&#13;&#10;    &lt;Box style={{ position: 'absolute', top: 0, left: 0, width: 1280, height: 720 }}&gt;&#13;&#10;        &lt;svg width={1280} height={720} viewBox='0 0 1280 720'&gt;&#13;&#10;            &lt;defs&gt;&#13;&#10;                &lt;linearGradient id='endbg' x1='0' y1='0' x2='1' y2='1'&gt;&#13;&#10;                    &lt;stop offset='0%' stopColor='#1B1F2A' /&gt;&#13;&#10;                    &lt;stop offset='52%' stopColor='#272E3D' /&gt;&#13;&#10;                    &lt;stop offset='100%' stopColor='#2F3849' /&gt;&#13;&#10;                &lt;/linearGradient&gt;&#13;&#10;                &lt;radialGradient id='endglow' cx='0.74' cy='0.42' r='0.70'&gt;&#13;&#10;                    &lt;stop offset='0%' stopColor='#E8478B' stopOpacity='0.40' /&gt;&#13;&#10;                    &lt;stop offset='58%' stopColor='#E8478B' stopOpacity='0.10' /&gt;&#13;&#10;                    &lt;stop offset='100%' stopColor='#E8478B' stopOpacity='0' /&gt;&#13;&#10;                &lt;/radialGradient&gt;&#13;&#10;            &lt;/defs&gt;&#13;&#10;            &lt;rect x='0' y='0' width='1280' height='720' fill='url(#endbg)' /&gt;&#13;&#10;            &lt;rect x='0' y='0' width='1280' height='720' fill='url(#endglow)' /&gt;&#13;&#10;&#13;&#10;            {/* 右侧：一排卡面，最后一张是粉色（同步完成的感觉） */}&#13;&#10;            &lt;g&gt;&#13;&#10;                &lt;rect x='856' y='250' width='100' height='136' rx='10' fill='#FFFFFF' fillOpacity='0.06' /&gt;&#13;&#10;                &lt;rect x='972' y='250' width='100' height='136' rx='10' fill='#FFFFFF' fillOpacity='0.05' /&gt;&#13;&#10;                &lt;rect x='1088' y='250' width='100' height='136' rx='10' fill='#E8478B' fillOpacity='0.55' /&gt;&#13;&#10;                {/* 勾 */}&#13;&#10;                &lt;path d='M1118 316 l20 20 l40 -42' fill='none' stroke='#FFFFFF' strokeOpacity='0.9' strokeWidth='5'&#13;&#10;                    strokeLinecap='round' strokeLinejoin='round' /&gt;&#13;&#10;            &lt;/g&gt;&#13;&#10;&#13;&#10;            {/* 装饰弧 */}&#13;&#10;            &lt;circle cx='1240' cy='60' r='240' fill='none' stroke='#FFFFFF' strokeOpacity='0.04' strokeWidth='1' /&gt;&#13;&#10;            &lt;circle cx='60' cy='660' r='170' fill='none' stroke='#E8478B' strokeOpacity='0.12' strokeWidth='1.5' /&gt;&#13;&#10;        &lt;/svg&gt;&#13;&#10;    &lt;/Box&gt;&#13;&#10;&#13;&#10;    {/* ===== 内容 ===== */}&#13;&#10;    &lt;Box style={{&#13;&#10;        position: 'relative', zIndex: 1, height: '100%',&#13;&#10;        flexDirection: 'column', justifyContent: 'center',&#13;&#10;        paddingLeft: 96, paddingRight: 96, gap: 24,&#13;&#10;    }}&gt;&#13;&#10;        &lt;Box style={{ flexDirection: 'row', alignItems: 'center', gap: 12 }}&gt;&#13;&#10;            &lt;Box style={{ width: 44, height: 4, background: '#E8478B', borderRadius: 2 }} /&gt;&#13;&#10;            &lt;Text style={{ fontSize: 20, color: '#E8478B', fontWeight: 'bold', letterSpacing: 3 }}&gt;&#13;&#10;                就这些&#13;&#10;            &lt;/Text&gt;&#13;&#10;        &lt;/Box&gt;&#13;&#10;&#13;&#10;        &lt;Text style={{ fontSize: 72, fontWeight: 'bold', color: '#FFFFFF', lineHeight: 1.15 }}&gt;&#13;&#10;            现在就去试&#13;&#10;        &lt;/Text&gt;&#13;&#10;&#13;&#10;        &lt;Text style={{ fontSize: 22, color: '#C9CEDA', lineHeight: 1.6 }}&gt;&#13;&#10;            截一张卡面列表图丢进去，剩下的交给它&#13;&#10;        &lt;/Text&gt;&#13;&#10;&#13;&#10;        &lt;Box style={{ width: 68, height: 4, background: '#E8478B', borderRadius: 2, marginTop: 4 }} /&gt;&#13;&#10;&#13;&#10;        {/* 入口 */}&#13;&#10;        &lt;Box style={{ flexDirection: 'row', gap: 40, marginTop: 10 }}&gt;&#13;&#10;            &lt;Box style={{ flexDirection: 'column', gap: 5 }}&gt;&#13;&#10;                &lt;Text style={{ fontSize: 15, color: '#8A93A6' }}&gt;网页版（免安装）&lt;/Text&gt;&#13;&#10;                &lt;Text style={{ fontSize: 19, color: '#FFFFFF', fontWeight: 'bold' }}&gt;&#13;&#10;                    frankiesondesu.github.io/BestdoriHelper&#13;&#10;                &lt;/Text&gt;&#13;&#10;            &lt;/Box&gt;&#13;&#10;            &lt;Box style={{ flexDirection: 'column', gap: 5 }}&gt;&#13;&#10;                &lt;Text style={{ fontSize: 15, color: '#8A93A6' }}&gt;安卓 / Windows&lt;/Text&gt;&#13;&#10;                &lt;Text style={{ fontSize: 19, color: '#FFFFFF', fontWeight: 'bold' }}&gt;&#13;&#10;                    仓库 Releases 里下载&#13;&#10;                &lt;/Text&gt;&#13;&#10;            &lt;/Box&gt;&#13;&#10;        &lt;/Box&gt;&#13;&#10;    &lt;/Box&gt;&#13;&#10;&#13;&#10;    {/* 底部小字 */}&#13;&#10;    &lt;Box style={{ position: 'absolute', left: 96, bottom: 44, zIndex: 1 }}&gt;&#13;&#10;        &lt;Text style={{ fontSize: 15, color: '#6B7280' }}&gt;&#13;&#10;            图片只在本机处理，不上传 · 账号密码只发往 bestdori.com&#13;&#10;        &lt;/Text&gt;&#13;&#10;    &lt;/Box&gt;&#13;&#10;&#13;&#10;&lt;/Slide&gt;&#13;&#10;"/>
         <p:cNvGrpSpPr/>
         <p:nvPr/>
       </p:nvGrpSpPr>
@@ -5320,7 +5983,7 @@
       </p:grpSpPr>
       <p:sp>
         <p:nvSpPr>
-          <p:cNvPr id="120" name=""/>
+          <p:cNvPr id="141" name=""/>
           <p:cNvSpPr/>
           <p:nvPr/>
         </p:nvSpPr>
@@ -5344,14 +6007,14 @@
       </p:sp>
       <p:pic>
         <p:nvPicPr>
-          <p:cNvPr id="121" name=""/>
+          <p:cNvPr id="142" name=""/>
           <p:cNvPicPr>
             <a:picLocks noChangeAspect="1"/>
           </p:cNvPicPr>
           <p:nvPr/>
         </p:nvPicPr>
         <p:blipFill>
-          <a:blip>
+          <a:blip r:embed="rId1">
             <a:extLst>
               <a:ext uri="{96DAC541-7B7A-43D3-8B79-37D633B846F1}">
                 <asvg:svgBlip r:embed="rId1"/>
@@ -5375,7 +6038,7 @@
       </p:pic>
       <p:sp>
         <p:nvSpPr>
-          <p:cNvPr id="122" name=""/>
+          <p:cNvPr id="143" name=""/>
           <p:cNvSpPr/>
           <p:nvPr/>
         </p:nvSpPr>
@@ -5401,7 +6064,7 @@
       </p:sp>
       <p:sp>
         <p:nvSpPr>
-          <p:cNvPr id="123" name="" descr="{&quot;isTemplate&quot;:true,&quot;type&quot;:&quot;text&quot;}"/>
+          <p:cNvPr id="144" name="" descr="{&quot;isTemplate&quot;:true,&quot;type&quot;:&quot;text&quot;}"/>
           <p:cNvSpPr txBox="1"/>
           <p:nvPr/>
         </p:nvSpPr>
@@ -5436,7 +6099,7 @@
       </p:sp>
       <p:sp>
         <p:nvSpPr>
-          <p:cNvPr id="124" name="" descr="{&quot;isTemplate&quot;:true,&quot;type&quot;:&quot;text&quot;}"/>
+          <p:cNvPr id="145" name="" descr="{&quot;isTemplate&quot;:true,&quot;type&quot;:&quot;text&quot;}"/>
           <p:cNvSpPr txBox="1"/>
           <p:nvPr/>
         </p:nvSpPr>
@@ -5471,7 +6134,7 @@
       </p:sp>
       <p:sp>
         <p:nvSpPr>
-          <p:cNvPr id="125" name="" descr="{&quot;isTemplate&quot;:true,&quot;type&quot;:&quot;text&quot;}"/>
+          <p:cNvPr id="146" name="" descr="{&quot;isTemplate&quot;:true,&quot;type&quot;:&quot;text&quot;}"/>
           <p:cNvSpPr txBox="1"/>
           <p:nvPr/>
         </p:nvSpPr>
@@ -5506,7 +6169,7 @@
       </p:sp>
       <p:sp>
         <p:nvSpPr>
-          <p:cNvPr id="126" name=""/>
+          <p:cNvPr id="147" name=""/>
           <p:cNvSpPr/>
           <p:nvPr/>
         </p:nvSpPr>
@@ -5532,7 +6195,7 @@
       </p:sp>
       <p:sp>
         <p:nvSpPr>
-          <p:cNvPr id="127" name="" descr="{&quot;isTemplate&quot;:true,&quot;type&quot;:&quot;text&quot;}"/>
+          <p:cNvPr id="148" name="" descr="{&quot;isTemplate&quot;:true,&quot;type&quot;:&quot;text&quot;}"/>
           <p:cNvSpPr txBox="1"/>
           <p:nvPr/>
         </p:nvSpPr>
@@ -5567,7 +6230,7 @@
       </p:sp>
       <p:sp>
         <p:nvSpPr>
-          <p:cNvPr id="128" name="" descr="{&quot;isTemplate&quot;:true,&quot;type&quot;:&quot;text&quot;}"/>
+          <p:cNvPr id="149" name="" descr="{&quot;isTemplate&quot;:true,&quot;type&quot;:&quot;text&quot;}"/>
           <p:cNvSpPr txBox="1"/>
           <p:nvPr/>
         </p:nvSpPr>
@@ -5602,7 +6265,7 @@
       </p:sp>
       <p:sp>
         <p:nvSpPr>
-          <p:cNvPr id="129" name="" descr="{&quot;isTemplate&quot;:true,&quot;type&quot;:&quot;text&quot;}"/>
+          <p:cNvPr id="150" name="" descr="{&quot;isTemplate&quot;:true,&quot;type&quot;:&quot;text&quot;}"/>
           <p:cNvSpPr txBox="1"/>
           <p:nvPr/>
         </p:nvSpPr>
@@ -5639,15 +6302,15 @@
                 <a:latin typeface="Microsoft YaHei"/>
                 <a:ea typeface="Microsoft YaHei"/>
               </a:rPr>
-              <a:t> / Windows</a:t>
-            </a:r>
-            <a:endParaRPr/>
-          </a:p>
-        </p:txBody>
-      </p:sp>
-      <p:sp>
-        <p:nvSpPr>
-          <p:cNvPr id="130" name="" descr="{&quot;isTemplate&quot;:true,&quot;type&quot;:&quot;text&quot;}"/>
+              <a:t xml:space="preserve"> / Windows</a:t>
+            </a:r>
+            <a:endParaRPr/>
+          </a:p>
+        </p:txBody>
+      </p:sp>
+      <p:sp>
+        <p:nvSpPr>
+          <p:cNvPr id="151" name="" descr="{&quot;isTemplate&quot;:true,&quot;type&quot;:&quot;text&quot;}"/>
           <p:cNvSpPr txBox="1"/>
           <p:nvPr/>
         </p:nvSpPr>
@@ -5684,7 +6347,7 @@
                 <a:latin typeface="Microsoft YaHei"/>
                 <a:ea typeface="Microsoft YaHei"/>
               </a:rPr>
-              <a:t> Releases </a:t>
+              <a:t xml:space="preserve"> Releases </a:t>
             </a:r>
             <a:r>
               <a:rPr lang="zh-CN" sz="1425" b="1">
@@ -5702,7 +6365,7 @@
       </p:sp>
       <p:sp>
         <p:nvSpPr>
-          <p:cNvPr id="131" name="" descr="{&quot;isTemplate&quot;:true,&quot;type&quot;:&quot;text&quot;}"/>
+          <p:cNvPr id="152" name="" descr="{&quot;isTemplate&quot;:true,&quot;type&quot;:&quot;text&quot;}"/>
           <p:cNvSpPr txBox="1"/>
           <p:nvPr/>
         </p:nvSpPr>
@@ -5739,7 +6402,7 @@
                 <a:latin typeface="Microsoft YaHei"/>
                 <a:ea typeface="Microsoft YaHei"/>
               </a:rPr>
-              <a:t> · </a:t>
+              <a:t xml:space="preserve"> · </a:t>
             </a:r>
             <a:r>
               <a:rPr lang="zh-CN" sz="1125">
@@ -5759,7 +6422,7 @@
                 <a:latin typeface="Microsoft YaHei"/>
                 <a:ea typeface="Microsoft YaHei"/>
               </a:rPr>
-              <a:t> bestdori.com</a:t>
+              <a:t xml:space="preserve"> bestdori.com</a:t>
             </a:r>
             <a:endParaRPr/>
           </a:p>
@@ -5775,7 +6438,7 @@
   <p:cSld>
     <p:spTree>
       <p:nvGrpSpPr>
-        <p:cNvPr id="132" name="" descr="&lt;Slide style={{ width: 1280, height: 720, padding: '20px 72px', background: '#F7F8FA', flexDirection: 'column' }}&gt;&#13;&#10;&#13;&#10;    {/* ===== A · 标题块 ===== */}&#13;&#10;    &lt;Box style={{ height: 100, flexDirection: 'row', alignItems: 'center' }}&gt;&#13;&#10;        &lt;Text style={{ fontSize: 36, fontWeight: 'bold', color: '#1F2430' }}&gt;&#13;&#10;            这份说明讲什么&#13;&#10;        &lt;/Text&gt;&#13;&#10;    &lt;/Box&gt;&#13;&#10;&#13;&#10;    {/* ===== B · 内容区（左标题栏 32% + 右内容 68%）===== */}&#13;&#10;    &lt;Box style={{ flex: 1, flexDirection: 'row' }}&gt;&#13;&#10;&#13;&#10;        {/* 左：深色标题栏 */}&#13;&#10;        &lt;Box style={{&#13;&#10;            width: 366,&#13;&#10;            background: 'linear-gradient(135deg, #1F2430 0%, #2C3444 100%)',&#13;&#10;            borderRadius: '12px 0 0 12px',&#13;&#10;            padding: '40px 34px',&#13;&#10;            flexDirection: 'column',&#13;&#10;            justifyContent: 'space-between',&#13;&#10;        }}&gt;&#13;&#10;            &lt;Box style={{ flexDirection: 'column', gap: 16 }}&gt;&#13;&#10;                &lt;Box style={{ width: 44, height: 4, background: '#E8478B', borderRadius: 2 }} /&gt;&#13;&#10;                &lt;Text style={{ fontSize: 40, fontWeight: 'bold', color: '#FFFFFF', lineHeight: 1.25 }}&gt;&#13;&#10;                    目录&#13;&#10;                &lt;/Text&gt;&#13;&#10;                &lt;Text style={{ fontSize: 19, color: '#8A93A6', lineHeight: 1.6 }}&gt;&#13;&#10;                    两个章节，从「怎么用」讲到「怎么同步」&#13;&#10;                &lt;/Text&gt;&#13;&#10;            &lt;/Box&gt;&#13;&#10;            &lt;Text style={{ fontSize: 16, color: '#5A6376' }}&gt;&#13;&#10;                全程 14 页 · 约 5 分钟&#13;&#10;            &lt;/Text&gt;&#13;&#10;        &lt;/Box&gt;&#13;&#10;&#13;&#10;        {/* 右：章节条目 */}&#13;&#10;        &lt;Box style={{&#13;&#10;            flex: 1,&#13;&#10;            background: '#FFFFFF',&#13;&#10;            borderRadius: '0 12px 12px 0',&#13;&#10;            padding: '40px 44px',&#13;&#10;            flexDirection: 'column',&#13;&#10;            justifyContent: 'center',&#13;&#10;            gap: 30,&#13;&#10;            boxShadow: '0 2px 12px rgba(31,36,48,0.06)',&#13;&#10;        }}&gt;&#13;&#10;&#13;&#10;            {/* 第 1 章 */}&#13;&#10;            &lt;Box style={{ flexDirection: 'row', gap: 24, alignItems: 'flex-start' }}&gt;&#13;&#10;                &lt;Text style={{ fontSize: 46, fontWeight: 'bold', color: '#E8478B', lineHeight: 1.05, width: 82 }}&gt;&#13;&#10;                    01&#13;&#10;                &lt;/Text&gt;&#13;&#10;                &lt;Box style={{ flex: 1, flexDirection: 'column', gap: 8 }}&gt;&#13;&#10;                    &lt;Text style={{ fontSize: 28, fontWeight: 'bold', color: '#1F2430' }}&gt;&#13;&#10;                        开始使用&#13;&#10;                    &lt;/Text&gt;&#13;&#10;                    &lt;Text style={{ fontSize: 21, color: '#5A6376', lineHeight: 1.6 }}&gt;&#13;&#10;                        三个版本怎么选 · 四步走完整个流程&#13;&#10;                        &lt;br /&gt;&#13;&#10;                        导入截图 · 核对修正 · 卡面清单 · 导出&#13;&#10;                    &lt;/Text&gt;&#13;&#10;                    &lt;Text style={{ fontSize: 16, color: '#8A93A6' }}&gt;&#13;&#10;                        第 03 – 09 页&#13;&#10;                    &lt;/Text&gt;&#13;&#10;                &lt;/Box&gt;&#13;&#10;            &lt;/Box&gt;&#13;&#10;&#13;&#10;            &lt;Box style={{ height: 1, background: '#E4E7EE' }} /&gt;&#13;&#10;&#13;&#10;            {/* 第 2 章 */}&#13;&#10;            &lt;Box style={{ flexDirection: 'row', gap: 24, alignItems: 'flex-start' }}&gt;&#13;&#10;                &lt;Text style={{ fontSize: 46, fontWeight: 'bold', color: '#E8478B', lineHeight: 1.05, width: 82 }}&gt;&#13;&#10;                    02&#13;&#10;                &lt;/Text&gt;&#13;&#10;                &lt;Box style={{ flex: 1, flexDirection: 'column', gap: 8 }}&gt;&#13;&#10;                    &lt;Text style={{ fontSize: 28, fontWeight: 'bold', color: '#1F2430' }}&gt;&#13;&#10;                        同步到 Bestdori&#13;&#10;                    &lt;/Text&gt;&#13;&#10;                    &lt;Text style={{ fontSize: 21, color: '#5A6376', lineHeight: 1.6 }}&gt;&#13;&#10;                        把清单写进「我的卡牌」&#13;&#10;                        &lt;br /&gt;&#13;&#10;                        安卓 App 一键同步 · 网页版导出档案导入&#13;&#10;                    &lt;/Text&gt;&#13;&#10;                    &lt;Text style={{ fontSize: 16, color: '#8A93A6' }}&gt;&#13;&#10;                        第 10 – 12 页&#13;&#10;                    &lt;/Text&gt;&#13;&#10;                &lt;/Box&gt;&#13;&#10;            &lt;/Box&gt;&#13;&#10;&#13;&#10;        &lt;/Box&gt;&#13;&#10;    &lt;/Box&gt;&#13;&#10;&#13;&#10;    {/* ===== C · 页脚条 ===== */}&#13;&#10;    &lt;Box style={{ height: 60, flexDirection: 'row', alignItems: 'center', justifyContent: 'space-between' }}&gt;&#13;&#10;        &lt;Text style={{ fontSize: 15, color: '#8A93A6' }}&gt;&#13;&#10;            BestdoriHelper 使用说明&#13;&#10;        &lt;/Text&gt;&#13;&#10;        &lt;Text style={{ fontSize: 15, color: '#8A93A6' }}&gt;&#13;&#10;            02 / 14&#13;&#10;        &lt;/Text&gt;&#13;&#10;    &lt;/Box&gt;&#13;&#10;&#13;&#10;&lt;/Slide&gt;&#13;&#10;"/>
+        <p:cNvPr id="153" name="" descr="&lt;Slide style={{ width: 1280, height: 720, padding: '20px 72px', background: '#F7F8FA', flexDirection: 'column' }}&gt;&#13;&#10;&#13;&#10;    {/* ===== A · 标题块 ===== */}&#13;&#10;    &lt;Box style={{ height: 100, flexDirection: 'row', alignItems: 'center' }}&gt;&#13;&#10;        &lt;Text style={{ fontSize: 36, fontWeight: 'bold', color: '#1F2430' }}&gt;&#13;&#10;            这份说明讲什么&#13;&#10;        &lt;/Text&gt;&#13;&#10;    &lt;/Box&gt;&#13;&#10;&#13;&#10;    {/* ===== B · 内容区（左标题栏 32% + 右内容 68%）===== */}&#13;&#10;    &lt;Box style={{ flex: 1, flexDirection: 'row' }}&gt;&#13;&#10;&#13;&#10;        {/* 左：深色标题栏 */}&#13;&#10;        &lt;Box style={{&#13;&#10;            width: 366,&#13;&#10;            background: 'linear-gradient(135deg, #1F2430 0%, #2C3444 100%)',&#13;&#10;            borderRadius: '12px 0 0 12px',&#13;&#10;            padding: '40px 34px',&#13;&#10;            flexDirection: 'column',&#13;&#10;            justifyContent: 'space-between',&#13;&#10;        }}&gt;&#13;&#10;            &lt;Box style={{ flexDirection: 'column', gap: 16 }}&gt;&#13;&#10;                &lt;Box style={{ width: 44, height: 4, background: '#E8478B', borderRadius: 2 }} /&gt;&#13;&#10;                &lt;Text style={{ fontSize: 40, fontWeight: 'bold', color: '#FFFFFF', lineHeight: 1.25 }}&gt;&#13;&#10;                    目录&#13;&#10;                &lt;/Text&gt;&#13;&#10;                &lt;Text style={{ fontSize: 19, color: '#8A93A6', lineHeight: 1.6 }}&gt;&#13;&#10;                    两个章节，从「怎么用」讲到「怎么同步」&#13;&#10;                &lt;/Text&gt;&#13;&#10;            &lt;/Box&gt;&#13;&#10;            &lt;Text style={{ fontSize: 16, color: '#5A6376' }}&gt;&#13;&#10;                全程 15 页 · 约 5 分钟&#13;&#10;            &lt;/Text&gt;&#13;&#10;        &lt;/Box&gt;&#13;&#10;&#13;&#10;        {/* 右：章节条目 */}&#13;&#10;        &lt;Box style={{&#13;&#10;            flex: 1,&#13;&#10;            background: '#FFFFFF',&#13;&#10;            borderRadius: '0 12px 12px 0',&#13;&#10;            padding: '40px 44px',&#13;&#10;            flexDirection: 'column',&#13;&#10;            justifyContent: 'center',&#13;&#10;            gap: 30,&#13;&#10;            boxShadow: '0 2px 12px rgba(31,36,48,0.06)',&#13;&#10;        }}&gt;&#13;&#10;&#13;&#10;            {/* 第 1 章 */}&#13;&#10;            &lt;Box style={{ flexDirection: 'row', gap: 24, alignItems: 'flex-start' }}&gt;&#13;&#10;                &lt;Text style={{ fontSize: 46, fontWeight: 'bold', color: '#E8478B', lineHeight: 1.05, width: 82 }}&gt;&#13;&#10;                    01&#13;&#10;                &lt;/Text&gt;&#13;&#10;                &lt;Box style={{ flex: 1, flexDirection: 'column', gap: 8 }}&gt;&#13;&#10;                    &lt;Text style={{ fontSize: 28, fontWeight: 'bold', color: '#1F2430' }}&gt;&#13;&#10;                        开始使用&#13;&#10;                    &lt;/Text&gt;&#13;&#10;                    &lt;Text style={{ fontSize: 21, color: '#5A6376', lineHeight: 1.6 }}&gt;&#13;&#10;                        三个版本怎么选 · 四步走完整个流程&#13;&#10;                        &lt;br /&gt;&#13;&#10;                        导入截图 · 核对修正 · 卡面清单 · 导出&#13;&#10;                    &lt;/Text&gt;&#13;&#10;                    &lt;Text style={{ fontSize: 16, color: '#8A93A6' }}&gt;&#13;&#10;                        第 03 – 09 页&#13;&#10;                    &lt;/Text&gt;&#13;&#10;                &lt;/Box&gt;&#13;&#10;            &lt;/Box&gt;&#13;&#10;&#13;&#10;            &lt;Box style={{ height: 1, background: '#E4E7EE' }} /&gt;&#13;&#10;&#13;&#10;            {/* 第 2 章 */}&#13;&#10;            &lt;Box style={{ flexDirection: 'row', gap: 24, alignItems: 'flex-start' }}&gt;&#13;&#10;                &lt;Text style={{ fontSize: 46, fontWeight: 'bold', color: '#E8478B', lineHeight: 1.05, width: 82 }}&gt;&#13;&#10;                    02&#13;&#10;                &lt;/Text&gt;&#13;&#10;                &lt;Box style={{ flex: 1, flexDirection: 'column', gap: 8 }}&gt;&#13;&#10;                    &lt;Text style={{ fontSize: 28, fontWeight: 'bold', color: '#1F2430' }}&gt;&#13;&#10;                        同步到 Bestdori&#13;&#10;                    &lt;/Text&gt;&#13;&#10;                    &lt;Text style={{ fontSize: 21, color: '#5A6376', lineHeight: 1.6 }}&gt;&#13;&#10;                        把清单写进「我的卡牌」&#13;&#10;                        &lt;br /&gt;&#13;&#10;                        安卓 App 一键同步 · 网页版导出档案导入&#13;&#10;                    &lt;/Text&gt;&#13;&#10;                    &lt;Text style={{ fontSize: 16, color: '#8A93A6' }}&gt;&#13;&#10;                        第 10 – 12 页&#13;&#10;                    &lt;/Text&gt;&#13;&#10;                &lt;/Box&gt;&#13;&#10;            &lt;/Box&gt;&#13;&#10;&#13;&#10;        &lt;/Box&gt;&#13;&#10;    &lt;/Box&gt;&#13;&#10;&#13;&#10;    {/* ===== C · 页脚条 ===== */}&#13;&#10;    &lt;Box style={{ height: 60, flexDirection: 'row', alignItems: 'center', justifyContent: 'space-between' }}&gt;&#13;&#10;        &lt;Text style={{ fontSize: 15, color: '#8A93A6' }}&gt;&#13;&#10;            BestdoriHelper 使用说明&#13;&#10;        &lt;/Text&gt;&#13;&#10;        &lt;Text style={{ fontSize: 15, color: '#8A93A6' }}&gt;&#13;&#10;            02 / 15&#13;&#10;        &lt;/Text&gt;&#13;&#10;    &lt;/Box&gt;&#13;&#10;&#13;&#10;&lt;/Slide&gt;&#13;&#10;"/>
         <p:cNvGrpSpPr/>
         <p:nvPr/>
       </p:nvGrpSpPr>
@@ -5789,7 +6452,7 @@
       </p:grpSpPr>
       <p:sp>
         <p:nvSpPr>
-          <p:cNvPr id="133" name=""/>
+          <p:cNvPr id="154" name=""/>
           <p:cNvSpPr/>
           <p:nvPr/>
         </p:nvSpPr>
@@ -5813,7 +6476,7 @@
       </p:sp>
       <p:sp>
         <p:nvSpPr>
-          <p:cNvPr id="134" name="" descr="{&quot;isTemplate&quot;:true,&quot;type&quot;:&quot;text&quot;}"/>
+          <p:cNvPr id="155" name="" descr="{&quot;isTemplate&quot;:true,&quot;type&quot;:&quot;text&quot;}"/>
           <p:cNvSpPr txBox="1"/>
           <p:nvPr/>
         </p:nvSpPr>
@@ -5848,7 +6511,7 @@
       </p:sp>
       <p:sp>
         <p:nvSpPr>
-          <p:cNvPr id="135" name=""/>
+          <p:cNvPr id="156" name=""/>
           <p:cNvSpPr/>
           <p:nvPr/>
         </p:nvSpPr>
@@ -5915,7 +6578,7 @@
       </p:sp>
       <p:sp>
         <p:nvSpPr>
-          <p:cNvPr id="136" name=""/>
+          <p:cNvPr id="157" name=""/>
           <p:cNvSpPr/>
           <p:nvPr/>
         </p:nvSpPr>
@@ -5941,7 +6604,7 @@
       </p:sp>
       <p:sp>
         <p:nvSpPr>
-          <p:cNvPr id="137" name="" descr="{&quot;isTemplate&quot;:true,&quot;type&quot;:&quot;text&quot;}"/>
+          <p:cNvPr id="158" name="" descr="{&quot;isTemplate&quot;:true,&quot;type&quot;:&quot;text&quot;}"/>
           <p:cNvSpPr txBox="1"/>
           <p:nvPr/>
         </p:nvSpPr>
@@ -5976,7 +6639,7 @@
       </p:sp>
       <p:sp>
         <p:nvSpPr>
-          <p:cNvPr id="138" name="" descr="{&quot;isTemplate&quot;:true,&quot;type&quot;:&quot;text&quot;}"/>
+          <p:cNvPr id="159" name="" descr="{&quot;isTemplate&quot;:true,&quot;type&quot;:&quot;text&quot;}"/>
           <p:cNvSpPr txBox="1"/>
           <p:nvPr/>
         </p:nvSpPr>
@@ -6013,7 +6676,7 @@
       </p:sp>
       <p:sp>
         <p:nvSpPr>
-          <p:cNvPr id="139" name="" descr="{&quot;isTemplate&quot;:true,&quot;type&quot;:&quot;text&quot;}"/>
+          <p:cNvPr id="160" name="" descr="{&quot;isTemplate&quot;:true,&quot;type&quot;:&quot;text&quot;}"/>
           <p:cNvSpPr txBox="1"/>
           <p:nvPr/>
         </p:nvSpPr>
@@ -6050,7 +6713,7 @@
                 <a:latin typeface="Microsoft YaHei"/>
                 <a:ea typeface="Microsoft YaHei"/>
               </a:rPr>
-              <a:t> 14 </a:t>
+              <a:t xml:space="preserve"> 15 </a:t>
             </a:r>
             <a:r>
               <a:rPr lang="zh-CN" sz="1200">
@@ -6070,7 +6733,7 @@
                 <a:latin typeface="Microsoft YaHei"/>
                 <a:ea typeface="Microsoft YaHei"/>
               </a:rPr>
-              <a:t> · </a:t>
+              <a:t xml:space="preserve"> · </a:t>
             </a:r>
             <a:r>
               <a:rPr lang="zh-CN" sz="1200">
@@ -6090,7 +6753,7 @@
                 <a:latin typeface="Microsoft YaHei"/>
                 <a:ea typeface="Microsoft YaHei"/>
               </a:rPr>
-              <a:t> 5 </a:t>
+              <a:t xml:space="preserve"> 5 </a:t>
             </a:r>
             <a:r>
               <a:rPr lang="zh-CN" sz="1200">
@@ -6108,7 +6771,7 @@
       </p:sp>
       <p:sp>
         <p:nvSpPr>
-          <p:cNvPr id="140" name=""/>
+          <p:cNvPr id="161" name=""/>
           <p:cNvSpPr/>
           <p:nvPr/>
         </p:nvSpPr>
@@ -6174,7 +6837,7 @@
       </p:sp>
       <p:sp>
         <p:nvSpPr>
-          <p:cNvPr id="141" name="" descr="{&quot;isTemplate&quot;:true,&quot;type&quot;:&quot;text&quot;}"/>
+          <p:cNvPr id="162" name="" descr="{&quot;isTemplate&quot;:true,&quot;type&quot;:&quot;text&quot;}"/>
           <p:cNvSpPr txBox="1"/>
           <p:nvPr/>
         </p:nvSpPr>
@@ -6209,7 +6872,7 @@
       </p:sp>
       <p:sp>
         <p:nvSpPr>
-          <p:cNvPr id="142" name="" descr="{&quot;isTemplate&quot;:true,&quot;type&quot;:&quot;text&quot;}"/>
+          <p:cNvPr id="163" name="" descr="{&quot;isTemplate&quot;:true,&quot;type&quot;:&quot;text&quot;}"/>
           <p:cNvSpPr txBox="1"/>
           <p:nvPr/>
         </p:nvSpPr>
@@ -6244,7 +6907,7 @@
       </p:sp>
       <p:sp>
         <p:nvSpPr>
-          <p:cNvPr id="143" name="" descr="{&quot;isTemplate&quot;:true,&quot;type&quot;:&quot;text&quot;}"/>
+          <p:cNvPr id="164" name="" descr="{&quot;isTemplate&quot;:true,&quot;type&quot;:&quot;text&quot;}"/>
           <p:cNvSpPr txBox="1"/>
           <p:nvPr/>
         </p:nvSpPr>
@@ -6281,7 +6944,7 @@
                 <a:latin typeface="Microsoft YaHei"/>
                 <a:ea typeface="Microsoft YaHei"/>
               </a:rPr>
-              <a:t> · </a:t>
+              <a:t xml:space="preserve"> · </a:t>
             </a:r>
             <a:r>
               <a:rPr lang="zh-CN" sz="1575">
@@ -6319,7 +6982,7 @@
                 <a:latin typeface="Microsoft YaHei"/>
                 <a:ea typeface="Microsoft YaHei"/>
               </a:rPr>
-              <a:t> · </a:t>
+              <a:t xml:space="preserve"> · </a:t>
             </a:r>
             <a:r>
               <a:rPr lang="zh-CN" sz="1575">
@@ -6339,7 +7002,7 @@
                 <a:latin typeface="Microsoft YaHei"/>
                 <a:ea typeface="Microsoft YaHei"/>
               </a:rPr>
-              <a:t> · </a:t>
+              <a:t xml:space="preserve"> · </a:t>
             </a:r>
             <a:r>
               <a:rPr lang="zh-CN" sz="1575">
@@ -6359,7 +7022,7 @@
                 <a:latin typeface="Microsoft YaHei"/>
                 <a:ea typeface="Microsoft YaHei"/>
               </a:rPr>
-              <a:t> · </a:t>
+              <a:t xml:space="preserve"> · </a:t>
             </a:r>
             <a:r>
               <a:rPr lang="zh-CN" sz="1575">
@@ -6377,7 +7040,7 @@
       </p:sp>
       <p:sp>
         <p:nvSpPr>
-          <p:cNvPr id="144" name="" descr="{&quot;isTemplate&quot;:true,&quot;type&quot;:&quot;text&quot;}"/>
+          <p:cNvPr id="165" name="" descr="{&quot;isTemplate&quot;:true,&quot;type&quot;:&quot;text&quot;}"/>
           <p:cNvSpPr txBox="1"/>
           <p:nvPr/>
         </p:nvSpPr>
@@ -6414,7 +7077,7 @@
                 <a:latin typeface="Microsoft YaHei"/>
                 <a:ea typeface="Microsoft YaHei"/>
               </a:rPr>
-              <a:t> 03 – 09 </a:t>
+              <a:t xml:space="preserve"> 03 – 09 </a:t>
             </a:r>
             <a:r>
               <a:rPr lang="zh-CN" sz="1200">
@@ -6432,7 +7095,7 @@
       </p:sp>
       <p:sp>
         <p:nvSpPr>
-          <p:cNvPr id="145" name=""/>
+          <p:cNvPr id="166" name=""/>
           <p:cNvSpPr/>
           <p:nvPr/>
         </p:nvSpPr>
@@ -6456,7 +7119,7 @@
       </p:sp>
       <p:sp>
         <p:nvSpPr>
-          <p:cNvPr id="146" name="" descr="{&quot;isTemplate&quot;:true,&quot;type&quot;:&quot;text&quot;}"/>
+          <p:cNvPr id="167" name="" descr="{&quot;isTemplate&quot;:true,&quot;type&quot;:&quot;text&quot;}"/>
           <p:cNvSpPr txBox="1"/>
           <p:nvPr/>
         </p:nvSpPr>
@@ -6491,7 +7154,7 @@
       </p:sp>
       <p:sp>
         <p:nvSpPr>
-          <p:cNvPr id="147" name="" descr="{&quot;isTemplate&quot;:true,&quot;type&quot;:&quot;text&quot;}"/>
+          <p:cNvPr id="168" name="" descr="{&quot;isTemplate&quot;:true,&quot;type&quot;:&quot;text&quot;}"/>
           <p:cNvSpPr txBox="1"/>
           <p:nvPr/>
         </p:nvSpPr>
@@ -6528,15 +7191,15 @@
                 <a:latin typeface="Microsoft YaHei"/>
                 <a:ea typeface="Microsoft YaHei"/>
               </a:rPr>
-              <a:t> Bestdori</a:t>
-            </a:r>
-            <a:endParaRPr/>
-          </a:p>
-        </p:txBody>
-      </p:sp>
-      <p:sp>
-        <p:nvSpPr>
-          <p:cNvPr id="148" name="" descr="{&quot;isTemplate&quot;:true,&quot;type&quot;:&quot;text&quot;}"/>
+              <a:t xml:space="preserve"> Bestdori</a:t>
+            </a:r>
+            <a:endParaRPr/>
+          </a:p>
+        </p:txBody>
+      </p:sp>
+      <p:sp>
+        <p:nvSpPr>
+          <p:cNvPr id="169" name="" descr="{&quot;isTemplate&quot;:true,&quot;type&quot;:&quot;text&quot;}"/>
           <p:cNvSpPr txBox="1"/>
           <p:nvPr/>
         </p:nvSpPr>
@@ -6591,7 +7254,7 @@
                 <a:latin typeface="Microsoft YaHei"/>
                 <a:ea typeface="Microsoft YaHei"/>
               </a:rPr>
-              <a:t> App </a:t>
+              <a:t xml:space="preserve"> App </a:t>
             </a:r>
             <a:r>
               <a:rPr lang="zh-CN" sz="1575">
@@ -6611,7 +7274,7 @@
                 <a:latin typeface="Microsoft YaHei"/>
                 <a:ea typeface="Microsoft YaHei"/>
               </a:rPr>
-              <a:t> · </a:t>
+              <a:t xml:space="preserve"> · </a:t>
             </a:r>
             <a:r>
               <a:rPr lang="zh-CN" sz="1575">
@@ -6629,7 +7292,7 @@
       </p:sp>
       <p:sp>
         <p:nvSpPr>
-          <p:cNvPr id="149" name="" descr="{&quot;isTemplate&quot;:true,&quot;type&quot;:&quot;text&quot;}"/>
+          <p:cNvPr id="170" name="" descr="{&quot;isTemplate&quot;:true,&quot;type&quot;:&quot;text&quot;}"/>
           <p:cNvSpPr txBox="1"/>
           <p:nvPr/>
         </p:nvSpPr>
@@ -6666,7 +7329,7 @@
                 <a:latin typeface="Microsoft YaHei"/>
                 <a:ea typeface="Microsoft YaHei"/>
               </a:rPr>
-              <a:t> 10 – 12 </a:t>
+              <a:t xml:space="preserve"> 10 – 12 </a:t>
             </a:r>
             <a:r>
               <a:rPr lang="zh-CN" sz="1200">
@@ -6684,7 +7347,7 @@
       </p:sp>
       <p:sp>
         <p:nvSpPr>
-          <p:cNvPr id="150" name="" descr="{&quot;isTemplate&quot;:true,&quot;type&quot;:&quot;text&quot;}"/>
+          <p:cNvPr id="171" name="" descr="{&quot;isTemplate&quot;:true,&quot;type&quot;:&quot;text&quot;}"/>
           <p:cNvSpPr txBox="1"/>
           <p:nvPr/>
         </p:nvSpPr>
@@ -6711,7 +7374,7 @@
                 <a:latin typeface="Microsoft YaHei"/>
                 <a:ea typeface="Microsoft YaHei"/>
               </a:rPr>
-              <a:t>BestdoriHelper </a:t>
+              <a:t xml:space="preserve">BestdoriHelper </a:t>
             </a:r>
             <a:r>
               <a:rPr lang="zh-CN" sz="1125">
@@ -6729,7 +7392,7 @@
       </p:sp>
       <p:sp>
         <p:nvSpPr>
-          <p:cNvPr id="151" name="" descr="{&quot;isTemplate&quot;:true,&quot;type&quot;:&quot;text&quot;}"/>
+          <p:cNvPr id="172" name="" descr="{&quot;isTemplate&quot;:true,&quot;type&quot;:&quot;text&quot;}"/>
           <p:cNvSpPr txBox="1"/>
           <p:nvPr/>
         </p:nvSpPr>
@@ -6756,7 +7419,7 @@
                 <a:latin typeface="Microsoft YaHei"/>
                 <a:ea typeface="Microsoft YaHei"/>
               </a:rPr>
-              <a:t>02 / 14</a:t>
+              <a:t>02 / 15</a:t>
             </a:r>
             <a:endParaRPr/>
           </a:p>
@@ -6768,11 +7431,11 @@
 </file>
 
 <file path=ppt/slides/slide3.xml><?xml version="1.0" encoding="utf-8"?>
-<p:sld xmlns:p="http://schemas.openxmlformats.org/presentationml/2006/main" xmlns:r="http://schemas.openxmlformats.org/officeDocument/2006/relationships" xmlns:a="http://schemas.openxmlformats.org/drawingml/2006/main" xmlns:asvg="http://schemas.microsoft.com/office/drawing/2016/SVG/main" xmlns:mc="http://schemas.openxmlformats.org/markup-compatibility/2006" mc:Ignorable="asvg">
+<p:sld xmlns:p="http://schemas.openxmlformats.org/presentationml/2006/main" xmlns:a="http://schemas.openxmlformats.org/drawingml/2006/main" xmlns:asvg="http://schemas.microsoft.com/office/drawing/2016/SVG/main" xmlns:r="http://schemas.openxmlformats.org/officeDocument/2006/relationships" xmlns:mc="http://schemas.openxmlformats.org/markup-compatibility/2006" mc:Ignorable="asvg">
   <p:cSld>
     <p:spTree>
       <p:nvGrpSpPr>
-        <p:cNvPr id="152" name=""/>
+        <p:cNvPr id="173" name="" descr="&lt;Slide style={{ width: 1280, height: 720, padding: 0, position: 'relative', overflow: 'hidden', background: '#1F2430' }}&gt;&#13;&#10;&#13;&#10;    {/* ===== 背景 ===== */}&#13;&#10;    &lt;Box style={{ position: 'absolute', top: 0, left: 0, width: 1280, height: 720 }}&gt;&#13;&#10;        &lt;svg width={1280} height={720} viewBox='0 0 1280 720'&gt;&#13;&#10;            &lt;defs&gt;&#13;&#10;                &lt;linearGradient id='s1bg' x1='0' y1='0' x2='1' y2='1'&gt;&#13;&#10;                    &lt;stop offset='0%' stopColor='#1B1F2A' /&gt;&#13;&#10;                    &lt;stop offset='100%' stopColor='#2A3242' /&gt;&#13;&#10;                &lt;/linearGradient&gt;&#13;&#10;                &lt;radialGradient id='s1glow' cx='0.22' cy='0.72' r='0.66'&gt;&#13;&#10;                    &lt;stop offset='0%' stopColor='#E8478B' stopOpacity='0.30' /&gt;&#13;&#10;                    &lt;stop offset='100%' stopColor='#E8478B' stopOpacity='0' /&gt;&#13;&#10;                &lt;/radialGradient&gt;&#13;&#10;            &lt;/defs&gt;&#13;&#10;            &lt;rect x='0' y='0' width='1280' height='720' fill='url(#s1bg)' /&gt;&#13;&#10;            &lt;rect x='0' y='0' width='1280' height='720' fill='url(#s1glow)' /&gt;&#13;&#10;&#13;&#10;            {/* 右侧细密网格：呼应&quot;一格一格切出来&quot; */}&#13;&#10;            &lt;g stroke='#FFFFFF' strokeOpacity='0.045' strokeWidth='1'&gt;&#13;&#10;                &lt;line x1='900' y1='0' x2='900' y2='720' /&gt;&#13;&#10;                &lt;line x1='996' y1='0' x2='996' y2='720' /&gt;&#13;&#10;                &lt;line x1='1092' y1='0' x2='1092' y2='720' /&gt;&#13;&#10;                &lt;line x1='1188' y1='0' x2='1188' y2='720' /&gt;&#13;&#10;                &lt;line x1='900' y1='144' x2='1280' y2='144' /&gt;&#13;&#10;                &lt;line x1='900' y1='288' x2='1280' y2='288' /&gt;&#13;&#10;                &lt;line x1='900' y1='432' x2='1280' y2='432' /&gt;&#13;&#10;                &lt;line x1='900' y1='576' x2='1280' y2='576' /&gt;&#13;&#10;            &lt;/g&gt;&#13;&#10;            &lt;rect x='900' y='144' width='96' height='144' fill='#E8478B' fillOpacity='0.20' /&gt;&#13;&#10;            &lt;rect x='1092' y='432' width='96' height='144' fill='#E8478B' fillOpacity='0.12' /&gt;&#13;&#10;        &lt;/svg&gt;&#13;&#10;    &lt;/Box&gt;&#13;&#10;&#13;&#10;    {/* ===== 内容 ===== */}&#13;&#10;    &lt;Box style={{&#13;&#10;        position: 'relative',&#13;&#10;        zIndex: 1,&#13;&#10;        height: '100%',&#13;&#10;        flexDirection: 'column',&#13;&#10;        justifyContent: 'center',&#13;&#10;        paddingLeft: 96,&#13;&#10;        paddingRight: 96,&#13;&#10;        gap: 20,&#13;&#10;    }}&gt;&#13;&#10;        {/* 章节编号：视觉锚点 */}&#13;&#10;        &lt;Text style={{ fontSize: 150, fontWeight: 'bold', color: '#E8478B', lineHeight: 1.0, letterSpacing: 2 }}&gt;&#13;&#10;            01&#13;&#10;        &lt;/Text&gt;&#13;&#10;&#13;&#10;        &lt;Text style={{ fontSize: 64, fontWeight: 'bold', color: '#FFFFFF', lineHeight: 1.15 }}&gt;&#13;&#10;            开始使用&#13;&#10;        &lt;/Text&gt;&#13;&#10;&#13;&#10;        &lt;Box style={{ width: 68, height: 4, background: '#E8478B', borderRadius: 2, marginTop: 6 }} /&gt;&#13;&#10;&#13;&#10;        &lt;Text style={{ fontSize: 22, color: '#8A93A6', marginTop: 6 }}&gt;&#13;&#10;            从选版本到导出清单，四步走完&#13;&#10;        &lt;/Text&gt;&#13;&#10;    &lt;/Box&gt;&#13;&#10;&#13;&#10;&lt;/Slide&gt;&#13;&#10;"/>
         <p:cNvGrpSpPr/>
         <p:nvPr/>
       </p:nvGrpSpPr>
@@ -6786,7 +7449,7 @@
       </p:grpSpPr>
       <p:sp>
         <p:nvSpPr>
-          <p:cNvPr id="153" name=""/>
+          <p:cNvPr id="174" name=""/>
           <p:cNvSpPr/>
           <p:nvPr/>
         </p:nvSpPr>
@@ -6805,22 +7468,19 @@
         </p:spPr>
         <p:txBody>
           <a:bodyPr/>
-          <a:p>
-            <a:pPr/>
-            <a:endParaRPr/>
-          </a:p>
+          <a:p/>
         </p:txBody>
       </p:sp>
       <p:pic>
         <p:nvPicPr>
-          <p:cNvPr id="154" name=""/>
+          <p:cNvPr id="175" name=""/>
           <p:cNvPicPr>
             <a:picLocks noChangeAspect="1"/>
           </p:cNvPicPr>
           <p:nvPr/>
         </p:nvPicPr>
         <p:blipFill>
-          <a:blip>
+          <a:blip r:embed="rId1">
             <a:extLst>
               <a:ext uri="{96DAC541-7B7A-43D3-8B79-37D633B846F1}">
                 <asvg:svgBlip r:embed="rId1"/>
@@ -6844,7 +7504,7 @@
       </p:pic>
       <p:sp>
         <p:nvSpPr>
-          <p:cNvPr id="155" name="" descr="{&quot;isTemplate&quot;:true,&quot;type&quot;:&quot;text&quot;}"/>
+          <p:cNvPr id="176" name="" descr="{&quot;isTemplate&quot;:true,&quot;type&quot;:&quot;text&quot;}"/>
           <p:cNvSpPr txBox="1"/>
           <p:nvPr/>
         </p:nvSpPr>
@@ -6879,7 +7539,7 @@
       </p:sp>
       <p:sp>
         <p:nvSpPr>
-          <p:cNvPr id="156" name="" descr="{&quot;isTemplate&quot;:true,&quot;type&quot;:&quot;text&quot;}"/>
+          <p:cNvPr id="177" name="" descr="{&quot;isTemplate&quot;:true,&quot;type&quot;:&quot;text&quot;}"/>
           <p:cNvSpPr txBox="1"/>
           <p:nvPr/>
         </p:nvSpPr>
@@ -6914,7 +7574,7 @@
       </p:sp>
       <p:sp>
         <p:nvSpPr>
-          <p:cNvPr id="157" name=""/>
+          <p:cNvPr id="178" name=""/>
           <p:cNvSpPr/>
           <p:nvPr/>
         </p:nvSpPr>
@@ -6935,15 +7595,12 @@
         </p:spPr>
         <p:txBody>
           <a:bodyPr/>
-          <a:p>
-            <a:pPr/>
-            <a:endParaRPr/>
-          </a:p>
-        </p:txBody>
-      </p:sp>
-      <p:sp>
-        <p:nvSpPr>
-          <p:cNvPr id="158" name="" descr="{&quot;isTemplate&quot;:true,&quot;type&quot;:&quot;text&quot;}"/>
+          <a:p/>
+        </p:txBody>
+      </p:sp>
+      <p:sp>
+        <p:nvSpPr>
+          <p:cNvPr id="179" name="" descr="{&quot;isTemplate&quot;:true,&quot;type&quot;:&quot;text&quot;}"/>
           <p:cNvSpPr txBox="1"/>
           <p:nvPr/>
         </p:nvSpPr>
@@ -6982,11 +7639,11 @@
 </file>
 
 <file path=ppt/slides/slide4.xml><?xml version="1.0" encoding="utf-8"?>
-<p:sld xmlns:p="http://schemas.openxmlformats.org/presentationml/2006/main" xmlns:r="http://schemas.openxmlformats.org/officeDocument/2006/relationships" xmlns:a="http://schemas.openxmlformats.org/drawingml/2006/main" xmlns:asvg="http://schemas.microsoft.com/office/drawing/2016/SVG/main" xmlns:mc="http://schemas.openxmlformats.org/markup-compatibility/2006" mc:Ignorable="asvg">
+<p:sld xmlns:p="http://schemas.openxmlformats.org/presentationml/2006/main" xmlns:a="http://schemas.openxmlformats.org/drawingml/2006/main" xmlns:asvg="http://schemas.microsoft.com/office/drawing/2016/SVG/main" xmlns:r="http://schemas.openxmlformats.org/officeDocument/2006/relationships" xmlns:mc="http://schemas.openxmlformats.org/markup-compatibility/2006" mc:Ignorable="asvg">
   <p:cSld>
     <p:spTree>
       <p:nvGrpSpPr>
-        <p:cNvPr id="159" name="" descr="&lt;Slide style={{ width: 1280, height: 720, padding: '20px 72px', background: '#F7F8FA', flexDirection: 'column' }}&gt;&#13;&#10;&#13;&#10;    {/* ===== A · 标题块 ===== */}&#13;&#10;    &lt;Box style={{ height: 100, flexDirection: 'row', alignItems: 'center', gap: 16 }}&gt;&#13;&#10;        &lt;Box style={{ width: 6, height: 38, background: '#E8478B', borderRadius: 3 }} /&gt;&#13;&#10;        &lt;Text style={{ fontSize: 36, fontWeight: 'bold', color: '#1F2430' }}&gt;&#13;&#10;            三个版本，怎么选&#13;&#10;        &lt;/Text&gt;&#13;&#10;    &lt;/Box&gt;&#13;&#10;&#13;&#10;    {/* ===== B · 内容区（65:35）===== */}&#13;&#10;    &lt;Box style={{ flex: 1, flexDirection: 'row', gap: 34 }}&gt;&#13;&#10;&#13;&#10;        {/* 左 65%：三端说明 */}&#13;&#10;        &lt;Box style={{ width: 715, flexDirection: 'column', gap: 14 }}&gt;&#13;&#10;&#13;&#10;            {/* 网页版 */}&#13;&#10;            &lt;Box style={{&#13;&#10;                background: '#FFFFFF', borderRadius: 12, padding: '20px 26px',&#13;&#10;                flexDirection: 'column', gap: 5,&#13;&#10;                borderLeft: '4px solid #D5DAE4',&#13;&#10;                boxShadow: '0 2px 12px rgba(31,36,48,0.06)',&#13;&#10;            }}&gt;&#13;&#10;                &lt;Box style={{ flexDirection: 'row', alignItems: 'center', gap: 12 }}&gt;&#13;&#10;                    &lt;Text style={{ fontSize: 25, fontWeight: 'bold', color: '#1F2430' }}&gt;网页版&lt;/Text&gt;&#13;&#10;                    &lt;Text style={{ fontSize: 15, color: '#8A93A6' }}&gt;免安装&lt;/Text&gt;&#13;&#10;                &lt;/Box&gt;&#13;&#10;                &lt;Text style={{ fontSize: 18, color: '#5A6376', lineHeight: 1.55 }}&gt;&#13;&#10;                    打开网址就能用，适合快速识别完导出清单。&#13;&#10;                &lt;/Text&gt;&#13;&#10;            &lt;/Box&gt;&#13;&#10;&#13;&#10;            {/* 安卓 App：强调（唯一能在手机上直接同步的） */}&#13;&#10;            &lt;Box style={{&#13;&#10;                background: 'rgba(232,71,139,0.07)', borderRadius: 12, padding: '20px 26px',&#13;&#10;                flexDirection: 'column', gap: 5,&#13;&#10;                borderLeft: '4px solid #E8478B',&#13;&#10;                boxShadow: '0 2px 12px rgba(232,71,139,0.10)',&#13;&#10;            }}&gt;&#13;&#10;                &lt;Box style={{ flexDirection: 'row', alignItems: 'center', gap: 12 }}&gt;&#13;&#10;                    &lt;Text style={{ fontSize: 25, fontWeight: 'bold', color: '#1F2430' }}&gt;安卓 App&lt;/Text&gt;&#13;&#10;                    &lt;Text style={{ fontSize: 15, color: '#E8478B', fontWeight: 'bold' }}&gt;想同步就选它&lt;/Text&gt;&#13;&#10;                &lt;/Box&gt;&#13;&#10;                &lt;Text style={{ fontSize: 18, color: '#5A6376', lineHeight: 1.55 }}&gt;&#13;&#10;                    手机上直接把清单写进 Bestdori 的「我的卡牌」，一键完成。&#13;&#10;                &lt;/Text&gt;&#13;&#10;            &lt;/Box&gt;&#13;&#10;&#13;&#10;            {/* 桌面版 */}&#13;&#10;            &lt;Box style={{&#13;&#10;                background: '#FFFFFF', borderRadius: 12, padding: '20px 26px',&#13;&#10;                flexDirection: 'column', gap: 5,&#13;&#10;                borderLeft: '4px solid #D5DAE4',&#13;&#10;                boxShadow: '0 2px 12px rgba(31,36,48,0.06)',&#13;&#10;            }}&gt;&#13;&#10;                &lt;Box style={{ flexDirection: 'row', alignItems: 'center', gap: 12 }}&gt;&#13;&#10;                    &lt;Text style={{ fontSize: 25, fontWeight: 'bold', color: '#1F2430' }}&gt;Windows 桌面版&lt;/Text&gt;&#13;&#10;                    &lt;Text style={{ fontSize: 15, color: '#8A93A6' }}&gt;功能最全&lt;/Text&gt;&#13;&#10;                &lt;/Box&gt;&#13;&#10;                &lt;Text style={{ fontSize: 18, color: '#5A6376', lineHeight: 1.55 }}&gt;&#13;&#10;                    在电脑上用，界面最完整，适合批量整理。&#13;&#10;                &lt;/Text&gt;&#13;&#10;            &lt;/Box&gt;&#13;&#10;&#13;&#10;            {/* 结论条 */}&#13;&#10;            &lt;Box style={{&#13;&#10;                marginTop: 'auto', background: '#1F2430', borderRadius: 12,&#13;&#10;                padding: '16px 26px', flexDirection: 'row', alignItems: 'center', gap: 14,&#13;&#10;            }}&gt;&#13;&#10;                &lt;Box style={{ width: 5, height: 30, background: '#E8478B', borderRadius: 3 }} /&gt;&#13;&#10;                &lt;Text style={{ fontSize: 19, color: '#FFFFFF', lineHeight: 1.5 }}&gt;&#13;&#10;                    先想清楚要不要同步：要同步选安卓，图省事选网页，要功能全选桌面&#13;&#10;                &lt;/Text&gt;&#13;&#10;            &lt;/Box&gt;&#13;&#10;&#13;&#10;        &lt;/Box&gt;&#13;&#10;&#13;&#10;        {/* 右 35%：三端示意 */}&#13;&#10;        &lt;Box style={{&#13;&#10;            flex: 1, background: '#FFFFFF', borderRadius: 12,&#13;&#10;            padding: '22px 18px', flexDirection: 'column', alignItems: 'center', justifyContent: 'center',&#13;&#10;            gap: 16, boxShadow: '0 2px 12px rgba(31,36,48,0.06)',&#13;&#10;        }}&gt;&#13;&#10;            &lt;svg width={330} height={330} viewBox='0 0 330 330'&gt;&#13;&#10;                {/* 浏览器窗口 */}&#13;&#10;                &lt;rect x='26' y='34' width='150' height='104' rx='8' fill='#F2F4F8' stroke='#C8CEDA' strokeWidth='2' /&gt;&#13;&#10;                &lt;rect x='26' y='34' width='150' height='20' rx='8' fill='#C8CEDA' /&gt;&#13;&#10;                &lt;circle cx='41' cy='44' r='3' fill='#8A93A6' /&gt;&#13;&#10;                &lt;circle cx='52' cy='44' r='3' fill='#8A93A6' /&gt;&#13;&#10;                &lt;circle cx='63' cy='44' r='3' fill='#8A93A6' /&gt;&#13;&#10;                &lt;g fill='#D5DAE4'&gt;&#13;&#10;                    &lt;rect x='40' y='68' width='52' height='46' rx='4' /&gt;&#13;&#10;                    &lt;rect x='102' y='68' width='52' height='46' rx='4' /&gt;&#13;&#10;                &lt;/g&gt;&#13;&#10;                &lt;text x='101' y='164' fontSize='15' fill='#5A6376' textAnchor='middle'&gt;网页&lt;/text&gt;&#13;&#10;&#13;&#10;                {/* 手机（强调：能同步） */}&#13;&#10;                &lt;rect x='200' y='26' width='98' height='170' rx='14' fill='#FFFFFF' stroke='#E8478B' strokeWidth='3' /&gt;&#13;&#10;                &lt;rect x='212' y='44' width='74' height='126' rx='6' fill='#1F2430' /&gt;&#13;&#10;                &lt;rect x='222' y='56' width='54' height='30' rx='3' fill='#E8478B' fillOpacity='0.55' /&gt;&#13;&#10;                &lt;rect x='222' y='94' width='54' height='30' rx='3' fill='#3A4354' /&gt;&#13;&#10;                &lt;rect x='222' y='132' width='54' height='26' rx='3' fill='#3A4354' /&gt;&#13;&#10;                &lt;rect x='236' y='182' width='26' height='7' rx='3.5' fill='#C8CEDA' /&gt;&#13;&#10;                &lt;text x='249' y='222' fontSize='15' fill='#E8478B' fontWeight='bold' textAnchor='middle'&gt;安卓&lt;/text&gt;&#13;&#10;&#13;&#10;                {/* 桌面窗口 */}&#13;&#10;                &lt;rect x='52' y='240' width='196' height='62' rx='8' fill='#F2F4F8' stroke='#C8CEDA' strokeWidth='2' /&gt;&#13;&#10;                &lt;rect x='66' y='256' width='74' height='30' rx='4' fill='#D5DAE4' /&gt;&#13;&#10;                &lt;rect x='150' y='256' width='84' height='30' rx='4' fill='#D5DAE4' /&gt;&#13;&#10;                &lt;text x='150' y='322' fontSize='15' fill='#5A6376' textAnchor='middle'&gt;Windows&lt;/text&gt;&#13;&#10;            &lt;/svg&gt;&#13;&#10;&#13;&#10;            &lt;Text style={{ fontSize: 15, color: '#8A93A6', textAlign: 'center', lineHeight: 1.5 }}&gt;&#13;&#10;                三个平台共用同一套识别&#13;&#10;                &lt;br /&gt;&#13;&#10;                结果和清单格式，界面不同而已&#13;&#10;            &lt;/Text&gt;&#13;&#10;        &lt;/Box&gt;&#13;&#10;&#13;&#10;    &lt;/Box&gt;&#13;&#10;&#13;&#10;    {/* ===== C · 页脚条 ===== */}&#13;&#10;    &lt;Box style={{ height: 60, flexDirection: 'row', alignItems: 'center', justifyContent: 'space-between' }}&gt;&#13;&#10;        &lt;Text style={{ fontSize: 15, color: '#8A93A6' }}&gt;BestdoriHelper 使用说明&lt;/Text&gt;&#13;&#10;        &lt;Text style={{ fontSize: 15, color: '#8A93A6' }}&gt;04 / 14&lt;/Text&gt;&#13;&#10;    &lt;/Box&gt;&#13;&#10;&#13;&#10;&lt;/Slide&gt;&#13;&#10;"/>
+        <p:cNvPr id="180" name="" descr="&lt;Slide style={{ width: 1280, height: 720, padding: '20px 72px', background: '#F7F8FA', flexDirection: 'column' }}&gt;&#13;&#10;&#13;&#10;    {/* ===== A · 标题块 ===== */}&#13;&#10;    &lt;Box style={{ height: 100, flexDirection: 'row', alignItems: 'center', gap: 16 }}&gt;&#13;&#10;        &lt;Box style={{ width: 6, height: 38, background: '#E8478B', borderRadius: 3 }} /&gt;&#13;&#10;        &lt;Text style={{ fontSize: 36, fontWeight: 'bold', color: '#1F2430' }}&gt;&#13;&#10;            三个版本，怎么选&#13;&#10;        &lt;/Text&gt;&#13;&#10;    &lt;/Box&gt;&#13;&#10;&#13;&#10;    {/* ===== B · 内容区（65:35）===== */}&#13;&#10;    &lt;Box style={{ flex: 1, flexDirection: 'row', gap: 34 }}&gt;&#13;&#10;&#13;&#10;        {/* 左 65%：三端说明 */}&#13;&#10;        &lt;Box style={{ width: 715, flexDirection: 'column', gap: 14 }}&gt;&#13;&#10;&#13;&#10;            {/* 网页版 */}&#13;&#10;            &lt;Box style={{&#13;&#10;                background: '#FFFFFF', borderRadius: 12, padding: '20px 26px',&#13;&#10;                flexDirection: 'column', gap: 5,&#13;&#10;                borderLeft: '4px solid #D5DAE4',&#13;&#10;                boxShadow: '0 2px 12px rgba(31,36,48,0.06)',&#13;&#10;            }}&gt;&#13;&#10;                &lt;Box style={{ flexDirection: 'row', alignItems: 'center', gap: 12 }}&gt;&#13;&#10;                    &lt;Text style={{ fontSize: 25, fontWeight: 'bold', color: '#1F2430' }}&gt;网页版&lt;/Text&gt;&#13;&#10;                    &lt;Text style={{ fontSize: 15, color: '#8A93A6' }}&gt;免安装&lt;/Text&gt;&#13;&#10;                &lt;/Box&gt;&#13;&#10;                &lt;Text style={{ fontSize: 18, color: '#5A6376', lineHeight: 1.55 }}&gt;&#13;&#10;                    打开网址就能用，适合快速识别完导出清单。&#13;&#10;                &lt;/Text&gt;&#13;&#10;            &lt;/Box&gt;&#13;&#10;&#13;&#10;            {/* 安卓 App：强调（唯一能在手机上直接同步的） */}&#13;&#10;            &lt;Box style={{&#13;&#10;                background: 'rgba(232,71,139,0.07)', borderRadius: 12, padding: '20px 26px',&#13;&#10;                flexDirection: 'column', gap: 5,&#13;&#10;                borderLeft: '4px solid #E8478B',&#13;&#10;                boxShadow: '0 2px 12px rgba(232,71,139,0.10)',&#13;&#10;            }}&gt;&#13;&#10;                &lt;Box style={{ flexDirection: 'row', alignItems: 'center', gap: 12 }}&gt;&#13;&#10;                    &lt;Text style={{ fontSize: 25, fontWeight: 'bold', color: '#1F2430' }}&gt;安卓 App&lt;/Text&gt;&#13;&#10;                    &lt;Text style={{ fontSize: 15, color: '#E8478B', fontWeight: 'bold' }}&gt;想同步就选它&lt;/Text&gt;&#13;&#10;                &lt;/Box&gt;&#13;&#10;                &lt;Text style={{ fontSize: 18, color: '#5A6376', lineHeight: 1.55 }}&gt;&#13;&#10;                    手机上直接把清单写进 Bestdori 的「我的卡牌」，一键完成。&#13;&#10;                &lt;/Text&gt;&#13;&#10;            &lt;/Box&gt;&#13;&#10;&#13;&#10;            {/* 桌面版 */}&#13;&#10;            &lt;Box style={{&#13;&#10;                background: '#FFFFFF', borderRadius: 12, padding: '20px 26px',&#13;&#10;                flexDirection: 'column', gap: 5,&#13;&#10;                borderLeft: '4px solid #D5DAE4',&#13;&#10;                boxShadow: '0 2px 12px rgba(31,36,48,0.06)',&#13;&#10;            }}&gt;&#13;&#10;                &lt;Box style={{ flexDirection: 'row', alignItems: 'center', gap: 12 }}&gt;&#13;&#10;                    &lt;Text style={{ fontSize: 25, fontWeight: 'bold', color: '#1F2430' }}&gt;Windows 桌面版&lt;/Text&gt;&#13;&#10;                    &lt;Text style={{ fontSize: 15, color: '#8A93A6' }}&gt;功能最全&lt;/Text&gt;&#13;&#10;                &lt;/Box&gt;&#13;&#10;                &lt;Text style={{ fontSize: 18, color: '#5A6376', lineHeight: 1.55 }}&gt;&#13;&#10;                    在电脑上用，界面最完整，适合批量整理。&#13;&#10;                &lt;/Text&gt;&#13;&#10;            &lt;/Box&gt;&#13;&#10;&#13;&#10;            {/* 结论条 */}&#13;&#10;            &lt;Box style={{&#13;&#10;                marginTop: 'auto', background: '#1F2430', borderRadius: 12,&#13;&#10;                padding: '16px 26px', flexDirection: 'row', alignItems: 'center', gap: 14,&#13;&#10;            }}&gt;&#13;&#10;                &lt;Box style={{ width: 5, height: 30, background: '#E8478B', borderRadius: 3 }} /&gt;&#13;&#10;                &lt;Text style={{ fontSize: 19, color: '#FFFFFF', lineHeight: 1.5 }}&gt;&#13;&#10;                    先想清楚要不要同步：要同步选安卓，图省事选网页，要功能全选桌面&#13;&#10;                &lt;/Text&gt;&#13;&#10;            &lt;/Box&gt;&#13;&#10;&#13;&#10;        &lt;/Box&gt;&#13;&#10;&#13;&#10;        {/* 右 35%：三端示意 */}&#13;&#10;        &lt;Box style={{&#13;&#10;            flex: 1, background: '#FFFFFF', borderRadius: 12,&#13;&#10;            padding: '22px 18px', flexDirection: 'column', alignItems: 'center', justifyContent: 'center',&#13;&#10;            gap: 16, boxShadow: '0 2px 12px rgba(31,36,48,0.06)',&#13;&#10;        }}&gt;&#13;&#10;            &lt;svg width={330} height={330} viewBox='0 0 330 330'&gt;&#13;&#10;                {/* 浏览器窗口 */}&#13;&#10;                &lt;rect x='26' y='34' width='150' height='104' rx='8' fill='#F2F4F8' stroke='#C8CEDA' strokeWidth='2' /&gt;&#13;&#10;                &lt;rect x='26' y='34' width='150' height='20' rx='8' fill='#C8CEDA' /&gt;&#13;&#10;                &lt;circle cx='41' cy='44' r='3' fill='#8A93A6' /&gt;&#13;&#10;                &lt;circle cx='52' cy='44' r='3' fill='#8A93A6' /&gt;&#13;&#10;                &lt;circle cx='63' cy='44' r='3' fill='#8A93A6' /&gt;&#13;&#10;                &lt;g fill='#D5DAE4'&gt;&#13;&#10;                    &lt;rect x='40' y='68' width='52' height='46' rx='4' /&gt;&#13;&#10;                    &lt;rect x='102' y='68' width='52' height='46' rx='4' /&gt;&#13;&#10;                &lt;/g&gt;&#13;&#10;                &lt;text x='101' y='164' fontSize='15' fill='#5A6376' textAnchor='middle'&gt;网页&lt;/text&gt;&#13;&#10;&#13;&#10;                {/* 手机（强调：能同步） */}&#13;&#10;                &lt;rect x='200' y='26' width='98' height='170' rx='14' fill='#FFFFFF' stroke='#E8478B' strokeWidth='3' /&gt;&#13;&#10;                &lt;rect x='212' y='44' width='74' height='126' rx='6' fill='#1F2430' /&gt;&#13;&#10;                &lt;rect x='222' y='56' width='54' height='30' rx='3' fill='#E8478B' fillOpacity='0.55' /&gt;&#13;&#10;                &lt;rect x='222' y='94' width='54' height='30' rx='3' fill='#3A4354' /&gt;&#13;&#10;                &lt;rect x='222' y='132' width='54' height='26' rx='3' fill='#3A4354' /&gt;&#13;&#10;                &lt;rect x='236' y='182' width='26' height='7' rx='3.5' fill='#C8CEDA' /&gt;&#13;&#10;                &lt;text x='249' y='222' fontSize='15' fill='#E8478B' fontWeight='bold' textAnchor='middle'&gt;安卓&lt;/text&gt;&#13;&#10;&#13;&#10;                {/* 桌面窗口 */}&#13;&#10;                &lt;rect x='52' y='240' width='196' height='62' rx='8' fill='#F2F4F8' stroke='#C8CEDA' strokeWidth='2' /&gt;&#13;&#10;                &lt;rect x='66' y='256' width='74' height='30' rx='4' fill='#D5DAE4' /&gt;&#13;&#10;                &lt;rect x='150' y='256' width='84' height='30' rx='4' fill='#D5DAE4' /&gt;&#13;&#10;                &lt;text x='150' y='322' fontSize='15' fill='#5A6376' textAnchor='middle'&gt;Windows&lt;/text&gt;&#13;&#10;            &lt;/svg&gt;&#13;&#10;&#13;&#10;            &lt;Text style={{ fontSize: 15, color: '#8A93A6', textAlign: 'center', lineHeight: 1.5 }}&gt;&#13;&#10;                三个平台共用同一套识别&#13;&#10;                &lt;br /&gt;&#13;&#10;                结果和清单格式，界面不同而已&#13;&#10;            &lt;/Text&gt;&#13;&#10;        &lt;/Box&gt;&#13;&#10;&#13;&#10;    &lt;/Box&gt;&#13;&#10;&#13;&#10;    {/* ===== C · 页脚条 ===== */}&#13;&#10;    &lt;Box style={{ height: 60, flexDirection: 'row', alignItems: 'center', justifyContent: 'space-between' }}&gt;&#13;&#10;        &lt;Text style={{ fontSize: 15, color: '#8A93A6' }}&gt;BestdoriHelper 使用说明&lt;/Text&gt;&#13;&#10;        &lt;Text style={{ fontSize: 15, color: '#8A93A6' }}&gt;04 / 15&lt;/Text&gt;&#13;&#10;    &lt;/Box&gt;&#13;&#10;&#13;&#10;&lt;/Slide&gt;&#13;&#10;"/>
         <p:cNvGrpSpPr/>
         <p:nvPr/>
       </p:nvGrpSpPr>
@@ -7000,7 +7657,7 @@
       </p:grpSpPr>
       <p:sp>
         <p:nvSpPr>
-          <p:cNvPr id="160" name=""/>
+          <p:cNvPr id="181" name=""/>
           <p:cNvSpPr/>
           <p:nvPr/>
         </p:nvSpPr>
@@ -7024,7 +7681,7 @@
       </p:sp>
       <p:sp>
         <p:nvSpPr>
-          <p:cNvPr id="161" name=""/>
+          <p:cNvPr id="182" name=""/>
           <p:cNvSpPr/>
           <p:nvPr/>
         </p:nvSpPr>
@@ -7050,7 +7707,7 @@
       </p:sp>
       <p:sp>
         <p:nvSpPr>
-          <p:cNvPr id="162" name="" descr="{&quot;isTemplate&quot;:true,&quot;type&quot;:&quot;text&quot;}"/>
+          <p:cNvPr id="183" name="" descr="{&quot;isTemplate&quot;:true,&quot;type&quot;:&quot;text&quot;}"/>
           <p:cNvSpPr txBox="1"/>
           <p:nvPr/>
         </p:nvSpPr>
@@ -7085,7 +7742,7 @@
       </p:sp>
       <p:sp>
         <p:nvSpPr>
-          <p:cNvPr id="163" name=""/>
+          <p:cNvPr id="184" name=""/>
           <p:cNvSpPr/>
           <p:nvPr/>
         </p:nvSpPr>
@@ -7118,7 +7775,7 @@
       </p:sp>
       <p:sp>
         <p:nvSpPr>
-          <p:cNvPr id="164" name=""/>
+          <p:cNvPr id="185" name=""/>
           <p:cNvSpPr/>
           <p:nvPr/>
         </p:nvSpPr>
@@ -7175,7 +7832,7 @@
       </p:sp>
       <p:sp>
         <p:nvSpPr>
-          <p:cNvPr id="165" name="" descr="{&quot;isTemplate&quot;:true,&quot;type&quot;:&quot;text&quot;}"/>
+          <p:cNvPr id="186" name="" descr="{&quot;isTemplate&quot;:true,&quot;type&quot;:&quot;text&quot;}"/>
           <p:cNvSpPr txBox="1"/>
           <p:nvPr/>
         </p:nvSpPr>
@@ -7210,7 +7867,7 @@
       </p:sp>
       <p:sp>
         <p:nvSpPr>
-          <p:cNvPr id="166" name="" descr="{&quot;isTemplate&quot;:true,&quot;type&quot;:&quot;text&quot;}"/>
+          <p:cNvPr id="187" name="" descr="{&quot;isTemplate&quot;:true,&quot;type&quot;:&quot;text&quot;}"/>
           <p:cNvSpPr txBox="1"/>
           <p:nvPr/>
         </p:nvSpPr>
@@ -7245,7 +7902,7 @@
       </p:sp>
       <p:sp>
         <p:nvSpPr>
-          <p:cNvPr id="167" name="" descr="{&quot;isTemplate&quot;:true,&quot;type&quot;:&quot;text&quot;}"/>
+          <p:cNvPr id="188" name="" descr="{&quot;isTemplate&quot;:true,&quot;type&quot;:&quot;text&quot;}"/>
           <p:cNvSpPr txBox="1"/>
           <p:nvPr/>
         </p:nvSpPr>
@@ -7280,7 +7937,7 @@
       </p:sp>
       <p:sp>
         <p:nvSpPr>
-          <p:cNvPr id="168" name=""/>
+          <p:cNvPr id="189" name=""/>
           <p:cNvSpPr/>
           <p:nvPr/>
         </p:nvSpPr>
@@ -7315,7 +7972,7 @@
       </p:sp>
       <p:sp>
         <p:nvSpPr>
-          <p:cNvPr id="169" name=""/>
+          <p:cNvPr id="190" name=""/>
           <p:cNvSpPr/>
           <p:nvPr/>
         </p:nvSpPr>
@@ -7372,7 +8029,7 @@
       </p:sp>
       <p:sp>
         <p:nvSpPr>
-          <p:cNvPr id="170" name="" descr="{&quot;isTemplate&quot;:true,&quot;type&quot;:&quot;text&quot;}"/>
+          <p:cNvPr id="191" name="" descr="{&quot;isTemplate&quot;:true,&quot;type&quot;:&quot;text&quot;}"/>
           <p:cNvSpPr txBox="1"/>
           <p:nvPr/>
         </p:nvSpPr>
@@ -7409,15 +8066,15 @@
                 <a:latin typeface="Microsoft YaHei"/>
                 <a:ea typeface="Microsoft YaHei"/>
               </a:rPr>
-              <a:t> App</a:t>
-            </a:r>
-            <a:endParaRPr/>
-          </a:p>
-        </p:txBody>
-      </p:sp>
-      <p:sp>
-        <p:nvSpPr>
-          <p:cNvPr id="171" name="" descr="{&quot;isTemplate&quot;:true,&quot;type&quot;:&quot;text&quot;}"/>
+              <a:t xml:space="preserve"> App</a:t>
+            </a:r>
+            <a:endParaRPr/>
+          </a:p>
+        </p:txBody>
+      </p:sp>
+      <p:sp>
+        <p:nvSpPr>
+          <p:cNvPr id="192" name="" descr="{&quot;isTemplate&quot;:true,&quot;type&quot;:&quot;text&quot;}"/>
           <p:cNvSpPr txBox="1"/>
           <p:nvPr/>
         </p:nvSpPr>
@@ -7452,7 +8109,7 @@
       </p:sp>
       <p:sp>
         <p:nvSpPr>
-          <p:cNvPr id="172" name="" descr="{&quot;isTemplate&quot;:true,&quot;type&quot;:&quot;text&quot;}"/>
+          <p:cNvPr id="193" name="" descr="{&quot;isTemplate&quot;:true,&quot;type&quot;:&quot;text&quot;}"/>
           <p:cNvSpPr txBox="1"/>
           <p:nvPr/>
         </p:nvSpPr>
@@ -7489,7 +8146,7 @@
                 <a:latin typeface="Microsoft YaHei"/>
                 <a:ea typeface="Microsoft YaHei"/>
               </a:rPr>
-              <a:t> Bestdori </a:t>
+              <a:t xml:space="preserve"> Bestdori </a:t>
             </a:r>
             <a:r>
               <a:rPr lang="zh-CN" sz="1350">
@@ -7507,7 +8164,7 @@
       </p:sp>
       <p:sp>
         <p:nvSpPr>
-          <p:cNvPr id="173" name=""/>
+          <p:cNvPr id="194" name=""/>
           <p:cNvSpPr/>
           <p:nvPr/>
         </p:nvSpPr>
@@ -7540,7 +8197,7 @@
       </p:sp>
       <p:sp>
         <p:nvSpPr>
-          <p:cNvPr id="174" name=""/>
+          <p:cNvPr id="195" name=""/>
           <p:cNvSpPr/>
           <p:nvPr/>
         </p:nvSpPr>
@@ -7597,7 +8254,7 @@
       </p:sp>
       <p:sp>
         <p:nvSpPr>
-          <p:cNvPr id="175" name="" descr="{&quot;isTemplate&quot;:true,&quot;type&quot;:&quot;text&quot;}"/>
+          <p:cNvPr id="196" name="" descr="{&quot;isTemplate&quot;:true,&quot;type&quot;:&quot;text&quot;}"/>
           <p:cNvSpPr txBox="1"/>
           <p:nvPr/>
         </p:nvSpPr>
@@ -7624,7 +8281,7 @@
                 <a:latin typeface="Microsoft YaHei"/>
                 <a:ea typeface="Microsoft YaHei"/>
               </a:rPr>
-              <a:t>Windows </a:t>
+              <a:t xml:space="preserve">Windows </a:t>
             </a:r>
             <a:r>
               <a:rPr lang="zh-CN" sz="1875" b="1">
@@ -7642,7 +8299,7 @@
       </p:sp>
       <p:sp>
         <p:nvSpPr>
-          <p:cNvPr id="176" name="" descr="{&quot;isTemplate&quot;:true,&quot;type&quot;:&quot;text&quot;}"/>
+          <p:cNvPr id="197" name="" descr="{&quot;isTemplate&quot;:true,&quot;type&quot;:&quot;text&quot;}"/>
           <p:cNvSpPr txBox="1"/>
           <p:nvPr/>
         </p:nvSpPr>
@@ -7677,7 +8334,7 @@
       </p:sp>
       <p:sp>
         <p:nvSpPr>
-          <p:cNvPr id="177" name="" descr="{&quot;isTemplate&quot;:true,&quot;type&quot;:&quot;text&quot;}"/>
+          <p:cNvPr id="198" name="" descr="{&quot;isTemplate&quot;:true,&quot;type&quot;:&quot;text&quot;}"/>
           <p:cNvSpPr txBox="1"/>
           <p:nvPr/>
         </p:nvSpPr>
@@ -7712,7 +8369,7 @@
       </p:sp>
       <p:sp>
         <p:nvSpPr>
-          <p:cNvPr id="178" name=""/>
+          <p:cNvPr id="199" name=""/>
           <p:cNvSpPr/>
           <p:nvPr/>
         </p:nvSpPr>
@@ -7738,7 +8395,7 @@
       </p:sp>
       <p:sp>
         <p:nvSpPr>
-          <p:cNvPr id="179" name=""/>
+          <p:cNvPr id="200" name=""/>
           <p:cNvSpPr/>
           <p:nvPr/>
         </p:nvSpPr>
@@ -7764,7 +8421,7 @@
       </p:sp>
       <p:sp>
         <p:nvSpPr>
-          <p:cNvPr id="180" name="" descr="{&quot;isTemplate&quot;:true,&quot;type&quot;:&quot;text&quot;}"/>
+          <p:cNvPr id="201" name="" descr="{&quot;isTemplate&quot;:true,&quot;type&quot;:&quot;text&quot;}"/>
           <p:cNvSpPr txBox="1"/>
           <p:nvPr/>
         </p:nvSpPr>
@@ -7799,7 +8456,7 @@
       </p:sp>
       <p:sp>
         <p:nvSpPr>
-          <p:cNvPr id="181" name=""/>
+          <p:cNvPr id="202" name=""/>
           <p:cNvSpPr/>
           <p:nvPr/>
         </p:nvSpPr>
@@ -7832,14 +8489,14 @@
       </p:sp>
       <p:pic>
         <p:nvPicPr>
-          <p:cNvPr id="182" name=""/>
+          <p:cNvPr id="203" name=""/>
           <p:cNvPicPr>
             <a:picLocks noChangeAspect="1"/>
           </p:cNvPicPr>
           <p:nvPr/>
         </p:nvPicPr>
         <p:blipFill>
-          <a:blip>
+          <a:blip r:embed="rId1">
             <a:extLst>
               <a:ext uri="{96DAC541-7B7A-43D3-8B79-37D633B846F1}">
                 <asvg:svgBlip r:embed="rId1"/>
@@ -7863,7 +8520,7 @@
       </p:pic>
       <p:sp>
         <p:nvSpPr>
-          <p:cNvPr id="183" name="" descr="{&quot;isTemplate&quot;:true,&quot;type&quot;:&quot;text&quot;}"/>
+          <p:cNvPr id="204" name="" descr="{&quot;isTemplate&quot;:true,&quot;type&quot;:&quot;text&quot;}"/>
           <p:cNvSpPr txBox="1"/>
           <p:nvPr/>
         </p:nvSpPr>
@@ -7916,7 +8573,7 @@
       </p:sp>
       <p:sp>
         <p:nvSpPr>
-          <p:cNvPr id="184" name="" descr="{&quot;isTemplate&quot;:true,&quot;type&quot;:&quot;text&quot;}"/>
+          <p:cNvPr id="205" name="" descr="{&quot;isTemplate&quot;:true,&quot;type&quot;:&quot;text&quot;}"/>
           <p:cNvSpPr txBox="1"/>
           <p:nvPr/>
         </p:nvSpPr>
@@ -7943,7 +8600,7 @@
                 <a:latin typeface="Microsoft YaHei"/>
                 <a:ea typeface="Microsoft YaHei"/>
               </a:rPr>
-              <a:t>BestdoriHelper </a:t>
+              <a:t xml:space="preserve">BestdoriHelper </a:t>
             </a:r>
             <a:r>
               <a:rPr lang="zh-CN" sz="1125">
@@ -7961,7 +8618,7 @@
       </p:sp>
       <p:sp>
         <p:nvSpPr>
-          <p:cNvPr id="185" name="" descr="{&quot;isTemplate&quot;:true,&quot;type&quot;:&quot;text&quot;}"/>
+          <p:cNvPr id="206" name="" descr="{&quot;isTemplate&quot;:true,&quot;type&quot;:&quot;text&quot;}"/>
           <p:cNvSpPr txBox="1"/>
           <p:nvPr/>
         </p:nvSpPr>
@@ -7988,7 +8645,7 @@
                 <a:latin typeface="Microsoft YaHei"/>
                 <a:ea typeface="Microsoft YaHei"/>
               </a:rPr>
-              <a:t>04 / 14</a:t>
+              <a:t>04 / 15</a:t>
             </a:r>
             <a:endParaRPr/>
           </a:p>
@@ -8004,7 +8661,7 @@
   <p:cSld>
     <p:spTree>
       <p:nvGrpSpPr>
-        <p:cNvPr id="186" name="" descr="&lt;Slide style={{ width: 1280, height: 720, padding: '20px 72px', background: '#F7F8FA', flexDirection: 'column' }}&gt;&#13;&#10;&#13;&#10;    {/* ===== A · 标题块 ===== */}&#13;&#10;    &lt;Box style={{ height: 100, flexDirection: 'row', alignItems: 'center', gap: 16 }}&gt;&#13;&#10;        &lt;Box style={{ width: 6, height: 38, background: '#E8478B', borderRadius: 3 }} /&gt;&#13;&#10;        &lt;Text style={{ fontSize: 36, fontWeight: 'bold', color: '#1F2430' }}&gt;&#13;&#10;            四步走完&#13;&#10;        &lt;/Text&gt;&#13;&#10;    &lt;/Box&gt;&#13;&#10;&#13;&#10;    {/* ===== B · 内容区 ===== */}&#13;&#10;    &lt;Box style={{ flex: 1, flexDirection: 'row', gap: 40, alignItems: 'center' }}&gt;&#13;&#10;&#13;&#10;        {/* 左：巨型锚点数字 */}&#13;&#10;        &lt;Box style={{ width: 330, flexDirection: 'column', alignItems: 'flex-start', gap: 10 }}&gt;&#13;&#10;            &lt;Text style={{ fontSize: 240, fontWeight: 'bold', color: '#E8478B', lineHeight: 0.92, letterSpacing: -6 }}&gt;&#13;&#10;                4&#13;&#10;            &lt;/Text&gt;&#13;&#10;            &lt;Text style={{ fontSize: 40, fontWeight: 'bold', color: '#1F2430', lineHeight: 1.2 }}&gt;&#13;&#10;                步走完全部流程&#13;&#10;            &lt;/Text&gt;&#13;&#10;        &lt;/Box&gt;&#13;&#10;&#13;&#10;        {/* 右：四步 + 洞察 */}&#13;&#10;        &lt;Box style={{ flex: 1, flexDirection: 'column', gap: 18 }}&gt;&#13;&#10;&#13;&#10;            {/* 四个步骤条 */}&#13;&#10;            &lt;Box style={{ flexDirection: 'column', gap: 12 }}&gt;&#13;&#10;                &lt;Box style={{&#13;&#10;                    background: '#FFFFFF', borderRadius: 12, padding: '17px 26px',&#13;&#10;                    flexDirection: 'row', alignItems: 'center', gap: 20,&#13;&#10;                    borderLeft: '4px solid #E8478B',&#13;&#10;                    boxShadow: '0 2px 12px rgba(31,36,48,0.06)',&#13;&#10;                }}&gt;&#13;&#10;                    &lt;Text style={{ fontSize: 30, fontWeight: 'bold', color: '#E8478B', width: 46 }}&gt;1&lt;/Text&gt;&#13;&#10;                    &lt;Text style={{ fontSize: 25, fontWeight: 'bold', color: '#1F2430', width: 168 }}&gt;导入截图&lt;/Text&gt;&#13;&#10;                    &lt;Text style={{ fontSize: 19, color: '#5A6376' }}&gt;把游戏里截的卡面列表图丢进来&lt;/Text&gt;&#13;&#10;                &lt;/Box&gt;&#13;&#10;&#13;&#10;                &lt;Box style={{&#13;&#10;                    background: '#FFFFFF', borderRadius: 12, padding: '17px 26px',&#13;&#10;                    flexDirection: 'row', alignItems: 'center', gap: 20,&#13;&#10;                    borderLeft: '4px solid #E8478B',&#13;&#10;                    boxShadow: '0 2px 12px rgba(31,36,48,0.06)',&#13;&#10;                }}&gt;&#13;&#10;                    &lt;Text style={{ fontSize: 30, fontWeight: 'bold', color: '#E8478B', width: 46 }}&gt;2&lt;/Text&gt;&#13;&#10;                    &lt;Text style={{ fontSize: 25, fontWeight: 'bold', color: '#1F2430', width: 168 }}&gt;核对修正&lt;/Text&gt;&#13;&#10;                    &lt;Text style={{ fontSize: 19, color: '#5A6376' }}&gt;扫一眼对照图，认错的手动改过来&lt;/Text&gt;&#13;&#10;                &lt;/Box&gt;&#13;&#10;&#13;&#10;                &lt;Box style={{&#13;&#10;                    background: '#FFFFFF', borderRadius: 12, padding: '17px 26px',&#13;&#10;                    flexDirection: 'row', alignItems: 'center', gap: 20,&#13;&#10;                    borderLeft: '4px solid #E8478B',&#13;&#10;                    boxShadow: '0 2px 12px rgba(31,36,48,0.06)',&#13;&#10;                }}&gt;&#13;&#10;                    &lt;Text style={{ fontSize: 30, fontWeight: 'bold', color: '#E8478B', width: 46 }}&gt;3&lt;/Text&gt;&#13;&#10;                    &lt;Text style={{ fontSize: 25, fontWeight: 'bold', color: '#1F2430', width: 168 }}&gt;卡面清单&lt;/Text&gt;&#13;&#10;                    &lt;Text style={{ fontSize: 19, color: '#5A6376' }}&gt;自动汇总统计，确认后就是你的卡册&lt;/Text&gt;&#13;&#10;                &lt;/Box&gt;&#13;&#10;&#13;&#10;                &lt;Box style={{&#13;&#10;                    background: '#FFFFFF', borderRadius: 12, padding: '17px 26px',&#13;&#10;                    flexDirection: 'row', alignItems: 'center', gap: 20,&#13;&#10;                    borderLeft: '4px solid #E8478B',&#13;&#10;                    boxShadow: '0 2px 12px rgba(31,36,48,0.06)',&#13;&#10;                }}&gt;&#13;&#10;                    &lt;Text style={{ fontSize: 30, fontWeight: 'bold', color: '#E8478B', width: 46 }}&gt;4&lt;/Text&gt;&#13;&#10;                    &lt;Text style={{ fontSize: 25, fontWeight: 'bold', color: '#1F2430', width: 168 }}&gt;导出 / 同步&lt;/Text&gt;&#13;&#10;                    &lt;Text style={{ fontSize: 19, color: '#5A6376' }}&gt;存成文件，或者直接写进 Bestdori&lt;/Text&gt;&#13;&#10;                &lt;/Box&gt;&#13;&#10;            &lt;/Box&gt;&#13;&#10;&#13;&#10;            {/* 洞察 */}&#13;&#10;            &lt;Box style={{&#13;&#10;                background: '#1F2430', borderRadius: 12, padding: '16px 26px',&#13;&#10;                flexDirection: 'row', alignItems: 'center', gap: 14,&#13;&#10;            }}&gt;&#13;&#10;                &lt;Box style={{ width: 5, height: 32, background: '#E8478B', borderRadius: 3 }} /&gt;&#13;&#10;                &lt;Text style={{ fontSize: 20, color: '#FFFFFF', lineHeight: 1.5 }}&gt;&#13;&#10;                    后面四页一步一步讲 —— 每一步你真正要做的，通常不超过两次点击&#13;&#10;                &lt;/Text&gt;&#13;&#10;            &lt;/Box&gt;&#13;&#10;&#13;&#10;        &lt;/Box&gt;&#13;&#10;    &lt;/Box&gt;&#13;&#10;&#13;&#10;    {/* ===== C · 页脚条 ===== */}&#13;&#10;    &lt;Box style={{ height: 60, flexDirection: 'row', alignItems: 'center', justifyContent: 'space-between' }}&gt;&#13;&#10;        &lt;Text style={{ fontSize: 15, color: '#8A93A6' }}&gt;BestdoriHelper 使用说明&lt;/Text&gt;&#13;&#10;        &lt;Text style={{ fontSize: 15, color: '#8A93A6' }}&gt;05 / 14&lt;/Text&gt;&#13;&#10;    &lt;/Box&gt;&#13;&#10;&#13;&#10;&lt;/Slide&gt;&#13;&#10;"/>
+        <p:cNvPr id="207" name="" descr="&lt;Slide style={{ width: 1280, height: 720, padding: '20px 72px', background: '#F7F8FA', flexDirection: 'column' }}&gt;&#13;&#10;&#13;&#10;    {/* ===== A · 标题块 ===== */}&#13;&#10;    &lt;Box style={{ height: 100, flexDirection: 'row', alignItems: 'center', gap: 16 }}&gt;&#13;&#10;        &lt;Box style={{ width: 6, height: 38, background: '#E8478B', borderRadius: 3 }} /&gt;&#13;&#10;        &lt;Text style={{ fontSize: 36, fontWeight: 'bold', color: '#1F2430' }}&gt;&#13;&#10;            四步走完&#13;&#10;        &lt;/Text&gt;&#13;&#10;    &lt;/Box&gt;&#13;&#10;&#13;&#10;    {/* ===== B · 内容区 ===== */}&#13;&#10;    &lt;Box style={{ flex: 1, flexDirection: 'row', gap: 40, alignItems: 'center' }}&gt;&#13;&#10;&#13;&#10;        {/* 左：巨型锚点数字 */}&#13;&#10;        &lt;Box style={{ width: 330, flexDirection: 'column', alignItems: 'flex-start', gap: 10 }}&gt;&#13;&#10;            &lt;Text style={{ fontSize: 240, fontWeight: 'bold', color: '#E8478B', lineHeight: 0.92, letterSpacing: -6 }}&gt;&#13;&#10;                4&#13;&#10;            &lt;/Text&gt;&#13;&#10;            &lt;Text style={{ fontSize: 40, fontWeight: 'bold', color: '#1F2430', lineHeight: 1.2 }}&gt;&#13;&#10;                步走完全部流程&#13;&#10;            &lt;/Text&gt;&#13;&#10;        &lt;/Box&gt;&#13;&#10;&#13;&#10;        {/* 右：四步 + 洞察 */}&#13;&#10;        &lt;Box style={{ flex: 1, flexDirection: 'column', gap: 18 }}&gt;&#13;&#10;&#13;&#10;            {/* 四个步骤条 */}&#13;&#10;            &lt;Box style={{ flexDirection: 'column', gap: 12 }}&gt;&#13;&#10;                &lt;Box style={{&#13;&#10;                    background: '#FFFFFF', borderRadius: 12, padding: '17px 26px',&#13;&#10;                    flexDirection: 'row', alignItems: 'center', gap: 20,&#13;&#10;                    borderLeft: '4px solid #E8478B',&#13;&#10;                    boxShadow: '0 2px 12px rgba(31,36,48,0.06)',&#13;&#10;                }}&gt;&#13;&#10;                    &lt;Text style={{ fontSize: 30, fontWeight: 'bold', color: '#E8478B', width: 46 }}&gt;1&lt;/Text&gt;&#13;&#10;                    &lt;Text style={{ fontSize: 25, fontWeight: 'bold', color: '#1F2430', width: 168 }}&gt;导入截图&lt;/Text&gt;&#13;&#10;                    &lt;Text style={{ fontSize: 19, color: '#5A6376' }}&gt;把游戏里截的卡面列表图丢进来&lt;/Text&gt;&#13;&#10;                &lt;/Box&gt;&#13;&#10;&#13;&#10;                &lt;Box style={{&#13;&#10;                    background: '#FFFFFF', borderRadius: 12, padding: '17px 26px',&#13;&#10;                    flexDirection: 'row', alignItems: 'center', gap: 20,&#13;&#10;                    borderLeft: '4px solid #E8478B',&#13;&#10;                    boxShadow: '0 2px 12px rgba(31,36,48,0.06)',&#13;&#10;                }}&gt;&#13;&#10;                    &lt;Text style={{ fontSize: 30, fontWeight: 'bold', color: '#E8478B', width: 46 }}&gt;2&lt;/Text&gt;&#13;&#10;                    &lt;Text style={{ fontSize: 25, fontWeight: 'bold', color: '#1F2430', width: 168 }}&gt;核对修正&lt;/Text&gt;&#13;&#10;                    &lt;Text style={{ fontSize: 19, color: '#5A6376' }}&gt;扫一眼对照图，认错的手动改过来&lt;/Text&gt;&#13;&#10;                &lt;/Box&gt;&#13;&#10;&#13;&#10;                &lt;Box style={{&#13;&#10;                    background: '#FFFFFF', borderRadius: 12, padding: '17px 26px',&#13;&#10;                    flexDirection: 'row', alignItems: 'center', gap: 20,&#13;&#10;                    borderLeft: '4px solid #E8478B',&#13;&#10;                    boxShadow: '0 2px 12px rgba(31,36,48,0.06)',&#13;&#10;                }}&gt;&#13;&#10;                    &lt;Text style={{ fontSize: 30, fontWeight: 'bold', color: '#E8478B', width: 46 }}&gt;3&lt;/Text&gt;&#13;&#10;                    &lt;Text style={{ fontSize: 25, fontWeight: 'bold', color: '#1F2430', width: 168 }}&gt;卡面清单&lt;/Text&gt;&#13;&#10;                    &lt;Text style={{ fontSize: 19, color: '#5A6376' }}&gt;自动汇总统计，确认后就是你的卡册&lt;/Text&gt;&#13;&#10;                &lt;/Box&gt;&#13;&#10;&#13;&#10;                &lt;Box style={{&#13;&#10;                    background: '#FFFFFF', borderRadius: 12, padding: '17px 26px',&#13;&#10;                    flexDirection: 'row', alignItems: 'center', gap: 20,&#13;&#10;                    borderLeft: '4px solid #E8478B',&#13;&#10;                    boxShadow: '0 2px 12px rgba(31,36,48,0.06)',&#13;&#10;                }}&gt;&#13;&#10;                    &lt;Text style={{ fontSize: 30, fontWeight: 'bold', color: '#E8478B', width: 46 }}&gt;4&lt;/Text&gt;&#13;&#10;                    &lt;Text style={{ fontSize: 25, fontWeight: 'bold', color: '#1F2430', width: 168 }}&gt;导出 / 同步&lt;/Text&gt;&#13;&#10;                    &lt;Text style={{ fontSize: 19, color: '#5A6376' }}&gt;存成文件，或者直接写进 Bestdori&lt;/Text&gt;&#13;&#10;                &lt;/Box&gt;&#13;&#10;            &lt;/Box&gt;&#13;&#10;&#13;&#10;            {/* 洞察 */}&#13;&#10;            &lt;Box style={{&#13;&#10;                background: '#1F2430', borderRadius: 12, padding: '16px 26px',&#13;&#10;                flexDirection: 'row', alignItems: 'center', gap: 14,&#13;&#10;            }}&gt;&#13;&#10;                &lt;Box style={{ width: 5, height: 32, background: '#E8478B', borderRadius: 3 }} /&gt;&#13;&#10;                &lt;Text style={{ fontSize: 20, color: '#FFFFFF', lineHeight: 1.5 }}&gt;&#13;&#10;                    后面四页一步一步讲 —— 每一步你真正要做的，通常不超过两次点击&#13;&#10;                &lt;/Text&gt;&#13;&#10;            &lt;/Box&gt;&#13;&#10;&#13;&#10;        &lt;/Box&gt;&#13;&#10;    &lt;/Box&gt;&#13;&#10;&#13;&#10;    {/* ===== C · 页脚条 ===== */}&#13;&#10;    &lt;Box style={{ height: 60, flexDirection: 'row', alignItems: 'center', justifyContent: 'space-between' }}&gt;&#13;&#10;        &lt;Text style={{ fontSize: 15, color: '#8A93A6' }}&gt;BestdoriHelper 使用说明&lt;/Text&gt;&#13;&#10;        &lt;Text style={{ fontSize: 15, color: '#8A93A6' }}&gt;05 / 15&lt;/Text&gt;&#13;&#10;    &lt;/Box&gt;&#13;&#10;&#13;&#10;&lt;/Slide&gt;&#13;&#10;"/>
         <p:cNvGrpSpPr/>
         <p:nvPr/>
       </p:nvGrpSpPr>
@@ -8018,7 +8675,7 @@
       </p:grpSpPr>
       <p:sp>
         <p:nvSpPr>
-          <p:cNvPr id="187" name=""/>
+          <p:cNvPr id="208" name=""/>
           <p:cNvSpPr/>
           <p:nvPr/>
         </p:nvSpPr>
@@ -8042,7 +8699,7 @@
       </p:sp>
       <p:sp>
         <p:nvSpPr>
-          <p:cNvPr id="188" name=""/>
+          <p:cNvPr id="209" name=""/>
           <p:cNvSpPr/>
           <p:nvPr/>
         </p:nvSpPr>
@@ -8068,7 +8725,7 @@
       </p:sp>
       <p:sp>
         <p:nvSpPr>
-          <p:cNvPr id="189" name="" descr="{&quot;isTemplate&quot;:true,&quot;type&quot;:&quot;text&quot;}"/>
+          <p:cNvPr id="210" name="" descr="{&quot;isTemplate&quot;:true,&quot;type&quot;:&quot;text&quot;}"/>
           <p:cNvSpPr txBox="1"/>
           <p:nvPr/>
         </p:nvSpPr>
@@ -8103,7 +8760,7 @@
       </p:sp>
       <p:sp>
         <p:nvSpPr>
-          <p:cNvPr id="190" name="" descr="{&quot;isTemplate&quot;:true,&quot;type&quot;:&quot;text&quot;}"/>
+          <p:cNvPr id="211" name="" descr="{&quot;isTemplate&quot;:true,&quot;type&quot;:&quot;text&quot;}"/>
           <p:cNvSpPr txBox="1"/>
           <p:nvPr/>
         </p:nvSpPr>
@@ -8138,7 +8795,7 @@
       </p:sp>
       <p:sp>
         <p:nvSpPr>
-          <p:cNvPr id="191" name="" descr="{&quot;isTemplate&quot;:true,&quot;type&quot;:&quot;text&quot;}"/>
+          <p:cNvPr id="212" name="" descr="{&quot;isTemplate&quot;:true,&quot;type&quot;:&quot;text&quot;}"/>
           <p:cNvSpPr txBox="1"/>
           <p:nvPr/>
         </p:nvSpPr>
@@ -8173,7 +8830,7 @@
       </p:sp>
       <p:sp>
         <p:nvSpPr>
-          <p:cNvPr id="192" name=""/>
+          <p:cNvPr id="213" name=""/>
           <p:cNvSpPr/>
           <p:nvPr/>
         </p:nvSpPr>
@@ -8206,7 +8863,7 @@
       </p:sp>
       <p:sp>
         <p:nvSpPr>
-          <p:cNvPr id="193" name=""/>
+          <p:cNvPr id="214" name=""/>
           <p:cNvSpPr/>
           <p:nvPr/>
         </p:nvSpPr>
@@ -8263,7 +8920,7 @@
       </p:sp>
       <p:sp>
         <p:nvSpPr>
-          <p:cNvPr id="194" name="" descr="{&quot;isTemplate&quot;:true,&quot;type&quot;:&quot;text&quot;}"/>
+          <p:cNvPr id="215" name="" descr="{&quot;isTemplate&quot;:true,&quot;type&quot;:&quot;text&quot;}"/>
           <p:cNvSpPr txBox="1"/>
           <p:nvPr/>
         </p:nvSpPr>
@@ -8298,7 +8955,7 @@
       </p:sp>
       <p:sp>
         <p:nvSpPr>
-          <p:cNvPr id="195" name="" descr="{&quot;isTemplate&quot;:true,&quot;type&quot;:&quot;text&quot;}"/>
+          <p:cNvPr id="216" name="" descr="{&quot;isTemplate&quot;:true,&quot;type&quot;:&quot;text&quot;}"/>
           <p:cNvSpPr txBox="1"/>
           <p:nvPr/>
         </p:nvSpPr>
@@ -8333,7 +8990,7 @@
       </p:sp>
       <p:sp>
         <p:nvSpPr>
-          <p:cNvPr id="196" name="" descr="{&quot;isTemplate&quot;:true,&quot;type&quot;:&quot;text&quot;}"/>
+          <p:cNvPr id="217" name="" descr="{&quot;isTemplate&quot;:true,&quot;type&quot;:&quot;text&quot;}"/>
           <p:cNvSpPr txBox="1"/>
           <p:nvPr/>
         </p:nvSpPr>
@@ -8368,7 +9025,7 @@
       </p:sp>
       <p:sp>
         <p:nvSpPr>
-          <p:cNvPr id="197" name=""/>
+          <p:cNvPr id="218" name=""/>
           <p:cNvSpPr/>
           <p:nvPr/>
         </p:nvSpPr>
@@ -8401,7 +9058,7 @@
       </p:sp>
       <p:sp>
         <p:nvSpPr>
-          <p:cNvPr id="198" name=""/>
+          <p:cNvPr id="219" name=""/>
           <p:cNvSpPr/>
           <p:nvPr/>
         </p:nvSpPr>
@@ -8458,7 +9115,7 @@
       </p:sp>
       <p:sp>
         <p:nvSpPr>
-          <p:cNvPr id="199" name="" descr="{&quot;isTemplate&quot;:true,&quot;type&quot;:&quot;text&quot;}"/>
+          <p:cNvPr id="220" name="" descr="{&quot;isTemplate&quot;:true,&quot;type&quot;:&quot;text&quot;}"/>
           <p:cNvSpPr txBox="1"/>
           <p:nvPr/>
         </p:nvSpPr>
@@ -8493,7 +9150,7 @@
       </p:sp>
       <p:sp>
         <p:nvSpPr>
-          <p:cNvPr id="200" name="" descr="{&quot;isTemplate&quot;:true,&quot;type&quot;:&quot;text&quot;}"/>
+          <p:cNvPr id="221" name="" descr="{&quot;isTemplate&quot;:true,&quot;type&quot;:&quot;text&quot;}"/>
           <p:cNvSpPr txBox="1"/>
           <p:nvPr/>
         </p:nvSpPr>
@@ -8528,7 +9185,7 @@
       </p:sp>
       <p:sp>
         <p:nvSpPr>
-          <p:cNvPr id="201" name="" descr="{&quot;isTemplate&quot;:true,&quot;type&quot;:&quot;text&quot;}"/>
+          <p:cNvPr id="222" name="" descr="{&quot;isTemplate&quot;:true,&quot;type&quot;:&quot;text&quot;}"/>
           <p:cNvSpPr txBox="1"/>
           <p:nvPr/>
         </p:nvSpPr>
@@ -8563,7 +9220,7 @@
       </p:sp>
       <p:sp>
         <p:nvSpPr>
-          <p:cNvPr id="202" name=""/>
+          <p:cNvPr id="223" name=""/>
           <p:cNvSpPr/>
           <p:nvPr/>
         </p:nvSpPr>
@@ -8596,7 +9253,7 @@
       </p:sp>
       <p:sp>
         <p:nvSpPr>
-          <p:cNvPr id="203" name=""/>
+          <p:cNvPr id="224" name=""/>
           <p:cNvSpPr/>
           <p:nvPr/>
         </p:nvSpPr>
@@ -8653,7 +9310,7 @@
       </p:sp>
       <p:sp>
         <p:nvSpPr>
-          <p:cNvPr id="204" name="" descr="{&quot;isTemplate&quot;:true,&quot;type&quot;:&quot;text&quot;}"/>
+          <p:cNvPr id="225" name="" descr="{&quot;isTemplate&quot;:true,&quot;type&quot;:&quot;text&quot;}"/>
           <p:cNvSpPr txBox="1"/>
           <p:nvPr/>
         </p:nvSpPr>
@@ -8688,7 +9345,7 @@
       </p:sp>
       <p:sp>
         <p:nvSpPr>
-          <p:cNvPr id="205" name="" descr="{&quot;isTemplate&quot;:true,&quot;type&quot;:&quot;text&quot;}"/>
+          <p:cNvPr id="226" name="" descr="{&quot;isTemplate&quot;:true,&quot;type&quot;:&quot;text&quot;}"/>
           <p:cNvSpPr txBox="1"/>
           <p:nvPr/>
         </p:nvSpPr>
@@ -8723,7 +9380,7 @@
       </p:sp>
       <p:sp>
         <p:nvSpPr>
-          <p:cNvPr id="206" name="" descr="{&quot;isTemplate&quot;:true,&quot;type&quot;:&quot;text&quot;}"/>
+          <p:cNvPr id="227" name="" descr="{&quot;isTemplate&quot;:true,&quot;type&quot;:&quot;text&quot;}"/>
           <p:cNvSpPr txBox="1"/>
           <p:nvPr/>
         </p:nvSpPr>
@@ -8758,7 +9415,7 @@
       </p:sp>
       <p:sp>
         <p:nvSpPr>
-          <p:cNvPr id="207" name=""/>
+          <p:cNvPr id="228" name=""/>
           <p:cNvSpPr/>
           <p:nvPr/>
         </p:nvSpPr>
@@ -8791,7 +9448,7 @@
       </p:sp>
       <p:sp>
         <p:nvSpPr>
-          <p:cNvPr id="208" name=""/>
+          <p:cNvPr id="229" name=""/>
           <p:cNvSpPr/>
           <p:nvPr/>
         </p:nvSpPr>
@@ -8848,7 +9505,7 @@
       </p:sp>
       <p:sp>
         <p:nvSpPr>
-          <p:cNvPr id="209" name="" descr="{&quot;isTemplate&quot;:true,&quot;type&quot;:&quot;text&quot;}"/>
+          <p:cNvPr id="230" name="" descr="{&quot;isTemplate&quot;:true,&quot;type&quot;:&quot;text&quot;}"/>
           <p:cNvSpPr txBox="1"/>
           <p:nvPr/>
         </p:nvSpPr>
@@ -8883,7 +9540,7 @@
       </p:sp>
       <p:sp>
         <p:nvSpPr>
-          <p:cNvPr id="210" name="" descr="{&quot;isTemplate&quot;:true,&quot;type&quot;:&quot;text&quot;}"/>
+          <p:cNvPr id="231" name="" descr="{&quot;isTemplate&quot;:true,&quot;type&quot;:&quot;text&quot;}"/>
           <p:cNvSpPr txBox="1"/>
           <p:nvPr/>
         </p:nvSpPr>
@@ -8920,7 +9577,7 @@
                 <a:latin typeface="Microsoft YaHei"/>
                 <a:ea typeface="Microsoft YaHei"/>
               </a:rPr>
-              <a:t> / </a:t>
+              <a:t xml:space="preserve"> / </a:t>
             </a:r>
             <a:r>
               <a:rPr lang="zh-CN" sz="1875" b="1">
@@ -8938,7 +9595,7 @@
       </p:sp>
       <p:sp>
         <p:nvSpPr>
-          <p:cNvPr id="211" name="" descr="{&quot;isTemplate&quot;:true,&quot;type&quot;:&quot;text&quot;}"/>
+          <p:cNvPr id="232" name="" descr="{&quot;isTemplate&quot;:true,&quot;type&quot;:&quot;text&quot;}"/>
           <p:cNvSpPr txBox="1"/>
           <p:nvPr/>
         </p:nvSpPr>
@@ -8975,15 +9632,15 @@
                 <a:latin typeface="Microsoft YaHei"/>
                 <a:ea typeface="Microsoft YaHei"/>
               </a:rPr>
-              <a:t> Bestdori</a:t>
-            </a:r>
-            <a:endParaRPr/>
-          </a:p>
-        </p:txBody>
-      </p:sp>
-      <p:sp>
-        <p:nvSpPr>
-          <p:cNvPr id="212" name=""/>
+              <a:t xml:space="preserve"> Bestdori</a:t>
+            </a:r>
+            <a:endParaRPr/>
+          </a:p>
+        </p:txBody>
+      </p:sp>
+      <p:sp>
+        <p:nvSpPr>
+          <p:cNvPr id="233" name=""/>
           <p:cNvSpPr/>
           <p:nvPr/>
         </p:nvSpPr>
@@ -9009,7 +9666,7 @@
       </p:sp>
       <p:sp>
         <p:nvSpPr>
-          <p:cNvPr id="213" name=""/>
+          <p:cNvPr id="234" name=""/>
           <p:cNvSpPr/>
           <p:nvPr/>
         </p:nvSpPr>
@@ -9035,7 +9692,7 @@
       </p:sp>
       <p:sp>
         <p:nvSpPr>
-          <p:cNvPr id="214" name="" descr="{&quot;isTemplate&quot;:true,&quot;type&quot;:&quot;text&quot;}"/>
+          <p:cNvPr id="235" name="" descr="{&quot;isTemplate&quot;:true,&quot;type&quot;:&quot;text&quot;}"/>
           <p:cNvSpPr txBox="1"/>
           <p:nvPr/>
         </p:nvSpPr>
@@ -9072,7 +9729,7 @@
                 <a:latin typeface="Microsoft YaHei"/>
                 <a:ea typeface="Microsoft YaHei"/>
               </a:rPr>
-              <a:t> —— </a:t>
+              <a:t xml:space="preserve"> —— </a:t>
             </a:r>
             <a:r>
               <a:rPr lang="zh-CN" sz="1500">
@@ -9090,7 +9747,7 @@
       </p:sp>
       <p:sp>
         <p:nvSpPr>
-          <p:cNvPr id="215" name="" descr="{&quot;isTemplate&quot;:true,&quot;type&quot;:&quot;text&quot;}"/>
+          <p:cNvPr id="236" name="" descr="{&quot;isTemplate&quot;:true,&quot;type&quot;:&quot;text&quot;}"/>
           <p:cNvSpPr txBox="1"/>
           <p:nvPr/>
         </p:nvSpPr>
@@ -9117,7 +9774,7 @@
                 <a:latin typeface="Microsoft YaHei"/>
                 <a:ea typeface="Microsoft YaHei"/>
               </a:rPr>
-              <a:t>BestdoriHelper </a:t>
+              <a:t xml:space="preserve">BestdoriHelper </a:t>
             </a:r>
             <a:r>
               <a:rPr lang="zh-CN" sz="1125">
@@ -9135,7 +9792,7 @@
       </p:sp>
       <p:sp>
         <p:nvSpPr>
-          <p:cNvPr id="216" name="" descr="{&quot;isTemplate&quot;:true,&quot;type&quot;:&quot;text&quot;}"/>
+          <p:cNvPr id="237" name="" descr="{&quot;isTemplate&quot;:true,&quot;type&quot;:&quot;text&quot;}"/>
           <p:cNvSpPr txBox="1"/>
           <p:nvPr/>
         </p:nvSpPr>
@@ -9162,7 +9819,7 @@
                 <a:latin typeface="Microsoft YaHei"/>
                 <a:ea typeface="Microsoft YaHei"/>
               </a:rPr>
-              <a:t>05 / 14</a:t>
+              <a:t>05 / 15</a:t>
             </a:r>
             <a:endParaRPr/>
           </a:p>
@@ -9174,11 +9831,11 @@
 </file>
 
 <file path=ppt/slides/slide6.xml><?xml version="1.0" encoding="utf-8"?>
-<p:sld xmlns:p="http://schemas.openxmlformats.org/presentationml/2006/main" xmlns:r="http://schemas.openxmlformats.org/officeDocument/2006/relationships" xmlns:a="http://schemas.openxmlformats.org/drawingml/2006/main">
+<p:sld xmlns:p="http://schemas.openxmlformats.org/presentationml/2006/main" xmlns:a="http://schemas.openxmlformats.org/drawingml/2006/main" xmlns:r="http://schemas.openxmlformats.org/officeDocument/2006/relationships">
   <p:cSld>
     <p:spTree>
       <p:nvGrpSpPr>
-        <p:cNvPr id="217" name="" descr="&lt;Slide style={{ width: 1280, height: 720, padding: '20px 72px', background: '#F7F8FA', flexDirection: 'column' }}&gt;&#13;&#10;&#13;&#10;    {/* ===== A · 标题块 ===== */}&#13;&#10;    &lt;Box style={{ height: 100, flexDirection: 'row', alignItems: 'center', gap: 16 }}&gt;&#13;&#10;        &lt;Box style={{ width: 6, height: 38, background: '#E8478B', borderRadius: 3 }} /&gt;&#13;&#10;        &lt;Text style={{ fontSize: 36, fontWeight: 'bold', color: '#1F2430' }}&gt;&#13;&#10;            第一步 · 导入截图&#13;&#10;        &lt;/Text&gt;&#13;&#10;    &lt;/Box&gt;&#13;&#10;&#13;&#10;    {/* ===== B · 内容区（左大图 58% + 右文字）===== */}&#13;&#10;    &lt;Box style={{ flex: 1, flexDirection: 'row', gap: 32, alignItems: 'center' }}&gt;&#13;&#10;&#13;&#10;        {/* 左：界面截图（比例 = 截图原 2.41:1） */}&#13;&#10;        &lt;Box style={{&#13;&#10;            width: 600, height: 250, borderRadius: 12, overflow: 'hidden',&#13;&#10;            background: '#1F2430', border: '1px solid #2E3442',&#13;&#10;            boxShadow: '0 6px 24px rgba(31,36,48,0.18)',&#13;&#10;        }}&gt;&#13;&#10;            &lt;Image src=&quot;assets/step1_import.png&quot; style={{ width: '100%', height: '100%', objectFit: 'contain' }} /&gt;&#13;&#10;        &lt;/Box&gt;&#13;&#10;&#13;&#10;        {/* 右：要点 */}&#13;&#10;        &lt;Box style={{ flex: 1, flexDirection: 'column', gap: 16 }}&gt;&#13;&#10;&#13;&#10;            &lt;Box style={{&#13;&#10;                background: '#FFFFFF', borderRadius: 12, padding: '16px 22px',&#13;&#10;                flexDirection: 'column', gap: 4, borderLeft: '4px solid #E8478B',&#13;&#10;                boxShadow: '0 2px 12px rgba(31,36,48,0.06)',&#13;&#10;            }}&gt;&#13;&#10;                &lt;Text style={{ fontSize: 21, fontWeight: 'bold', color: '#1F2430' }}&gt;拖进来，或者点一下选&lt;/Text&gt;&#13;&#10;                &lt;Text style={{ fontSize: 17, color: '#5A6376', lineHeight: 1.55 }}&gt;&#13;&#10;                    可以一次选多张，也能直接选整个文件夹。&lt;br /&gt;&#13;&#10;                    图片只在你本机处理，不会上传。&#13;&#10;                &lt;/Text&gt;&#13;&#10;            &lt;/Box&gt;&#13;&#10;&#13;&#10;            &lt;Box style={{&#13;&#10;                background: '#FFFFFF', borderRadius: 12, padding: '16px 22px',&#13;&#10;                flexDirection: 'column', gap: 4, borderLeft: '4px solid #D5DAE4',&#13;&#10;                boxShadow: '0 2px 12px rgba(31,36,48,0.06)',&#13;&#10;            }}&gt;&#13;&#10;                &lt;Text style={{ fontSize: 21, fontWeight: 'bold', color: '#1F2430' }}&gt;切分模式用「自动」&lt;/Text&gt;&#13;&#10;                &lt;Text style={{ fontSize: 17, color: '#5A6376', lineHeight: 1.55 }}&gt;&#13;&#10;                    它会自己数出行数和列数。切得不准时再改成&#13;&#10;                    &lt;br /&gt;&#13;&#10;                    「指定行列」，手动填行、列。&#13;&#10;                &lt;/Text&gt;&#13;&#10;            &lt;/Box&gt;&#13;&#10;&#13;&#10;            &lt;Box style={{&#13;&#10;                background: 'rgba(232,71,139,0.07)', borderRadius: 12, padding: '16px 22px',&#13;&#10;                flexDirection: 'column', gap: 4, borderLeft: '4px solid #E8478B',&#13;&#10;            }}&gt;&#13;&#10;                &lt;Text style={{ fontSize: 21, fontWeight: 'bold', color: '#1F2430' }}&gt;别忘了「卡框贴合」&lt;/Text&gt;&#13;&#10;                &lt;Text style={{ fontSize: 17, color: '#5A6376', lineHeight: 1.55 }}&gt;&#13;&#10;                    默认开着。它让每一格收紧到真正的卡框上，&#13;&#10;                    &lt;br /&gt;&#13;&#10;                    不会把旁边卡面的边切进来 —— 直接决定准不准。&#13;&#10;                &lt;/Text&gt;&#13;&#10;            &lt;/Box&gt;&#13;&#10;&#13;&#10;        &lt;/Box&gt;&#13;&#10;    &lt;/Box&gt;&#13;&#10;&#13;&#10;    {/* ===== C · 页脚条 ===== */}&#13;&#10;    &lt;Box style={{ height: 60, flexDirection: 'row', alignItems: 'center', justifyContent: 'space-between' }}&gt;&#13;&#10;        &lt;Text style={{ fontSize: 15, color: '#8A93A6' }}&gt;BestdoriHelper 使用说明&lt;/Text&gt;&#13;&#10;        &lt;Text style={{ fontSize: 15, color: '#8A93A6' }}&gt;06 / 14&lt;/Text&gt;&#13;&#10;    &lt;/Box&gt;&#13;&#10;&#13;&#10;&lt;/Slide&gt;&#13;&#10;"/>
+        <p:cNvPr id="238" name="" descr="&lt;Slide style={{ width: 1280, height: 720, padding: '20px 72px', background: '#F7F8FA', flexDirection: 'column' }}&gt;&#13;&#10;&#13;&#10;    {/* ===== A · 标题块 ===== */}&#13;&#10;    &lt;Box style={{ height: 100, flexDirection: 'row', alignItems: 'center', gap: 16 }}&gt;&#13;&#10;        &lt;Box style={{ width: 6, height: 38, background: '#E8478B', borderRadius: 3 }} /&gt;&#13;&#10;        &lt;Text style={{ fontSize: 36, fontWeight: 'bold', color: '#1F2430' }}&gt;&#13;&#10;            第一步 · 导入截图&#13;&#10;        &lt;/Text&gt;&#13;&#10;    &lt;/Box&gt;&#13;&#10;&#13;&#10;    {/* ===== B · 内容区（左大图 58% + 右文字）===== */}&#13;&#10;    &lt;Box style={{ flex: 1, flexDirection: 'row', gap: 32, alignItems: 'center' }}&gt;&#13;&#10;&#13;&#10;        {/* 左：界面截图（比例 = 截图原 2.41:1） */}&#13;&#10;        &lt;Box style={{&#13;&#10;            width: 600, height: 250, borderRadius: 12, overflow: 'hidden',&#13;&#10;            background: '#1F2430', border: '1px solid #2E3442',&#13;&#10;            boxShadow: '0 6px 24px rgba(31,36,48,0.18)',&#13;&#10;        }}&gt;&#13;&#10;            &lt;Image src=&quot;assets/step1_import.png&quot; style={{ width: '100%', height: '100%', objectFit: 'contain' }} /&gt;&#13;&#10;        &lt;/Box&gt;&#13;&#10;&#13;&#10;        {/* 右：要点 */}&#13;&#10;        &lt;Box style={{ flex: 1, flexDirection: 'column', gap: 16 }}&gt;&#13;&#10;&#13;&#10;            &lt;Box style={{&#13;&#10;                background: '#FFFFFF', borderRadius: 12, padding: '16px 22px',&#13;&#10;                flexDirection: 'column', gap: 4, borderLeft: '4px solid #E8478B',&#13;&#10;                boxShadow: '0 2px 12px rgba(31,36,48,0.06)',&#13;&#10;            }}&gt;&#13;&#10;                &lt;Text style={{ fontSize: 21, fontWeight: 'bold', color: '#1F2430' }}&gt;拖进来，或者点一下选&lt;/Text&gt;&#13;&#10;                &lt;Text style={{ fontSize: 17, color: '#5A6376', lineHeight: 1.55 }}&gt;&#13;&#10;                    可以一次选多张，也能直接选整个文件夹。&lt;br /&gt;&#13;&#10;                    图片只在你本机处理，不会上传。&#13;&#10;                &lt;/Text&gt;&#13;&#10;            &lt;/Box&gt;&#13;&#10;&#13;&#10;            &lt;Box style={{&#13;&#10;                background: '#FFFFFF', borderRadius: 12, padding: '16px 22px',&#13;&#10;                flexDirection: 'column', gap: 4, borderLeft: '4px solid #D5DAE4',&#13;&#10;                boxShadow: '0 2px 12px rgba(31,36,48,0.06)',&#13;&#10;            }}&gt;&#13;&#10;                &lt;Text style={{ fontSize: 21, fontWeight: 'bold', color: '#1F2430' }}&gt;切分模式用「自动」&lt;/Text&gt;&#13;&#10;                &lt;Text style={{ fontSize: 17, color: '#5A6376', lineHeight: 1.55 }}&gt;&#13;&#10;                    它会自己数出行数和列数。切得不准时再改成&#13;&#10;                    &lt;br /&gt;&#13;&#10;                    「指定行列」，手动填行、列。&#13;&#10;                &lt;/Text&gt;&#13;&#10;            &lt;/Box&gt;&#13;&#10;&#13;&#10;            &lt;Box style={{&#13;&#10;                background: 'rgba(232,71,139,0.07)', borderRadius: 12, padding: '16px 22px',&#13;&#10;                flexDirection: 'column', gap: 4, borderLeft: '4px solid #E8478B',&#13;&#10;            }}&gt;&#13;&#10;                &lt;Text style={{ fontSize: 21, fontWeight: 'bold', color: '#1F2430' }}&gt;别忘了「卡框贴合」&lt;/Text&gt;&#13;&#10;                &lt;Text style={{ fontSize: 17, color: '#5A6376', lineHeight: 1.55 }}&gt;&#13;&#10;                    默认开着。它让每一格收紧到真正的卡框上，&#13;&#10;                    &lt;br /&gt;&#13;&#10;                    不会把旁边卡面的边切进来 —— 直接决定准不准。&#13;&#10;                &lt;/Text&gt;&#13;&#10;            &lt;/Box&gt;&#13;&#10;&#13;&#10;        &lt;/Box&gt;&#13;&#10;    &lt;/Box&gt;&#13;&#10;&#13;&#10;    {/* ===== C · 页脚条 ===== */}&#13;&#10;    &lt;Box style={{ height: 60, flexDirection: 'row', alignItems: 'center', justifyContent: 'space-between' }}&gt;&#13;&#10;        &lt;Text style={{ fontSize: 15, color: '#8A93A6' }}&gt;BestdoriHelper 使用说明&lt;/Text&gt;&#13;&#10;        &lt;Text style={{ fontSize: 15, color: '#8A93A6' }}&gt;06 / 15&lt;/Text&gt;&#13;&#10;    &lt;/Box&gt;&#13;&#10;&#13;&#10;&lt;/Slide&gt;&#13;&#10;"/>
         <p:cNvGrpSpPr/>
         <p:nvPr/>
       </p:nvGrpSpPr>
@@ -9192,7 +9849,7 @@
       </p:grpSpPr>
       <p:sp>
         <p:nvSpPr>
-          <p:cNvPr id="218" name=""/>
+          <p:cNvPr id="239" name=""/>
           <p:cNvSpPr/>
           <p:nvPr/>
         </p:nvSpPr>
@@ -9216,7 +9873,7 @@
       </p:sp>
       <p:sp>
         <p:nvSpPr>
-          <p:cNvPr id="219" name=""/>
+          <p:cNvPr id="240" name=""/>
           <p:cNvSpPr/>
           <p:nvPr/>
         </p:nvSpPr>
@@ -9242,7 +9899,7 @@
       </p:sp>
       <p:sp>
         <p:nvSpPr>
-          <p:cNvPr id="220" name="" descr="{&quot;isTemplate&quot;:true,&quot;type&quot;:&quot;text&quot;}"/>
+          <p:cNvPr id="241" name="" descr="{&quot;isTemplate&quot;:true,&quot;type&quot;:&quot;text&quot;}"/>
           <p:cNvSpPr txBox="1"/>
           <p:nvPr/>
         </p:nvSpPr>
@@ -9279,7 +9936,7 @@
                 <a:latin typeface="Microsoft YaHei"/>
                 <a:ea typeface="Microsoft YaHei"/>
               </a:rPr>
-              <a:t> · </a:t>
+              <a:t xml:space="preserve"> · </a:t>
             </a:r>
             <a:r>
               <a:rPr lang="zh-CN" sz="2700" b="1">
@@ -9297,7 +9954,7 @@
       </p:sp>
       <p:sp>
         <p:nvSpPr>
-          <p:cNvPr id="221" name=""/>
+          <p:cNvPr id="242" name=""/>
           <p:cNvSpPr/>
           <p:nvPr/>
         </p:nvSpPr>
@@ -9335,7 +9992,7 @@
       </p:sp>
       <p:pic>
         <p:nvPicPr>
-          <p:cNvPr id="222" name=""/>
+          <p:cNvPr id="243" name=""/>
           <p:cNvPicPr>
             <a:picLocks noChangeAspect="1"/>
           </p:cNvPicPr>
@@ -9343,7 +10000,7 @@
         </p:nvPicPr>
         <p:blipFill>
           <a:blip r:embed="rId1"/>
-          <a:srcRect l="238" t="0" r="238" b="0"/>
+          <a:srcRect l="8430" t="0" r="8430" b="0"/>
           <a:stretch>
             <a:fillRect/>
           </a:stretch>
@@ -9400,7 +10057,7 @@
       </p:pic>
       <p:sp>
         <p:nvSpPr>
-          <p:cNvPr id="223" name=""/>
+          <p:cNvPr id="244" name=""/>
           <p:cNvSpPr/>
           <p:nvPr/>
         </p:nvSpPr>
@@ -9433,7 +10090,7 @@
       </p:sp>
       <p:sp>
         <p:nvSpPr>
-          <p:cNvPr id="224" name=""/>
+          <p:cNvPr id="245" name=""/>
           <p:cNvSpPr/>
           <p:nvPr/>
         </p:nvSpPr>
@@ -9490,7 +10147,7 @@
       </p:sp>
       <p:sp>
         <p:nvSpPr>
-          <p:cNvPr id="225" name="" descr="{&quot;isTemplate&quot;:true,&quot;type&quot;:&quot;text&quot;}"/>
+          <p:cNvPr id="246" name="" descr="{&quot;isTemplate&quot;:true,&quot;type&quot;:&quot;text&quot;}"/>
           <p:cNvSpPr txBox="1"/>
           <p:nvPr/>
         </p:nvSpPr>
@@ -9525,7 +10182,7 @@
       </p:sp>
       <p:sp>
         <p:nvSpPr>
-          <p:cNvPr id="226" name="" descr="{&quot;isTemplate&quot;:true,&quot;type&quot;:&quot;text&quot;}"/>
+          <p:cNvPr id="247" name="" descr="{&quot;isTemplate&quot;:true,&quot;type&quot;:&quot;text&quot;}"/>
           <p:cNvSpPr txBox="1"/>
           <p:nvPr/>
         </p:nvSpPr>
@@ -9578,7 +10235,7 @@
       </p:sp>
       <p:sp>
         <p:nvSpPr>
-          <p:cNvPr id="227" name=""/>
+          <p:cNvPr id="248" name=""/>
           <p:cNvSpPr/>
           <p:nvPr/>
         </p:nvSpPr>
@@ -9611,7 +10268,7 @@
       </p:sp>
       <p:sp>
         <p:nvSpPr>
-          <p:cNvPr id="228" name=""/>
+          <p:cNvPr id="249" name=""/>
           <p:cNvSpPr/>
           <p:nvPr/>
         </p:nvSpPr>
@@ -9668,7 +10325,7 @@
       </p:sp>
       <p:sp>
         <p:nvSpPr>
-          <p:cNvPr id="229" name="" descr="{&quot;isTemplate&quot;:true,&quot;type&quot;:&quot;text&quot;}"/>
+          <p:cNvPr id="250" name="" descr="{&quot;isTemplate&quot;:true,&quot;type&quot;:&quot;text&quot;}"/>
           <p:cNvSpPr txBox="1"/>
           <p:nvPr/>
         </p:nvSpPr>
@@ -9703,7 +10360,7 @@
       </p:sp>
       <p:sp>
         <p:nvSpPr>
-          <p:cNvPr id="230" name="" descr="{&quot;isTemplate&quot;:true,&quot;type&quot;:&quot;text&quot;}"/>
+          <p:cNvPr id="251" name="" descr="{&quot;isTemplate&quot;:true,&quot;type&quot;:&quot;text&quot;}"/>
           <p:cNvSpPr txBox="1"/>
           <p:nvPr/>
         </p:nvSpPr>
@@ -9756,7 +10413,7 @@
       </p:sp>
       <p:sp>
         <p:nvSpPr>
-          <p:cNvPr id="231" name=""/>
+          <p:cNvPr id="252" name=""/>
           <p:cNvSpPr/>
           <p:nvPr/>
         </p:nvSpPr>
@@ -9784,7 +10441,7 @@
       </p:sp>
       <p:sp>
         <p:nvSpPr>
-          <p:cNvPr id="232" name=""/>
+          <p:cNvPr id="253" name=""/>
           <p:cNvSpPr/>
           <p:nvPr/>
         </p:nvSpPr>
@@ -9841,7 +10498,7 @@
       </p:sp>
       <p:sp>
         <p:nvSpPr>
-          <p:cNvPr id="233" name="" descr="{&quot;isTemplate&quot;:true,&quot;type&quot;:&quot;text&quot;}"/>
+          <p:cNvPr id="254" name="" descr="{&quot;isTemplate&quot;:true,&quot;type&quot;:&quot;text&quot;}"/>
           <p:cNvSpPr txBox="1"/>
           <p:nvPr/>
         </p:nvSpPr>
@@ -9876,7 +10533,7 @@
       </p:sp>
       <p:sp>
         <p:nvSpPr>
-          <p:cNvPr id="234" name="" descr="{&quot;isTemplate&quot;:true,&quot;type&quot;:&quot;text&quot;}"/>
+          <p:cNvPr id="255" name="" descr="{&quot;isTemplate&quot;:true,&quot;type&quot;:&quot;text&quot;}"/>
           <p:cNvSpPr txBox="1"/>
           <p:nvPr/>
         </p:nvSpPr>
@@ -9931,7 +10588,7 @@
                 <a:latin typeface="Microsoft YaHei"/>
                 <a:ea typeface="Microsoft YaHei"/>
               </a:rPr>
-              <a:t> —— </a:t>
+              <a:t xml:space="preserve"> —— </a:t>
             </a:r>
             <a:r>
               <a:rPr lang="zh-CN" sz="1275">
@@ -9949,7 +10606,7 @@
       </p:sp>
       <p:sp>
         <p:nvSpPr>
-          <p:cNvPr id="235" name="" descr="{&quot;isTemplate&quot;:true,&quot;type&quot;:&quot;text&quot;}"/>
+          <p:cNvPr id="256" name="" descr="{&quot;isTemplate&quot;:true,&quot;type&quot;:&quot;text&quot;}"/>
           <p:cNvSpPr txBox="1"/>
           <p:nvPr/>
         </p:nvSpPr>
@@ -9976,7 +10633,7 @@
                 <a:latin typeface="Microsoft YaHei"/>
                 <a:ea typeface="Microsoft YaHei"/>
               </a:rPr>
-              <a:t>BestdoriHelper </a:t>
+              <a:t xml:space="preserve">BestdoriHelper </a:t>
             </a:r>
             <a:r>
               <a:rPr lang="zh-CN" sz="1125">
@@ -9994,7 +10651,7 @@
       </p:sp>
       <p:sp>
         <p:nvSpPr>
-          <p:cNvPr id="236" name="" descr="{&quot;isTemplate&quot;:true,&quot;type&quot;:&quot;text&quot;}"/>
+          <p:cNvPr id="257" name="" descr="{&quot;isTemplate&quot;:true,&quot;type&quot;:&quot;text&quot;}"/>
           <p:cNvSpPr txBox="1"/>
           <p:nvPr/>
         </p:nvSpPr>
@@ -10021,7 +10678,7 @@
                 <a:latin typeface="Microsoft YaHei"/>
                 <a:ea typeface="Microsoft YaHei"/>
               </a:rPr>
-              <a:t>06 / 14</a:t>
+              <a:t>06 / 15</a:t>
             </a:r>
             <a:endParaRPr/>
           </a:p>
@@ -10033,11 +10690,11 @@
 </file>
 
 <file path=ppt/slides/slide7.xml><?xml version="1.0" encoding="utf-8"?>
-<p:sld xmlns:p="http://schemas.openxmlformats.org/presentationml/2006/main" xmlns:r="http://schemas.openxmlformats.org/officeDocument/2006/relationships" xmlns:a="http://schemas.openxmlformats.org/drawingml/2006/main">
+<p:sld xmlns:p="http://schemas.openxmlformats.org/presentationml/2006/main" xmlns:a="http://schemas.openxmlformats.org/drawingml/2006/main" xmlns:r="http://schemas.openxmlformats.org/officeDocument/2006/relationships">
   <p:cSld>
     <p:spTree>
       <p:nvGrpSpPr>
-        <p:cNvPr id="237" name="" descr="&lt;Slide style={{ width: 1280, height: 720, padding: '20px 72px', background: '#F7F8FA', flexDirection: 'column' }}&gt;&#13;&#10;&#13;&#10;    {/* ===== A · 标题块 ===== */}&#13;&#10;    &lt;Box style={{ height: 100, flexDirection: 'row', alignItems: 'center', gap: 16 }}&gt;&#13;&#10;        &lt;Box style={{ width: 6, height: 38, background: '#E8478B', borderRadius: 3 }} /&gt;&#13;&#10;        &lt;Text style={{ fontSize: 36, fontWeight: 'bold', color: '#1F2430' }}&gt;&#13;&#10;            第二步 · 核对与修正&#13;&#10;        &lt;/Text&gt;&#13;&#10;        &lt;Text style={{ fontSize: 19, color: '#8A93A6' }}&gt;这步决定最终准不准&lt;/Text&gt;&#13;&#10;    &lt;/Box&gt;&#13;&#10;&#13;&#10;    {/* ===== B · 内容区（上大图 60% + 下方卡片）===== */}&#13;&#10;    &lt;Box style={{ flex: 1, flexDirection: 'column', gap: 14 }}&gt;&#13;&#10;&#13;&#10;        {/* 上：对照截图（0.98:1 ≈ 正方形，居中） */}&#13;&#10;        &lt;Box style={{&#13;&#10;            width: 400, height: 400, alignSelf: 'center',&#13;&#10;            borderRadius: 12, overflow: 'hidden',&#13;&#10;            background: '#1F2430', border: '1px solid #2E3442',&#13;&#10;            boxShadow: '0 6px 24px rgba(31,36,48,0.18)',&#13;&#10;        }}&gt;&#13;&#10;            &lt;Image src=&quot;assets/step2_compare.png&quot; style={{ width: '100%', height: '100%', objectFit: 'contain' }} /&gt;&#13;&#10;        &lt;/Box&gt;&#13;&#10;&#13;&#10;        {/* 下：三张操作卡 */}&#13;&#10;        &lt;Box style={{ flex: 1, flexDirection: 'row', gap: 14 }}&gt;&#13;&#10;&#13;&#10;            &lt;Box style={{&#13;&#10;                flex: 1, background: '#FFFFFF', borderRadius: 12, padding: '16px 20px',&#13;&#10;                flexDirection: 'column', gap: 6, borderLeft: '4px solid #E8478B',&#13;&#10;                boxShadow: '0 2px 12px rgba(31,36,48,0.06)',&#13;&#10;            }}&gt;&#13;&#10;                &lt;Text style={{ fontSize: 20, fontWeight: 'bold', color: '#1F2430' }}&gt;左右并排，一眼看对不对&lt;/Text&gt;&#13;&#10;                &lt;Text style={{ fontSize: 16, color: '#5A6376', lineHeight: 1.55 }}&gt;&#13;&#10;                    每行左边是截图里那一格，右边是匹配到的卡图。两张长得不一样就是认错了。&#13;&#10;                &lt;/Text&gt;&#13;&#10;            &lt;/Box&gt;&#13;&#10;&#13;&#10;            &lt;Box style={{&#13;&#10;                flex: 1, background: '#FFFFFF', borderRadius: 12, padding: '16px 20px',&#13;&#10;                flexDirection: 'column', gap: 6, borderLeft: '4px solid #D5DAE4',&#13;&#10;                boxShadow: '0 2px 12px rgba(31,36,48,0.06)',&#13;&#10;            }}&gt;&#13;&#10;                &lt;Text style={{ fontSize: 20, fontWeight: 'bold', color: '#1F2430' }}&gt;都不是？搜卡面或输卡号&lt;/Text&gt;&#13;&#10;                &lt;Text style={{ fontSize: 16, color: '#5A6376', lineHeight: 1.55 }}&gt;&#13;&#10;                    点候选卡片直接换；三张都不是，搜全卡池或直接输卡号。&#13;&#10;                &lt;/Text&gt;&#13;&#10;            &lt;/Box&gt;&#13;&#10;&#13;&#10;            &lt;Box style={{&#13;&#10;                flex: 1, background: '#FFFFFF', borderRadius: 12, padding: '16px 20px',&#13;&#10;                flexDirection: 'column', gap: 6, borderLeft: '4px solid #D5DAE4',&#13;&#10;                boxShadow: '0 2px 12px rgba(31,36,48,0.06)',&#13;&#10;            }}&gt;&#13;&#10;                &lt;Text style={{ fontSize: 20, fontWeight: 'bold', color: '#1F2430' }}&gt;拿不准就忽略这一格&lt;/Text&gt;&#13;&#10;                &lt;Text style={{ fontSize: 16, color: '#5A6376', lineHeight: 1.55 }}&gt;&#13;&#10;                    点缩略图能看大图。确实认不出来的格子直接忽略，不会污染清单。&#13;&#10;                &lt;/Text&gt;&#13;&#10;            &lt;/Box&gt;&#13;&#10;&#13;&#10;        &lt;/Box&gt;&#13;&#10;    &lt;/Box&gt;&#13;&#10;&#13;&#10;    {/* ===== C · 页脚条 ===== */}&#13;&#10;    &lt;Box style={{ height: 60, flexDirection: 'row', alignItems: 'center', justifyContent: 'space-between' }}&gt;&#13;&#10;        &lt;Text style={{ fontSize: 15, color: '#8A93A6' }}&gt;BestdoriHelper 使用说明&lt;/Text&gt;&#13;&#10;        &lt;Text style={{ fontSize: 15, color: '#8A93A6' }}&gt;07 / 14&lt;/Text&gt;&#13;&#10;    &lt;/Box&gt;&#13;&#10;&#13;&#10;&lt;/Slide&gt;&#13;&#10;"/>
+        <p:cNvPr id="258" name="" descr="&lt;Slide style={{ width: 1280, height: 720, padding: '20px 72px', background: '#F7F8FA', flexDirection: 'column' }}&gt;&#13;&#10;&#13;&#10;    {/* ===== A · 标题块 ===== */}&#13;&#10;    &lt;Box style={{ height: 100, flexDirection: 'row', alignItems: 'center', gap: 16 }}&gt;&#13;&#10;        &lt;Box style={{ width: 6, height: 38, background: '#E8478B', borderRadius: 3 }} /&gt;&#13;&#10;        &lt;Text style={{ fontSize: 36, fontWeight: 'bold', color: '#1F2430' }}&gt;&#13;&#10;            第二步 · 核对与修正&#13;&#10;        &lt;/Text&gt;&#13;&#10;        &lt;Text style={{ fontSize: 19, color: '#8A93A6' }}&gt;这步决定最终准不准&lt;/Text&gt;&#13;&#10;    &lt;/Box&gt;&#13;&#10;&#13;&#10;    {/* ===== B · 内容区（上大图 60% + 下方卡片）===== */}&#13;&#10;    &lt;Box style={{ flex: 1, flexDirection: 'column', gap: 14 }}&gt;&#13;&#10;&#13;&#10;        {/* 上：对照截图（0.98:1 ≈ 正方形，居中） */}&#13;&#10;        &lt;Box style={{&#13;&#10;            width: 400, height: 400, alignSelf: 'center',&#13;&#10;            borderRadius: 12, overflow: 'hidden',&#13;&#10;            background: '#1F2430', border: '1px solid #2E3442',&#13;&#10;            boxShadow: '0 6px 24px rgba(31,36,48,0.18)',&#13;&#10;        }}&gt;&#13;&#10;            &lt;Image src=&quot;assets/step2_compare.png&quot; style={{ width: '100%', height: '100%', objectFit: 'contain' }} /&gt;&#13;&#10;        &lt;/Box&gt;&#13;&#10;&#13;&#10;        {/* 下：三张操作卡 */}&#13;&#10;        &lt;Box style={{ flex: 1, flexDirection: 'row', gap: 14 }}&gt;&#13;&#10;&#13;&#10;            &lt;Box style={{&#13;&#10;                flex: 1, background: '#FFFFFF', borderRadius: 12, padding: '16px 20px',&#13;&#10;                flexDirection: 'column', gap: 6, borderLeft: '4px solid #E8478B',&#13;&#10;                boxShadow: '0 2px 12px rgba(31,36,48,0.06)',&#13;&#10;            }}&gt;&#13;&#10;                &lt;Text style={{ fontSize: 20, fontWeight: 'bold', color: '#1F2430' }}&gt;左右并排，一眼看对不对&lt;/Text&gt;&#13;&#10;                &lt;Text style={{ fontSize: 16, color: '#5A6376', lineHeight: 1.55 }}&gt;&#13;&#10;                    每行左边是截图里那一格，右边是匹配到的卡图。两张长得不一样就是认错了。&#13;&#10;                &lt;/Text&gt;&#13;&#10;            &lt;/Box&gt;&#13;&#10;&#13;&#10;            &lt;Box style={{&#13;&#10;                flex: 1, background: '#FFFFFF', borderRadius: 12, padding: '16px 20px',&#13;&#10;                flexDirection: 'column', gap: 6, borderLeft: '4px solid #D5DAE4',&#13;&#10;                boxShadow: '0 2px 12px rgba(31,36,48,0.06)',&#13;&#10;            }}&gt;&#13;&#10;                &lt;Text style={{ fontSize: 20, fontWeight: 'bold', color: '#1F2430' }}&gt;都不是？搜卡面或输卡号&lt;/Text&gt;&#13;&#10;                &lt;Text style={{ fontSize: 16, color: '#5A6376', lineHeight: 1.55 }}&gt;&#13;&#10;                    点候选卡片直接换；三张都不是，搜全卡池或直接输卡号。&#13;&#10;                &lt;/Text&gt;&#13;&#10;            &lt;/Box&gt;&#13;&#10;&#13;&#10;            &lt;Box style={{&#13;&#10;                flex: 1, background: '#FFFFFF', borderRadius: 12, padding: '16px 20px',&#13;&#10;                flexDirection: 'column', gap: 6, borderLeft: '4px solid #D5DAE4',&#13;&#10;                boxShadow: '0 2px 12px rgba(31,36,48,0.06)',&#13;&#10;            }}&gt;&#13;&#10;                &lt;Text style={{ fontSize: 20, fontWeight: 'bold', color: '#1F2430' }}&gt;拿不准就忽略这一格&lt;/Text&gt;&#13;&#10;                &lt;Text style={{ fontSize: 16, color: '#5A6376', lineHeight: 1.55 }}&gt;&#13;&#10;                    点缩略图能看大图。确实认不出来的格子直接忽略，不会污染清单。&#13;&#10;                &lt;/Text&gt;&#13;&#10;            &lt;/Box&gt;&#13;&#10;&#13;&#10;        &lt;/Box&gt;&#13;&#10;    &lt;/Box&gt;&#13;&#10;&#13;&#10;    {/* ===== C · 页脚条 ===== */}&#13;&#10;    &lt;Box style={{ height: 60, flexDirection: 'row', alignItems: 'center', justifyContent: 'space-between' }}&gt;&#13;&#10;        &lt;Text style={{ fontSize: 15, color: '#8A93A6' }}&gt;BestdoriHelper 使用说明&lt;/Text&gt;&#13;&#10;        &lt;Text style={{ fontSize: 15, color: '#8A93A6' }}&gt;07 / 15&lt;/Text&gt;&#13;&#10;    &lt;/Box&gt;&#13;&#10;&#13;&#10;&lt;/Slide&gt;&#13;&#10;"/>
         <p:cNvGrpSpPr/>
         <p:nvPr/>
       </p:nvGrpSpPr>
@@ -10051,7 +10708,7 @@
       </p:grpSpPr>
       <p:sp>
         <p:nvSpPr>
-          <p:cNvPr id="238" name=""/>
+          <p:cNvPr id="259" name=""/>
           <p:cNvSpPr/>
           <p:nvPr/>
         </p:nvSpPr>
@@ -10075,7 +10732,7 @@
       </p:sp>
       <p:sp>
         <p:nvSpPr>
-          <p:cNvPr id="239" name=""/>
+          <p:cNvPr id="260" name=""/>
           <p:cNvSpPr/>
           <p:nvPr/>
         </p:nvSpPr>
@@ -10101,7 +10758,7 @@
       </p:sp>
       <p:sp>
         <p:nvSpPr>
-          <p:cNvPr id="240" name="" descr="{&quot;isTemplate&quot;:true,&quot;type&quot;:&quot;text&quot;}"/>
+          <p:cNvPr id="261" name="" descr="{&quot;isTemplate&quot;:true,&quot;type&quot;:&quot;text&quot;}"/>
           <p:cNvSpPr txBox="1"/>
           <p:nvPr/>
         </p:nvSpPr>
@@ -10138,7 +10795,7 @@
                 <a:latin typeface="Microsoft YaHei"/>
                 <a:ea typeface="Microsoft YaHei"/>
               </a:rPr>
-              <a:t> · </a:t>
+              <a:t xml:space="preserve"> · </a:t>
             </a:r>
             <a:r>
               <a:rPr lang="zh-CN" sz="2700" b="1">
@@ -10156,7 +10813,7 @@
       </p:sp>
       <p:sp>
         <p:nvSpPr>
-          <p:cNvPr id="241" name="" descr="{&quot;isTemplate&quot;:true,&quot;type&quot;:&quot;text&quot;}"/>
+          <p:cNvPr id="262" name="" descr="{&quot;isTemplate&quot;:true,&quot;type&quot;:&quot;text&quot;}"/>
           <p:cNvSpPr txBox="1"/>
           <p:nvPr/>
         </p:nvSpPr>
@@ -10191,7 +10848,7 @@
       </p:sp>
       <p:sp>
         <p:nvSpPr>
-          <p:cNvPr id="242" name=""/>
+          <p:cNvPr id="263" name=""/>
           <p:cNvSpPr/>
           <p:nvPr/>
         </p:nvSpPr>
@@ -10229,7 +10886,7 @@
       </p:sp>
       <p:pic>
         <p:nvPicPr>
-          <p:cNvPr id="243" name=""/>
+          <p:cNvPr id="264" name=""/>
           <p:cNvPicPr>
             <a:picLocks noChangeAspect="1"/>
           </p:cNvPicPr>
@@ -10294,7 +10951,7 @@
       </p:pic>
       <p:sp>
         <p:nvSpPr>
-          <p:cNvPr id="244" name=""/>
+          <p:cNvPr id="265" name=""/>
           <p:cNvSpPr/>
           <p:nvPr/>
         </p:nvSpPr>
@@ -10327,7 +10984,7 @@
       </p:sp>
       <p:sp>
         <p:nvSpPr>
-          <p:cNvPr id="245" name=""/>
+          <p:cNvPr id="266" name=""/>
           <p:cNvSpPr/>
           <p:nvPr/>
         </p:nvSpPr>
@@ -10384,7 +11041,7 @@
       </p:sp>
       <p:sp>
         <p:nvSpPr>
-          <p:cNvPr id="246" name="" descr="{&quot;isTemplate&quot;:true,&quot;type&quot;:&quot;text&quot;}"/>
+          <p:cNvPr id="267" name="" descr="{&quot;isTemplate&quot;:true,&quot;type&quot;:&quot;text&quot;}"/>
           <p:cNvSpPr txBox="1"/>
           <p:nvPr/>
         </p:nvSpPr>
@@ -10419,7 +11076,7 @@
       </p:sp>
       <p:sp>
         <p:nvSpPr>
-          <p:cNvPr id="247" name="" descr="{&quot;isTemplate&quot;:true,&quot;type&quot;:&quot;text&quot;}"/>
+          <p:cNvPr id="268" name="" descr="{&quot;isTemplate&quot;:true,&quot;type&quot;:&quot;text&quot;}"/>
           <p:cNvSpPr txBox="1"/>
           <p:nvPr/>
         </p:nvSpPr>
@@ -10456,7 +11113,7 @@
       </p:sp>
       <p:sp>
         <p:nvSpPr>
-          <p:cNvPr id="248" name=""/>
+          <p:cNvPr id="269" name=""/>
           <p:cNvSpPr/>
           <p:nvPr/>
         </p:nvSpPr>
@@ -10489,7 +11146,7 @@
       </p:sp>
       <p:sp>
         <p:nvSpPr>
-          <p:cNvPr id="249" name=""/>
+          <p:cNvPr id="270" name=""/>
           <p:cNvSpPr/>
           <p:nvPr/>
         </p:nvSpPr>
@@ -10546,7 +11203,7 @@
       </p:sp>
       <p:sp>
         <p:nvSpPr>
-          <p:cNvPr id="250" name="" descr="{&quot;isTemplate&quot;:true,&quot;type&quot;:&quot;text&quot;}"/>
+          <p:cNvPr id="271" name="" descr="{&quot;isTemplate&quot;:true,&quot;type&quot;:&quot;text&quot;}"/>
           <p:cNvSpPr txBox="1"/>
           <p:nvPr/>
         </p:nvSpPr>
@@ -10581,7 +11238,7 @@
       </p:sp>
       <p:sp>
         <p:nvSpPr>
-          <p:cNvPr id="251" name="" descr="{&quot;isTemplate&quot;:true,&quot;type&quot;:&quot;text&quot;}"/>
+          <p:cNvPr id="272" name="" descr="{&quot;isTemplate&quot;:true,&quot;type&quot;:&quot;text&quot;}"/>
           <p:cNvSpPr txBox="1"/>
           <p:nvPr/>
         </p:nvSpPr>
@@ -10618,7 +11275,7 @@
       </p:sp>
       <p:sp>
         <p:nvSpPr>
-          <p:cNvPr id="252" name=""/>
+          <p:cNvPr id="273" name=""/>
           <p:cNvSpPr/>
           <p:nvPr/>
         </p:nvSpPr>
@@ -10651,7 +11308,7 @@
       </p:sp>
       <p:sp>
         <p:nvSpPr>
-          <p:cNvPr id="253" name=""/>
+          <p:cNvPr id="274" name=""/>
           <p:cNvSpPr/>
           <p:nvPr/>
         </p:nvSpPr>
@@ -10708,7 +11365,7 @@
       </p:sp>
       <p:sp>
         <p:nvSpPr>
-          <p:cNvPr id="254" name="" descr="{&quot;isTemplate&quot;:true,&quot;type&quot;:&quot;text&quot;}"/>
+          <p:cNvPr id="275" name="" descr="{&quot;isTemplate&quot;:true,&quot;type&quot;:&quot;text&quot;}"/>
           <p:cNvSpPr txBox="1"/>
           <p:nvPr/>
         </p:nvSpPr>
@@ -10743,7 +11400,7 @@
       </p:sp>
       <p:sp>
         <p:nvSpPr>
-          <p:cNvPr id="255" name="" descr="{&quot;isTemplate&quot;:true,&quot;type&quot;:&quot;text&quot;}"/>
+          <p:cNvPr id="276" name="" descr="{&quot;isTemplate&quot;:true,&quot;type&quot;:&quot;text&quot;}"/>
           <p:cNvSpPr txBox="1"/>
           <p:nvPr/>
         </p:nvSpPr>
@@ -10780,7 +11437,7 @@
       </p:sp>
       <p:sp>
         <p:nvSpPr>
-          <p:cNvPr id="256" name="" descr="{&quot;isTemplate&quot;:true,&quot;type&quot;:&quot;text&quot;}"/>
+          <p:cNvPr id="277" name="" descr="{&quot;isTemplate&quot;:true,&quot;type&quot;:&quot;text&quot;}"/>
           <p:cNvSpPr txBox="1"/>
           <p:nvPr/>
         </p:nvSpPr>
@@ -10807,7 +11464,7 @@
                 <a:latin typeface="Microsoft YaHei"/>
                 <a:ea typeface="Microsoft YaHei"/>
               </a:rPr>
-              <a:t>BestdoriHelper </a:t>
+              <a:t xml:space="preserve">BestdoriHelper </a:t>
             </a:r>
             <a:r>
               <a:rPr lang="zh-CN" sz="1125">
@@ -10825,7 +11482,7 @@
       </p:sp>
       <p:sp>
         <p:nvSpPr>
-          <p:cNvPr id="257" name="" descr="{&quot;isTemplate&quot;:true,&quot;type&quot;:&quot;text&quot;}"/>
+          <p:cNvPr id="278" name="" descr="{&quot;isTemplate&quot;:true,&quot;type&quot;:&quot;text&quot;}"/>
           <p:cNvSpPr txBox="1"/>
           <p:nvPr/>
         </p:nvSpPr>
@@ -10852,7 +11509,7 @@
                 <a:latin typeface="Microsoft YaHei"/>
                 <a:ea typeface="Microsoft YaHei"/>
               </a:rPr>
-              <a:t>07 / 14</a:t>
+              <a:t>07 / 15</a:t>
             </a:r>
             <a:endParaRPr/>
           </a:p>
@@ -10864,11 +11521,11 @@
 </file>
 
 <file path=ppt/slides/slide8.xml><?xml version="1.0" encoding="utf-8"?>
-<p:sld xmlns:p="http://schemas.openxmlformats.org/presentationml/2006/main" xmlns:r="http://schemas.openxmlformats.org/officeDocument/2006/relationships" xmlns:a="http://schemas.openxmlformats.org/drawingml/2006/main">
+<p:sld xmlns:p="http://schemas.openxmlformats.org/presentationml/2006/main" xmlns:a="http://schemas.openxmlformats.org/drawingml/2006/main" xmlns:r="http://schemas.openxmlformats.org/officeDocument/2006/relationships">
   <p:cSld>
     <p:spTree>
       <p:nvGrpSpPr>
-        <p:cNvPr id="258" name="" descr="&lt;Slide style={{ width: 1280, height: 720, padding: '20px 72px', background: '#F7F8FA', flexDirection: 'column' }}&gt;&#13;&#10;&#13;&#10;    {/* ===== A · 标题块 ===== */}&#13;&#10;    &lt;Box style={{ height: 100, flexDirection: 'row', alignItems: 'center', gap: 16 }}&gt;&#13;&#10;        &lt;Box style={{ width: 6, height: 38, background: '#E8478B', borderRadius: 3 }} /&gt;&#13;&#10;        &lt;Text style={{ fontSize: 36, fontWeight: 'bold', color: '#1F2430' }}&gt;&#13;&#10;            第三步 · 卡面清单&#13;&#10;        &lt;/Text&gt;&#13;&#10;    &lt;/Box&gt;&#13;&#10;&#13;&#10;    {/* ===== B · 内容区（左标题栏 32% + 右内容）===== */}&#13;&#10;    &lt;Box style={{ flex: 1, flexDirection: 'row' }}&gt;&#13;&#10;&#13;&#10;        {/* 左：深色标题栏 */}&#13;&#10;        &lt;Box style={{&#13;&#10;            width: 360, background: 'linear-gradient(135deg, #1F2430 0%, #2C3444 100%)',&#13;&#10;            borderRadius: '12px 0 0 12px', padding: '36px 32px',&#13;&#10;            flexDirection: 'column', justifyContent: 'space-between',&#13;&#10;        }}&gt;&#13;&#10;            &lt;Box style={{ flexDirection: 'column', gap: 14 }}&gt;&#13;&#10;                &lt;Text style={{ fontSize: 72, fontWeight: 'bold', color: '#E8478B', lineHeight: 1.0 }}&gt;3&lt;/Text&gt;&#13;&#10;                &lt;Text style={{ fontSize: 30, fontWeight: 'bold', color: '#FFFFFF', lineHeight: 1.25 }}&gt;&#13;&#10;                    清单就是&#13;&#10;                    &lt;br /&gt;&#13;&#10;                    你的卡册&#13;&#10;                &lt;/Text&gt;&#13;&#10;                &lt;Box style={{ width: 44, height: 4, background: '#E8478B', borderRadius: 2 }} /&gt;&#13;&#10;                &lt;Text style={{ fontSize: 18, color: '#8A93A6', lineHeight: 1.6 }}&gt;&#13;&#10;                    确认过的卡会自动汇总，&#13;&#10;                    &lt;br /&gt;&#13;&#10;                    下一步就能导出或同步&#13;&#10;                &lt;/Text&gt;&#13;&#10;            &lt;/Box&gt;&#13;&#10;            &lt;Text style={{ fontSize: 15, color: '#5A6376' }}&gt;网页版 / 手机 / 桌面 都有&lt;/Text&gt;&#13;&#10;        &lt;/Box&gt;&#13;&#10;&#13;&#10;        {/* 右：截图 + 要点 */}&#13;&#10;        &lt;Box style={{&#13;&#10;            flex: 1, background: '#FFFFFF', borderRadius: '0 12px 12px 0',&#13;&#10;            padding: '26px 30px', flexDirection: 'column', gap: 18,&#13;&#10;            boxShadow: '0 2px 12px rgba(31,36,48,0.06)',&#13;&#10;        }}&gt;&#13;&#10;&#13;&#10;            &lt;Box style={{&#13;&#10;                width: 740, height: 149, marginTop: -8,&#13;&#10;                borderRadius: 10, overflow: 'hidden',&#13;&#10;                background: '#1F2430', border: '1px solid #2E3442',&#13;&#10;            }}&gt;&#13;&#10;                &lt;Image src=&quot;assets/step3_inventory.png&quot; style={{ width: '100%', height: '100%', objectFit: 'contain' }} /&gt;&#13;&#10;            &lt;/Box&gt;&#13;&#10;&#13;&#10;            &lt;Box style={{ flex: 1, flexDirection: 'column', gap: 11 }}&gt;&#13;&#10;                &lt;Box style={{ flexDirection: 'row', gap: 12, alignItems: 'flex-start' }}&gt;&#13;&#10;                    &lt;Text style={{ fontSize: 17, color: '#E8478B', fontWeight: 'bold', width: 20 }}&gt;·&lt;/Text&gt;&#13;&#10;                    &lt;Text style={{ fontSize: 18, color: '#5A6376', lineHeight: 1.5 }}&gt;&#13;&#10;                        顶部自动统计：总数、特训后、4★5★、待确认&#13;&#10;                    &lt;/Text&gt;&#13;&#10;                &lt;/Box&gt;&#13;&#10;                &lt;Box style={{ flexDirection: 'row', gap: 12, alignItems: 'flex-start' }}&gt;&#13;&#10;                    &lt;Text style={{ fontSize: 17, color: '#E8478B', fontWeight: 'bold', width: 20 }}&gt;·&lt;/Text&gt;&#13;&#10;                    &lt;Text style={{ fontSize: 18, color: '#5A6376', lineHeight: 1.5 }}&gt;&#13;&#10;                        按卡名 / 角色搜索，也能一键筛出「待确认」&#13;&#10;                    &lt;/Text&gt;&#13;&#10;                &lt;/Box&gt;&#13;&#10;                &lt;Box style={{ flexDirection: 'row', gap: 12, alignItems: 'flex-start' }}&gt;&#13;&#10;                    &lt;Text style={{ fontSize: 17, color: '#E8478B', fontWeight: 'bold', width: 20 }}&gt;·&lt;/Text&gt;&#13;&#10;                    &lt;Text style={{ fontSize: 18, color: '#5A6376', lineHeight: 1.5 }}&gt;&#13;&#10;                        &lt;span style={{ color: '#1F2430', fontWeight: 'bold' }}&gt;拿不准的会被标成「待确认」&lt;/span&gt;&#13;&#10;                        —— 重点检查这些就行&#13;&#10;                    &lt;/Text&gt;&#13;&#10;                &lt;/Box&gt;&#13;&#10;            &lt;/Box&gt;&#13;&#10;&#13;&#10;        &lt;/Box&gt;&#13;&#10;    &lt;/Box&gt;&#13;&#10;&#13;&#10;    {/* ===== C · 页脚条 ===== */}&#13;&#10;    &lt;Box style={{ height: 60, flexDirection: 'row', alignItems: 'center', justifyContent: 'space-between' }}&gt;&#13;&#10;        &lt;Text style={{ fontSize: 15, color: '#8A93A6' }}&gt;BestdoriHelper 使用说明&lt;/Text&gt;&#13;&#10;        &lt;Text style={{ fontSize: 15, color: '#8A93A6' }}&gt;08 / 14&lt;/Text&gt;&#13;&#10;    &lt;/Box&gt;&#13;&#10;&#13;&#10;&lt;/Slide&gt;&#13;&#10;"/>
+        <p:cNvPr id="279" name="" descr="&lt;Slide style={{ width: 1280, height: 720, padding: '20px 72px', background: '#F7F8FA', flexDirection: 'column' }}&gt;&#13;&#10;&#13;&#10;    {/* ===== A · 标题块 ===== */}&#13;&#10;    &lt;Box style={{ height: 100, flexDirection: 'row', alignItems: 'center', gap: 16 }}&gt;&#13;&#10;        &lt;Box style={{ width: 6, height: 38, background: '#E8478B', borderRadius: 3 }} /&gt;&#13;&#10;        &lt;Text style={{ fontSize: 36, fontWeight: 'bold', color: '#1F2430' }}&gt;&#13;&#10;            第三步 · 卡面清单&#13;&#10;        &lt;/Text&gt;&#13;&#10;    &lt;/Box&gt;&#13;&#10;&#13;&#10;    {/* ===== B · 内容区（左标题栏 32% + 右内容）===== */}&#13;&#10;    &lt;Box style={{ flex: 1, flexDirection: 'row' }}&gt;&#13;&#10;&#13;&#10;        {/* 左：深色标题栏 */}&#13;&#10;        &lt;Box style={{&#13;&#10;            width: 360, background: 'linear-gradient(135deg, #1F2430 0%, #2C3444 100%)',&#13;&#10;            borderRadius: '12px 0 0 12px', padding: '36px 32px',&#13;&#10;            flexDirection: 'column', justifyContent: 'space-between',&#13;&#10;        }}&gt;&#13;&#10;            &lt;Box style={{ flexDirection: 'column', gap: 14 }}&gt;&#13;&#10;                &lt;Text style={{ fontSize: 72, fontWeight: 'bold', color: '#E8478B', lineHeight: 1.0 }}&gt;3&lt;/Text&gt;&#13;&#10;                &lt;Text style={{ fontSize: 30, fontWeight: 'bold', color: '#FFFFFF', lineHeight: 1.25 }}&gt;&#13;&#10;                    清单就是&#13;&#10;                    &lt;br /&gt;&#13;&#10;                    你的卡册&#13;&#10;                &lt;/Text&gt;&#13;&#10;                &lt;Box style={{ width: 44, height: 4, background: '#E8478B', borderRadius: 2 }} /&gt;&#13;&#10;                &lt;Text style={{ fontSize: 18, color: '#8A93A6', lineHeight: 1.6 }}&gt;&#13;&#10;                    确认过的卡会自动汇总，&#13;&#10;                    &lt;br /&gt;&#13;&#10;                    下一步就能导出或同步&#13;&#10;                &lt;/Text&gt;&#13;&#10;            &lt;/Box&gt;&#13;&#10;            &lt;Text style={{ fontSize: 15, color: '#5A6376' }}&gt;网页版 / 手机 / 桌面 都有&lt;/Text&gt;&#13;&#10;        &lt;/Box&gt;&#13;&#10;&#13;&#10;        {/* 右：截图 + 要点 */}&#13;&#10;        &lt;Box style={{&#13;&#10;            flex: 1, background: '#FFFFFF', borderRadius: '0 12px 12px 0',&#13;&#10;            padding: '26px 30px', flexDirection: 'column', gap: 18,&#13;&#10;            boxShadow: '0 2px 12px rgba(31,36,48,0.06)',&#13;&#10;        }}&gt;&#13;&#10;&#13;&#10;            &lt;Box style={{&#13;&#10;                width: 740, height: 149, marginTop: -8,&#13;&#10;                borderRadius: 10, overflow: 'hidden',&#13;&#10;                background: '#1F2430', border: '1px solid #2E3442',&#13;&#10;            }}&gt;&#13;&#10;                &lt;Image src=&quot;assets/step3_inventory.png&quot; style={{ width: '100%', height: '100%', objectFit: 'contain' }} /&gt;&#13;&#10;            &lt;/Box&gt;&#13;&#10;&#13;&#10;            &lt;Box style={{ flex: 1, flexDirection: 'column', gap: 11 }}&gt;&#13;&#10;                &lt;Box style={{ flexDirection: 'row', gap: 12, alignItems: 'flex-start' }}&gt;&#13;&#10;                    &lt;Text style={{ fontSize: 17, color: '#E8478B', fontWeight: 'bold', width: 20 }}&gt;·&lt;/Text&gt;&#13;&#10;                    &lt;Text style={{ fontSize: 18, color: '#5A6376', lineHeight: 1.5 }}&gt;&#13;&#10;                        顶部自动统计：总数、特训后、4★5★、待确认&#13;&#10;                    &lt;/Text&gt;&#13;&#10;                &lt;/Box&gt;&#13;&#10;                &lt;Box style={{ flexDirection: 'row', gap: 12, alignItems: 'flex-start' }}&gt;&#13;&#10;                    &lt;Text style={{ fontSize: 17, color: '#E8478B', fontWeight: 'bold', width: 20 }}&gt;·&lt;/Text&gt;&#13;&#10;                    &lt;Text style={{ fontSize: 18, color: '#5A6376', lineHeight: 1.5 }}&gt;&#13;&#10;                        按卡名 / 角色搜索，也能一键筛出「待确认」&#13;&#10;                    &lt;/Text&gt;&#13;&#10;                &lt;/Box&gt;&#13;&#10;                &lt;Box style={{ flexDirection: 'row', gap: 12, alignItems: 'flex-start' }}&gt;&#13;&#10;                    &lt;Text style={{ fontSize: 17, color: '#E8478B', fontWeight: 'bold', width: 20 }}&gt;·&lt;/Text&gt;&#13;&#10;                    &lt;Text style={{ fontSize: 18, color: '#5A6376', lineHeight: 1.5 }}&gt;&#13;&#10;                        &lt;span style={{ color: '#1F2430', fontWeight: 'bold' }}&gt;拿不准的会被标成「待确认」&lt;/span&gt;&#13;&#10;                        —— 重点检查这些就行&#13;&#10;                    &lt;/Text&gt;&#13;&#10;                &lt;/Box&gt;&#13;&#10;            &lt;/Box&gt;&#13;&#10;&#13;&#10;        &lt;/Box&gt;&#13;&#10;    &lt;/Box&gt;&#13;&#10;&#13;&#10;    {/* ===== C · 页脚条 ===== */}&#13;&#10;    &lt;Box style={{ height: 60, flexDirection: 'row', alignItems: 'center', justifyContent: 'space-between' }}&gt;&#13;&#10;        &lt;Text style={{ fontSize: 15, color: '#8A93A6' }}&gt;BestdoriHelper 使用说明&lt;/Text&gt;&#13;&#10;        &lt;Text style={{ fontSize: 15, color: '#8A93A6' }}&gt;08 / 15&lt;/Text&gt;&#13;&#10;    &lt;/Box&gt;&#13;&#10;&#13;&#10;&lt;/Slide&gt;&#13;&#10;"/>
         <p:cNvGrpSpPr/>
         <p:nvPr/>
       </p:nvGrpSpPr>
@@ -10882,7 +11539,7 @@
       </p:grpSpPr>
       <p:sp>
         <p:nvSpPr>
-          <p:cNvPr id="259" name=""/>
+          <p:cNvPr id="280" name=""/>
           <p:cNvSpPr/>
           <p:nvPr/>
         </p:nvSpPr>
@@ -10906,7 +11563,7 @@
       </p:sp>
       <p:sp>
         <p:nvSpPr>
-          <p:cNvPr id="260" name=""/>
+          <p:cNvPr id="281" name=""/>
           <p:cNvSpPr/>
           <p:nvPr/>
         </p:nvSpPr>
@@ -10932,7 +11589,7 @@
       </p:sp>
       <p:sp>
         <p:nvSpPr>
-          <p:cNvPr id="261" name="" descr="{&quot;isTemplate&quot;:true,&quot;type&quot;:&quot;text&quot;}"/>
+          <p:cNvPr id="282" name="" descr="{&quot;isTemplate&quot;:true,&quot;type&quot;:&quot;text&quot;}"/>
           <p:cNvSpPr txBox="1"/>
           <p:nvPr/>
         </p:nvSpPr>
@@ -10969,7 +11626,7 @@
                 <a:latin typeface="Microsoft YaHei"/>
                 <a:ea typeface="Microsoft YaHei"/>
               </a:rPr>
-              <a:t> · </a:t>
+              <a:t xml:space="preserve"> · </a:t>
             </a:r>
             <a:r>
               <a:rPr lang="zh-CN" sz="2700" b="1">
@@ -10987,7 +11644,7 @@
       </p:sp>
       <p:sp>
         <p:nvSpPr>
-          <p:cNvPr id="262" name=""/>
+          <p:cNvPr id="283" name=""/>
           <p:cNvSpPr/>
           <p:nvPr/>
         </p:nvSpPr>
@@ -11054,7 +11711,7 @@
       </p:sp>
       <p:sp>
         <p:nvSpPr>
-          <p:cNvPr id="263" name="" descr="{&quot;isTemplate&quot;:true,&quot;type&quot;:&quot;text&quot;}"/>
+          <p:cNvPr id="284" name="" descr="{&quot;isTemplate&quot;:true,&quot;type&quot;:&quot;text&quot;}"/>
           <p:cNvSpPr txBox="1"/>
           <p:nvPr/>
         </p:nvSpPr>
@@ -11089,7 +11746,7 @@
       </p:sp>
       <p:sp>
         <p:nvSpPr>
-          <p:cNvPr id="264" name="" descr="{&quot;isTemplate&quot;:true,&quot;type&quot;:&quot;text&quot;}"/>
+          <p:cNvPr id="285" name="" descr="{&quot;isTemplate&quot;:true,&quot;type&quot;:&quot;text&quot;}"/>
           <p:cNvSpPr txBox="1"/>
           <p:nvPr/>
         </p:nvSpPr>
@@ -11142,7 +11799,7 @@
       </p:sp>
       <p:sp>
         <p:nvSpPr>
-          <p:cNvPr id="265" name=""/>
+          <p:cNvPr id="286" name=""/>
           <p:cNvSpPr/>
           <p:nvPr/>
         </p:nvSpPr>
@@ -11168,7 +11825,7 @@
       </p:sp>
       <p:sp>
         <p:nvSpPr>
-          <p:cNvPr id="266" name="" descr="{&quot;isTemplate&quot;:true,&quot;type&quot;:&quot;text&quot;}"/>
+          <p:cNvPr id="287" name="" descr="{&quot;isTemplate&quot;:true,&quot;type&quot;:&quot;text&quot;}"/>
           <p:cNvSpPr txBox="1"/>
           <p:nvPr/>
         </p:nvSpPr>
@@ -11221,7 +11878,7 @@
       </p:sp>
       <p:sp>
         <p:nvSpPr>
-          <p:cNvPr id="267" name="" descr="{&quot;isTemplate&quot;:true,&quot;type&quot;:&quot;text&quot;}"/>
+          <p:cNvPr id="288" name="" descr="{&quot;isTemplate&quot;:true,&quot;type&quot;:&quot;text&quot;}"/>
           <p:cNvSpPr txBox="1"/>
           <p:nvPr/>
         </p:nvSpPr>
@@ -11258,7 +11915,7 @@
                 <a:latin typeface="Microsoft YaHei"/>
                 <a:ea typeface="Microsoft YaHei"/>
               </a:rPr>
-              <a:t> / </a:t>
+              <a:t xml:space="preserve"> / </a:t>
             </a:r>
             <a:r>
               <a:rPr lang="zh-CN" sz="1125">
@@ -11278,7 +11935,7 @@
                 <a:latin typeface="Microsoft YaHei"/>
                 <a:ea typeface="Microsoft YaHei"/>
               </a:rPr>
-              <a:t> / </a:t>
+              <a:t xml:space="preserve"> / </a:t>
             </a:r>
             <a:r>
               <a:rPr lang="zh-CN" sz="1125">
@@ -11298,7 +11955,7 @@
                 <a:latin typeface="Microsoft YaHei"/>
                 <a:ea typeface="Microsoft YaHei"/>
               </a:rPr>
-              <a:t> </a:t>
+              <a:t xml:space="preserve"> </a:t>
             </a:r>
             <a:r>
               <a:rPr lang="zh-CN" sz="1125">
@@ -11316,7 +11973,7 @@
       </p:sp>
       <p:sp>
         <p:nvSpPr>
-          <p:cNvPr id="268" name=""/>
+          <p:cNvPr id="289" name=""/>
           <p:cNvSpPr/>
           <p:nvPr/>
         </p:nvSpPr>
@@ -11382,7 +12039,7 @@
       </p:sp>
       <p:sp>
         <p:nvSpPr>
-          <p:cNvPr id="269" name=""/>
+          <p:cNvPr id="290" name=""/>
           <p:cNvSpPr/>
           <p:nvPr/>
         </p:nvSpPr>
@@ -11413,7 +12070,7 @@
       </p:sp>
       <p:pic>
         <p:nvPicPr>
-          <p:cNvPr id="270" name=""/>
+          <p:cNvPr id="291" name=""/>
           <p:cNvPicPr>
             <a:picLocks noChangeAspect="1"/>
           </p:cNvPicPr>
@@ -11478,7 +12135,7 @@
       </p:pic>
       <p:sp>
         <p:nvSpPr>
-          <p:cNvPr id="271" name="" descr="{&quot;isTemplate&quot;:true,&quot;type&quot;:&quot;text&quot;}"/>
+          <p:cNvPr id="292" name="" descr="{&quot;isTemplate&quot;:true,&quot;type&quot;:&quot;text&quot;}"/>
           <p:cNvSpPr txBox="1"/>
           <p:nvPr/>
         </p:nvSpPr>
@@ -11513,7 +12170,7 @@
       </p:sp>
       <p:sp>
         <p:nvSpPr>
-          <p:cNvPr id="272" name="" descr="{&quot;isTemplate&quot;:true,&quot;type&quot;:&quot;text&quot;}"/>
+          <p:cNvPr id="293" name="" descr="{&quot;isTemplate&quot;:true,&quot;type&quot;:&quot;text&quot;}"/>
           <p:cNvSpPr txBox="1"/>
           <p:nvPr/>
         </p:nvSpPr>
@@ -11568,7 +12225,7 @@
       </p:sp>
       <p:sp>
         <p:nvSpPr>
-          <p:cNvPr id="273" name="" descr="{&quot;isTemplate&quot;:true,&quot;type&quot;:&quot;text&quot;}"/>
+          <p:cNvPr id="294" name="" descr="{&quot;isTemplate&quot;:true,&quot;type&quot;:&quot;text&quot;}"/>
           <p:cNvSpPr txBox="1"/>
           <p:nvPr/>
         </p:nvSpPr>
@@ -11603,7 +12260,7 @@
       </p:sp>
       <p:sp>
         <p:nvSpPr>
-          <p:cNvPr id="274" name="" descr="{&quot;isTemplate&quot;:true,&quot;type&quot;:&quot;text&quot;}"/>
+          <p:cNvPr id="295" name="" descr="{&quot;isTemplate&quot;:true,&quot;type&quot;:&quot;text&quot;}"/>
           <p:cNvSpPr txBox="1"/>
           <p:nvPr/>
         </p:nvSpPr>
@@ -11640,7 +12297,7 @@
                 <a:latin typeface="Microsoft YaHei"/>
                 <a:ea typeface="Microsoft YaHei"/>
               </a:rPr>
-              <a:t> / </a:t>
+              <a:t xml:space="preserve"> / </a:t>
             </a:r>
             <a:r>
               <a:rPr lang="zh-CN" sz="1350">
@@ -11658,7 +12315,7 @@
       </p:sp>
       <p:sp>
         <p:nvSpPr>
-          <p:cNvPr id="275" name="" descr="{&quot;isTemplate&quot;:true,&quot;type&quot;:&quot;text&quot;}"/>
+          <p:cNvPr id="296" name="" descr="{&quot;isTemplate&quot;:true,&quot;type&quot;:&quot;text&quot;}"/>
           <p:cNvSpPr txBox="1"/>
           <p:nvPr/>
         </p:nvSpPr>
@@ -11693,7 +12350,7 @@
       </p:sp>
       <p:sp>
         <p:nvSpPr>
-          <p:cNvPr id="276" name="" descr="{&quot;isTemplate&quot;:true,&quot;type&quot;:&quot;text&quot;}"/>
+          <p:cNvPr id="297" name="" descr="{&quot;isTemplate&quot;:true,&quot;type&quot;:&quot;text&quot;}"/>
           <p:cNvSpPr txBox="1"/>
           <p:nvPr/>
         </p:nvSpPr>
@@ -11730,7 +12387,7 @@
                 <a:latin typeface="Microsoft YaHei"/>
                 <a:ea typeface="Microsoft YaHei"/>
               </a:rPr>
-              <a:t>—— </a:t>
+              <a:t xml:space="preserve">—— </a:t>
             </a:r>
             <a:r>
               <a:rPr lang="zh-CN" sz="1350">
@@ -11748,7 +12405,7 @@
       </p:sp>
       <p:sp>
         <p:nvSpPr>
-          <p:cNvPr id="277" name="" descr="{&quot;isTemplate&quot;:true,&quot;type&quot;:&quot;text&quot;}"/>
+          <p:cNvPr id="298" name="" descr="{&quot;isTemplate&quot;:true,&quot;type&quot;:&quot;text&quot;}"/>
           <p:cNvSpPr txBox="1"/>
           <p:nvPr/>
         </p:nvSpPr>
@@ -11775,7 +12432,7 @@
                 <a:latin typeface="Microsoft YaHei"/>
                 <a:ea typeface="Microsoft YaHei"/>
               </a:rPr>
-              <a:t>BestdoriHelper </a:t>
+              <a:t xml:space="preserve">BestdoriHelper </a:t>
             </a:r>
             <a:r>
               <a:rPr lang="zh-CN" sz="1125">
@@ -11793,7 +12450,7 @@
       </p:sp>
       <p:sp>
         <p:nvSpPr>
-          <p:cNvPr id="278" name="" descr="{&quot;isTemplate&quot;:true,&quot;type&quot;:&quot;text&quot;}"/>
+          <p:cNvPr id="299" name="" descr="{&quot;isTemplate&quot;:true,&quot;type&quot;:&quot;text&quot;}"/>
           <p:cNvSpPr txBox="1"/>
           <p:nvPr/>
         </p:nvSpPr>
@@ -11820,7 +12477,7 @@
                 <a:latin typeface="Microsoft YaHei"/>
                 <a:ea typeface="Microsoft YaHei"/>
               </a:rPr>
-              <a:t>08 / 14</a:t>
+              <a:t>08 / 15</a:t>
             </a:r>
             <a:endParaRPr/>
           </a:p>
@@ -11832,11 +12489,11 @@
 </file>
 
 <file path=ppt/slides/slide9.xml><?xml version="1.0" encoding="utf-8"?>
-<p:sld xmlns:p="http://schemas.openxmlformats.org/presentationml/2006/main" xmlns:r="http://schemas.openxmlformats.org/officeDocument/2006/relationships" xmlns:a="http://schemas.openxmlformats.org/drawingml/2006/main">
+<p:sld xmlns:p="http://schemas.openxmlformats.org/presentationml/2006/main" xmlns:a="http://schemas.openxmlformats.org/drawingml/2006/main" xmlns:r="http://schemas.openxmlformats.org/officeDocument/2006/relationships">
   <p:cSld>
     <p:spTree>
       <p:nvGrpSpPr>
-        <p:cNvPr id="279" name="" descr="&lt;Slide style={{ width: 1280, height: 720, padding: '20px 72px', background: '#F7F8FA', flexDirection: 'column' }}&gt;&#13;&#10;&#13;&#10;    {/* ===== A · 标题块 ===== */}&#13;&#10;    &lt;Box style={{ height: 100, flexDirection: 'row', alignItems: 'center', gap: 16 }}&gt;&#13;&#10;        &lt;Box style={{ width: 6, height: 38, background: '#E8478B', borderRadius: 3 }} /&gt;&#13;&#10;        &lt;Text style={{ fontSize: 36, fontWeight: 'bold', color: '#1F2430' }}&gt;&#13;&#10;            第四步 · 导出清单&#13;&#10;        &lt;/Text&gt;&#13;&#10;    &lt;/Box&gt;&#13;&#10;&#13;&#10;    {/* ===== B · 内容区（60:40）===== */}&#13;&#10;    &lt;Box style={{ flex: 1, flexDirection: 'row', gap: 32 }}&gt;&#13;&#10;&#13;&#10;        {/* 左 60%：四种格式 */}&#13;&#10;        &lt;Box style={{ width: 686, flexDirection: 'column', gap: 12 }}&gt;&#13;&#10;&#13;&#10;            &lt;Box style={{&#13;&#10;                background: '#FFFFFF', borderRadius: 12, padding: '15px 24px',&#13;&#10;                flexDirection: 'row', alignItems: 'center', gap: 22,&#13;&#10;                borderLeft: '4px solid #E8478B',&#13;&#10;                boxShadow: '0 2px 12px rgba(31,36,48,0.06)',&#13;&#10;            }}&gt;&#13;&#10;                &lt;Text style={{ fontSize: 23, fontWeight: 'bold', color: '#1F2430', width: 130 }}&gt;CSV&lt;/Text&gt;&#13;&#10;                &lt;Text style={{ fontSize: 18, color: '#5A6376' }}&gt;给 Excel / 表格软件看，想再加工就用它&lt;/Text&gt;&#13;&#10;            &lt;/Box&gt;&#13;&#10;&#13;&#10;            &lt;Box style={{&#13;&#10;                background: '#FFFFFF', borderRadius: 12, padding: '15px 24px',&#13;&#10;                flexDirection: 'row', alignItems: 'center', gap: 22,&#13;&#10;                borderLeft: '4px solid #D5DAE4',&#13;&#10;                boxShadow: '0 2px 12px rgba(31,36,48,0.06)',&#13;&#10;            }}&gt;&#13;&#10;                &lt;Text style={{ fontSize: 23, fontWeight: 'bold', color: '#1F2430', width: 130 }}&gt;ID 列表&lt;/Text&gt;&#13;&#10;                &lt;Text style={{ fontSize: 18, color: '#5A6376' }}&gt;一串卡号，方便扔给别的工具处理&lt;/Text&gt;&#13;&#10;            &lt;/Box&gt;&#13;&#10;&#13;&#10;            &lt;Box style={{&#13;&#10;                background: '#FFFFFF', borderRadius: 12, padding: '15px 24px',&#13;&#10;                flexDirection: 'row', alignItems: 'center', gap: 22,&#13;&#10;                borderLeft: '4px solid #D5DAE4',&#13;&#10;                boxShadow: '0 2px 12px rgba(31,36,48,0.06)',&#13;&#10;            }}&gt;&#13;&#10;                &lt;Text style={{ fontSize: 23, fontWeight: 'bold', color: '#1F2430', width: 130 }}&gt;Markdown&lt;/Text&gt;&#13;&#10;                &lt;Text style={{ fontSize: 18, color: '#5A6376' }}&gt;排版好的表格，直接贴到群里分享&lt;/Text&gt;&#13;&#10;            &lt;/Box&gt;&#13;&#10;&#13;&#10;            &lt;Box style={{&#13;&#10;                background: '#FFFFFF', borderRadius: 12, padding: '15px 24px',&#13;&#10;                flexDirection: 'row', alignItems: 'center', gap: 22,&#13;&#10;                borderLeft: '4px solid #D5DAE4',&#13;&#10;                boxShadow: '0 2px 12px rgba(31,36,48,0.06)',&#13;&#10;            }}&gt;&#13;&#10;                &lt;Text style={{ fontSize: 23, fontWeight: 'bold', color: '#1F2430', width: 130 }}&gt;JSON&lt;/Text&gt;&#13;&#10;                &lt;Text style={{ fontSize: 18, color: '#5A6376' }}&gt;完整数据，给会写脚本的人用&lt;/Text&gt;&#13;&#10;            &lt;/Box&gt;&#13;&#10;&#13;&#10;            {/* 引子：导完还能同步 */}&#13;&#10;            &lt;Box style={{&#13;&#10;                marginTop: 'auto', background: '#1F2430', borderRadius: 12,&#13;&#10;                padding: '15px 24px', flexDirection: 'row', alignItems: 'center', gap: 14,&#13;&#10;            }}&gt;&#13;&#10;                &lt;Box style={{ width: 5, height: 30, background: '#E8478B', borderRadius: 3 }} /&gt;&#13;&#10;                &lt;Text style={{ fontSize: 19, color: '#FFFFFF', lineHeight: 1.5 }}&gt;&#13;&#10;                    导出只是中途站 —— 想写进 Bestdori 的，看下一章&#13;&#10;                &lt;/Text&gt;&#13;&#10;            &lt;/Box&gt;&#13;&#10;&#13;&#10;        &lt;/Box&gt;&#13;&#10;&#13;&#10;        {/* 右 40%：导出区截图 */}&#13;&#10;        &lt;Box style={{&#13;&#10;            flex: 1, flexDirection: 'column', gap: 14,&#13;&#10;        }}&gt;&#13;&#10;            &lt;Box style={{&#13;&#10;                width: '100%', height: 82, borderRadius: 12, overflow: 'hidden',&#13;&#10;                background: '#1F2430', border: '1px solid #2E3442',&#13;&#10;                boxShadow: '0 6px 24px rgba(31,36,48,0.18)',&#13;&#10;            }}&gt;&#13;&#10;                &lt;Image src=&quot;assets/step4_export.png&quot; style={{ width: '100%', height: '100%', objectFit: 'contain' }} /&gt;&#13;&#10;            &lt;/Box&gt;&#13;&#10;            &lt;Text style={{ fontSize: 16, color: '#8A93A6', lineHeight: 1.55, textAlign: 'center' }}&gt;&#13;&#10;                导出按钮就在清单页，&#13;&#10;                &lt;br /&gt;&#13;&#10;                按你下一步要拿它做什么来选格式&#13;&#10;            &lt;/Text&gt;&#13;&#10;        &lt;/Box&gt;&#13;&#10;&#13;&#10;    &lt;/Box&gt;&#13;&#10;&#13;&#10;    {/* ===== C · 页脚条 ===== */}&#13;&#10;    &lt;Box style={{ height: 60, flexDirection: 'row', alignItems: 'center', justifyContent: 'space-between' }}&gt;&#13;&#10;        &lt;Text style={{ fontSize: 15, color: '#8A93A6' }}&gt;BestdoriHelper 使用说明&lt;/Text&gt;&#13;&#10;        &lt;Text style={{ fontSize: 15, color: '#8A93A6' }}&gt;09 / 14&lt;/Text&gt;&#13;&#10;    &lt;/Box&gt;&#13;&#10;&#13;&#10;&lt;/Slide&gt;&#13;&#10;"/>
+        <p:cNvPr id="300" name="" descr="&lt;Slide style={{ width: 1280, height: 720, padding: '20px 72px', background: '#F7F8FA', flexDirection: 'column' }}&gt;&#13;&#10;&#13;&#10;    {/* ===== A · 标题块 ===== */}&#13;&#10;    &lt;Box style={{ height: 100, flexDirection: 'row', alignItems: 'center', gap: 16 }}&gt;&#13;&#10;        &lt;Box style={{ width: 6, height: 38, background: '#E8478B', borderRadius: 3 }} /&gt;&#13;&#10;        &lt;Text style={{ fontSize: 36, fontWeight: 'bold', color: '#1F2430' }}&gt;&#13;&#10;            第四步 · 导出清单&#13;&#10;        &lt;/Text&gt;&#13;&#10;    &lt;/Box&gt;&#13;&#10;&#13;&#10;    {/* ===== B · 内容区（60:40）===== */}&#13;&#10;    &lt;Box style={{ flex: 1, flexDirection: 'row', gap: 32 }}&gt;&#13;&#10;&#13;&#10;        {/* 左 60%：四种格式 */}&#13;&#10;        &lt;Box style={{ width: 686, flexDirection: 'column', gap: 12 }}&gt;&#13;&#10;&#13;&#10;            &lt;Box style={{&#13;&#10;                background: '#FFFFFF', borderRadius: 12, padding: '15px 24px',&#13;&#10;                flexDirection: 'row', alignItems: 'center', gap: 22,&#13;&#10;                borderLeft: '4px solid #E8478B',&#13;&#10;                boxShadow: '0 2px 12px rgba(31,36,48,0.06)',&#13;&#10;            }}&gt;&#13;&#10;                &lt;Text style={{ fontSize: 23, fontWeight: 'bold', color: '#1F2430', width: 130 }}&gt;CSV&lt;/Text&gt;&#13;&#10;                &lt;Text style={{ fontSize: 18, color: '#5A6376' }}&gt;给 Excel / 表格软件看，想再加工就用它&lt;/Text&gt;&#13;&#10;            &lt;/Box&gt;&#13;&#10;&#13;&#10;            &lt;Box style={{&#13;&#10;                background: '#FFFFFF', borderRadius: 12, padding: '15px 24px',&#13;&#10;                flexDirection: 'row', alignItems: 'center', gap: 22,&#13;&#10;                borderLeft: '4px solid #D5DAE4',&#13;&#10;                boxShadow: '0 2px 12px rgba(31,36,48,0.06)',&#13;&#10;            }}&gt;&#13;&#10;                &lt;Text style={{ fontSize: 23, fontWeight: 'bold', color: '#1F2430', width: 130 }}&gt;ID 列表&lt;/Text&gt;&#13;&#10;                &lt;Text style={{ fontSize: 18, color: '#5A6376' }}&gt;一串卡号，方便扔给别的工具处理&lt;/Text&gt;&#13;&#10;            &lt;/Box&gt;&#13;&#10;&#13;&#10;            &lt;Box style={{&#13;&#10;                background: '#FFFFFF', borderRadius: 12, padding: '15px 24px',&#13;&#10;                flexDirection: 'row', alignItems: 'center', gap: 22,&#13;&#10;                borderLeft: '4px solid #D5DAE4',&#13;&#10;                boxShadow: '0 2px 12px rgba(31,36,48,0.06)',&#13;&#10;            }}&gt;&#13;&#10;                &lt;Text style={{ fontSize: 23, fontWeight: 'bold', color: '#1F2430', width: 130 }}&gt;Markdown&lt;/Text&gt;&#13;&#10;                &lt;Text style={{ fontSize: 18, color: '#5A6376' }}&gt;排版好的表格，直接贴到群里分享&lt;/Text&gt;&#13;&#10;            &lt;/Box&gt;&#13;&#10;&#13;&#10;            &lt;Box style={{&#13;&#10;                background: '#FFFFFF', borderRadius: 12, padding: '15px 24px',&#13;&#10;                flexDirection: 'row', alignItems: 'center', gap: 22,&#13;&#10;                borderLeft: '4px solid #D5DAE4',&#13;&#10;                boxShadow: '0 2px 12px rgba(31,36,48,0.06)',&#13;&#10;            }}&gt;&#13;&#10;                &lt;Text style={{ fontSize: 23, fontWeight: 'bold', color: '#1F2430', width: 130 }}&gt;JSON&lt;/Text&gt;&#13;&#10;                &lt;Text style={{ fontSize: 18, color: '#5A6376' }}&gt;完整数据，给会写脚本的人用&lt;/Text&gt;&#13;&#10;            &lt;/Box&gt;&#13;&#10;&#13;&#10;            {/* 引子：导完还能同步 */}&#13;&#10;            &lt;Box style={{&#13;&#10;                marginTop: 'auto', background: '#1F2430', borderRadius: 12,&#13;&#10;                padding: '15px 24px', flexDirection: 'row', alignItems: 'center', gap: 14,&#13;&#10;            }}&gt;&#13;&#10;                &lt;Box style={{ width: 5, height: 30, background: '#E8478B', borderRadius: 3 }} /&gt;&#13;&#10;                &lt;Text style={{ fontSize: 19, color: '#FFFFFF', lineHeight: 1.5 }}&gt;&#13;&#10;                    导出只是中途站 —— 想写进 Bestdori 的，看下一章&#13;&#10;                &lt;/Text&gt;&#13;&#10;            &lt;/Box&gt;&#13;&#10;&#13;&#10;        &lt;/Box&gt;&#13;&#10;&#13;&#10;        {/* 右 40%：导出区截图 */}&#13;&#10;        &lt;Box style={{&#13;&#10;            flex: 1, flexDirection: 'column', gap: 14,&#13;&#10;        }}&gt;&#13;&#10;            &lt;Box style={{&#13;&#10;                width: '100%', height: 82, borderRadius: 12, overflow: 'hidden',&#13;&#10;                background: '#1F2430', border: '1px solid #2E3442',&#13;&#10;                boxShadow: '0 6px 24px rgba(31,36,48,0.18)',&#13;&#10;            }}&gt;&#13;&#10;                &lt;Image src=&quot;assets/step4_export.png&quot; style={{ width: '100%', height: '100%', objectFit: 'contain' }} /&gt;&#13;&#10;            &lt;/Box&gt;&#13;&#10;            &lt;Text style={{ fontSize: 16, color: '#8A93A6', lineHeight: 1.55, textAlign: 'center' }}&gt;&#13;&#10;                导出按钮就在清单页，&#13;&#10;                &lt;br /&gt;&#13;&#10;                按你下一步要拿它做什么来选格式&#13;&#10;            &lt;/Text&gt;&#13;&#10;        &lt;/Box&gt;&#13;&#10;&#13;&#10;    &lt;/Box&gt;&#13;&#10;&#13;&#10;    {/* ===== C · 页脚条 ===== */}&#13;&#10;    &lt;Box style={{ height: 60, flexDirection: 'row', alignItems: 'center', justifyContent: 'space-between' }}&gt;&#13;&#10;        &lt;Text style={{ fontSize: 15, color: '#8A93A6' }}&gt;BestdoriHelper 使用说明&lt;/Text&gt;&#13;&#10;        &lt;Text style={{ fontSize: 15, color: '#8A93A6' }}&gt;09 / 15&lt;/Text&gt;&#13;&#10;    &lt;/Box&gt;&#13;&#10;&#13;&#10;&lt;/Slide&gt;&#13;&#10;"/>
         <p:cNvGrpSpPr/>
         <p:nvPr/>
       </p:nvGrpSpPr>
@@ -11850,7 +12507,7 @@
       </p:grpSpPr>
       <p:sp>
         <p:nvSpPr>
-          <p:cNvPr id="280" name=""/>
+          <p:cNvPr id="301" name=""/>
           <p:cNvSpPr/>
           <p:nvPr/>
         </p:nvSpPr>
@@ -11874,7 +12531,7 @@
       </p:sp>
       <p:sp>
         <p:nvSpPr>
-          <p:cNvPr id="281" name=""/>
+          <p:cNvPr id="302" name=""/>
           <p:cNvSpPr/>
           <p:nvPr/>
         </p:nvSpPr>
@@ -11900,7 +12557,7 @@
       </p:sp>
       <p:sp>
         <p:nvSpPr>
-          <p:cNvPr id="282" name="" descr="{&quot;isTemplate&quot;:true,&quot;type&quot;:&quot;text&quot;}"/>
+          <p:cNvPr id="303" name="" descr="{&quot;isTemplate&quot;:true,&quot;type&quot;:&quot;text&quot;}"/>
           <p:cNvSpPr txBox="1"/>
           <p:nvPr/>
         </p:nvSpPr>
@@ -11937,7 +12594,7 @@
                 <a:latin typeface="Microsoft YaHei"/>
                 <a:ea typeface="Microsoft YaHei"/>
               </a:rPr>
-              <a:t> · </a:t>
+              <a:t xml:space="preserve"> · </a:t>
             </a:r>
             <a:r>
               <a:rPr lang="zh-CN" sz="2700" b="1">
@@ -11955,7 +12612,7 @@
       </p:sp>
       <p:sp>
         <p:nvSpPr>
-          <p:cNvPr id="283" name=""/>
+          <p:cNvPr id="304" name=""/>
           <p:cNvSpPr/>
           <p:nvPr/>
         </p:nvSpPr>
@@ -11988,7 +12645,7 @@
       </p:sp>
       <p:sp>
         <p:nvSpPr>
-          <p:cNvPr id="284" name=""/>
+          <p:cNvPr id="305" name=""/>
           <p:cNvSpPr/>
           <p:nvPr/>
         </p:nvSpPr>
@@ -12045,7 +12702,7 @@
       </p:sp>
       <p:sp>
         <p:nvSpPr>
-          <p:cNvPr id="285" name="" descr="{&quot;isTemplate&quot;:true,&quot;type&quot;:&quot;text&quot;}"/>
+          <p:cNvPr id="306" name="" descr="{&quot;isTemplate&quot;:true,&quot;type&quot;:&quot;text&quot;}"/>
           <p:cNvSpPr txBox="1"/>
           <p:nvPr/>
         </p:nvSpPr>
@@ -12080,7 +12737,7 @@
       </p:sp>
       <p:sp>
         <p:nvSpPr>
-          <p:cNvPr id="286" name="" descr="{&quot;isTemplate&quot;:true,&quot;type&quot;:&quot;text&quot;}"/>
+          <p:cNvPr id="307" name="" descr="{&quot;isTemplate&quot;:true,&quot;type&quot;:&quot;text&quot;}"/>
           <p:cNvSpPr txBox="1"/>
           <p:nvPr/>
         </p:nvSpPr>
@@ -12117,7 +12774,7 @@
                 <a:latin typeface="Microsoft YaHei"/>
                 <a:ea typeface="Microsoft YaHei"/>
               </a:rPr>
-              <a:t> Excel / </a:t>
+              <a:t xml:space="preserve"> Excel / </a:t>
             </a:r>
             <a:r>
               <a:rPr lang="zh-CN" sz="1350">
@@ -12135,7 +12792,7 @@
       </p:sp>
       <p:sp>
         <p:nvSpPr>
-          <p:cNvPr id="287" name=""/>
+          <p:cNvPr id="308" name=""/>
           <p:cNvSpPr/>
           <p:nvPr/>
         </p:nvSpPr>
@@ -12168,7 +12825,7 @@
       </p:sp>
       <p:sp>
         <p:nvSpPr>
-          <p:cNvPr id="288" name=""/>
+          <p:cNvPr id="309" name=""/>
           <p:cNvSpPr/>
           <p:nvPr/>
         </p:nvSpPr>
@@ -12225,7 +12882,7 @@
       </p:sp>
       <p:sp>
         <p:nvSpPr>
-          <p:cNvPr id="289" name="" descr="{&quot;isTemplate&quot;:true,&quot;type&quot;:&quot;text&quot;}"/>
+          <p:cNvPr id="310" name="" descr="{&quot;isTemplate&quot;:true,&quot;type&quot;:&quot;text&quot;}"/>
           <p:cNvSpPr txBox="1"/>
           <p:nvPr/>
         </p:nvSpPr>
@@ -12252,7 +12909,7 @@
                 <a:latin typeface="Microsoft YaHei"/>
                 <a:ea typeface="Microsoft YaHei"/>
               </a:rPr>
-              <a:t>ID </a:t>
+              <a:t xml:space="preserve">ID </a:t>
             </a:r>
             <a:r>
               <a:rPr lang="zh-CN" sz="1725" b="1">
@@ -12270,7 +12927,7 @@
       </p:sp>
       <p:sp>
         <p:nvSpPr>
-          <p:cNvPr id="290" name="" descr="{&quot;isTemplate&quot;:true,&quot;type&quot;:&quot;text&quot;}"/>
+          <p:cNvPr id="311" name="" descr="{&quot;isTemplate&quot;:true,&quot;type&quot;:&quot;text&quot;}"/>
           <p:cNvSpPr txBox="1"/>
           <p:nvPr/>
         </p:nvSpPr>
@@ -12305,7 +12962,7 @@
       </p:sp>
       <p:sp>
         <p:nvSpPr>
-          <p:cNvPr id="291" name=""/>
+          <p:cNvPr id="312" name=""/>
           <p:cNvSpPr/>
           <p:nvPr/>
         </p:nvSpPr>
@@ -12338,7 +12995,7 @@
       </p:sp>
       <p:sp>
         <p:nvSpPr>
-          <p:cNvPr id="292" name=""/>
+          <p:cNvPr id="313" name=""/>
           <p:cNvSpPr/>
           <p:nvPr/>
         </p:nvSpPr>
@@ -12395,7 +13052,7 @@
       </p:sp>
       <p:sp>
         <p:nvSpPr>
-          <p:cNvPr id="293" name="" descr="{&quot;isTemplate&quot;:true,&quot;type&quot;:&quot;text&quot;}"/>
+          <p:cNvPr id="314" name="" descr="{&quot;isTemplate&quot;:true,&quot;type&quot;:&quot;text&quot;}"/>
           <p:cNvSpPr txBox="1"/>
           <p:nvPr/>
         </p:nvSpPr>
@@ -12430,7 +13087,7 @@
       </p:sp>
       <p:sp>
         <p:nvSpPr>
-          <p:cNvPr id="294" name="" descr="{&quot;isTemplate&quot;:true,&quot;type&quot;:&quot;text&quot;}"/>
+          <p:cNvPr id="315" name="" descr="{&quot;isTemplate&quot;:true,&quot;type&quot;:&quot;text&quot;}"/>
           <p:cNvSpPr txBox="1"/>
           <p:nvPr/>
         </p:nvSpPr>
@@ -12465,7 +13122,7 @@
       </p:sp>
       <p:sp>
         <p:nvSpPr>
-          <p:cNvPr id="295" name=""/>
+          <p:cNvPr id="316" name=""/>
           <p:cNvSpPr/>
           <p:nvPr/>
         </p:nvSpPr>
@@ -12498,7 +13155,7 @@
       </p:sp>
       <p:sp>
         <p:nvSpPr>
-          <p:cNvPr id="296" name=""/>
+          <p:cNvPr id="317" name=""/>
           <p:cNvSpPr/>
           <p:nvPr/>
         </p:nvSpPr>
@@ -12555,7 +13212,7 @@
       </p:sp>
       <p:sp>
         <p:nvSpPr>
-          <p:cNvPr id="297" name="" descr="{&quot;isTemplate&quot;:true,&quot;type&quot;:&quot;text&quot;}"/>
+          <p:cNvPr id="318" name="" descr="{&quot;isTemplate&quot;:true,&quot;type&quot;:&quot;text&quot;}"/>
           <p:cNvSpPr txBox="1"/>
           <p:nvPr/>
         </p:nvSpPr>
@@ -12590,7 +13247,7 @@
       </p:sp>
       <p:sp>
         <p:nvSpPr>
-          <p:cNvPr id="298" name="" descr="{&quot;isTemplate&quot;:true,&quot;type&quot;:&quot;text&quot;}"/>
+          <p:cNvPr id="319" name="" descr="{&quot;isTemplate&quot;:true,&quot;type&quot;:&quot;text&quot;}"/>
           <p:cNvSpPr txBox="1"/>
           <p:nvPr/>
         </p:nvSpPr>
@@ -12625,7 +13282,7 @@
       </p:sp>
       <p:sp>
         <p:nvSpPr>
-          <p:cNvPr id="299" name=""/>
+          <p:cNvPr id="320" name=""/>
           <p:cNvSpPr/>
           <p:nvPr/>
         </p:nvSpPr>
@@ -12651,7 +13308,7 @@
       </p:sp>
       <p:sp>
         <p:nvSpPr>
-          <p:cNvPr id="300" name=""/>
+          <p:cNvPr id="321" name=""/>
           <p:cNvSpPr/>
           <p:nvPr/>
         </p:nvSpPr>
@@ -12677,7 +13334,7 @@
       </p:sp>
       <p:sp>
         <p:nvSpPr>
-          <p:cNvPr id="301" name="" descr="{&quot;isTemplate&quot;:true,&quot;type&quot;:&quot;text&quot;}"/>
+          <p:cNvPr id="322" name="" descr="{&quot;isTemplate&quot;:true,&quot;type&quot;:&quot;text&quot;}"/>
           <p:cNvSpPr txBox="1"/>
           <p:nvPr/>
         </p:nvSpPr>
@@ -12714,7 +13371,7 @@
                 <a:latin typeface="Microsoft YaHei"/>
                 <a:ea typeface="Microsoft YaHei"/>
               </a:rPr>
-              <a:t> —— </a:t>
+              <a:t xml:space="preserve"> —— </a:t>
             </a:r>
             <a:r>
               <a:rPr lang="zh-CN" sz="1425">
@@ -12734,7 +13391,7 @@
                 <a:latin typeface="Microsoft YaHei"/>
                 <a:ea typeface="Microsoft YaHei"/>
               </a:rPr>
-              <a:t> Bestdori </a:t>
+              <a:t xml:space="preserve"> Bestdori </a:t>
             </a:r>
             <a:r>
               <a:rPr lang="zh-CN" sz="1425">
@@ -12752,7 +13409,7 @@
       </p:sp>
       <p:sp>
         <p:nvSpPr>
-          <p:cNvPr id="302" name=""/>
+          <p:cNvPr id="323" name=""/>
           <p:cNvSpPr/>
           <p:nvPr/>
         </p:nvSpPr>
@@ -12790,7 +13447,7 @@
       </p:sp>
       <p:pic>
         <p:nvPicPr>
-          <p:cNvPr id="303" name=""/>
+          <p:cNvPr id="324" name=""/>
           <p:cNvPicPr>
             <a:picLocks noChangeAspect="1"/>
           </p:cNvPicPr>
@@ -12855,7 +13512,7 @@
       </p:pic>
       <p:sp>
         <p:nvSpPr>
-          <p:cNvPr id="304" name="" descr="{&quot;isTemplate&quot;:true,&quot;type&quot;:&quot;text&quot;}"/>
+          <p:cNvPr id="325" name="" descr="{&quot;isTemplate&quot;:true,&quot;type&quot;:&quot;text&quot;}"/>
           <p:cNvSpPr txBox="1"/>
           <p:nvPr/>
         </p:nvSpPr>
@@ -12908,7 +13565,7 @@
       </p:sp>
       <p:sp>
         <p:nvSpPr>
-          <p:cNvPr id="305" name="" descr="{&quot;isTemplate&quot;:true,&quot;type&quot;:&quot;text&quot;}"/>
+          <p:cNvPr id="326" name="" descr="{&quot;isTemplate&quot;:true,&quot;type&quot;:&quot;text&quot;}"/>
           <p:cNvSpPr txBox="1"/>
           <p:nvPr/>
         </p:nvSpPr>
@@ -12935,7 +13592,7 @@
                 <a:latin typeface="Microsoft YaHei"/>
                 <a:ea typeface="Microsoft YaHei"/>
               </a:rPr>
-              <a:t>BestdoriHelper </a:t>
+              <a:t xml:space="preserve">BestdoriHelper </a:t>
             </a:r>
             <a:r>
               <a:rPr lang="zh-CN" sz="1125">
@@ -12953,7 +13610,7 @@
       </p:sp>
       <p:sp>
         <p:nvSpPr>
-          <p:cNvPr id="306" name="" descr="{&quot;isTemplate&quot;:true,&quot;type&quot;:&quot;text&quot;}"/>
+          <p:cNvPr id="327" name="" descr="{&quot;isTemplate&quot;:true,&quot;type&quot;:&quot;text&quot;}"/>
           <p:cNvSpPr txBox="1"/>
           <p:nvPr/>
         </p:nvSpPr>
@@ -12980,7 +13637,7 @@
                 <a:latin typeface="Microsoft YaHei"/>
                 <a:ea typeface="Microsoft YaHei"/>
               </a:rPr>
-              <a:t>09 / 14</a:t>
+              <a:t>09 / 15</a:t>
             </a:r>
             <a:endParaRPr/>
           </a:p>
